--- a/soutenance/Ethics_of_AI_Soutenance.pptx
+++ b/soutenance/Ethics_of_AI_Soutenance.pptx
@@ -17,9 +17,10 @@
     <p:sldId id="265" r:id="rId11"/>
     <p:sldId id="266" r:id="rId12"/>
     <p:sldId id="267" r:id="rId13"/>
+    <p:sldId id="268" r:id="rId14"/>
   </p:sldIdLst>
   <p:notesMasterIdLst>
-    <p:notesMasterId r:id="rId14"/>
+    <p:notesMasterId r:id="rId15"/>
   </p:notesMasterIdLst>
   <p:sldSz cx="9144000" cy="5143500"/>
   <p:notesSz cx="5143500" cy="9144000"/>
@@ -118,7 +119,7 @@
   <p:extLst>
     <p:ext uri="{521415D9-36F7-43E2-AB2F-B90AF26B5E84}">
       <p14:sectionLst xmlns:p14="http://schemas.microsoft.com/office/powerpoint/2010/main">
-        <p14:section name="Contexte et biais" id="{8fb80d62-35d9-fbea-e13a-2085aba25bf0}">
+        <p14:section name="Contexte et biais" id="{57db8ce7-a9e5-d584-45d7-225c39112e5f}">
           <p14:sldIdLst>
             <p14:sldId id="256"/>
             <p14:sldId id="257"/>
@@ -126,20 +127,21 @@
             <p14:sldId id="259"/>
           </p14:sldIdLst>
         </p14:section>
-        <p14:section name="Méthode" id="{ff8d1232-ad6a-427c-b38e-3c1b55d2f977}">
+        <p14:section name="Méthode" id="{6b967334-9f6a-1ef7-ca06-d19c307536d1}">
           <p14:sldIdLst>
             <p14:sldId id="260"/>
             <p14:sldId id="261"/>
             <p14:sldId id="262"/>
             <p14:sldId id="263"/>
+            <p14:sldId id="264"/>
           </p14:sldIdLst>
         </p14:section>
-        <p14:section name="Démo et limites" id="{2cd09194-5fd5-d20f-75a7-915170416099}">
+        <p14:section name="Démo et limites" id="{e185050b-b355-42f0-8ed0-f483cb4fab84}">
           <p14:sldIdLst>
-            <p14:sldId id="264"/>
             <p14:sldId id="265"/>
             <p14:sldId id="266"/>
             <p14:sldId id="267"/>
+            <p14:sldId id="268"/>
           </p14:sldIdLst>
         </p14:section>
       </p14:sectionLst>
@@ -634,7 +636,7 @@
           <a:p>
             <a:r>
               <a:rPr lang="en-US" dirty="0"/>
-              <a:t>MATHIS (40 s). En bonus, un widget dans le notebook : on choisit un joueur et une saison, et on compare sa valeur Transfermarkt à la valeur que justifient ses stats. Au-delà de +20 % il est surcoté, en dessous de -20 % sous-coté. [Démo live possible : un joueur connu.]</a:t>
+              <a:t>MATHIS (50 s). Notre vraie paire : Gervinho et Higuaín, mêmes stats, et selon leurs stats aucun des deux ne mérite la short-list. Le modèle biaisé donne 3 % à Gervinho et 60 % à Higuaín : vingt fois plus. Le modèle corrigé leur donne 1 % et 3 % : ils sont traités pareil, et conformément à leur niveau. Comme Simon l'a montré avec SHAP, l'écart du modèle biaisé venait surtout du club, et en partie de la nationalité : Higuaín passe de 60 à 48 % si on lui donne la nationalité ivoirienne.</a:t>
             </a:r>
             <a:endParaRPr lang="en-US" dirty="0"/>
           </a:p>
@@ -722,7 +724,7 @@
           <a:p>
             <a:r>
               <a:rPr lang="en-US" dirty="0"/>
-              <a:t>MATHIS (40 s). On a joué l'adversaire : injection de texte dans le profil, et proxy en plaçant le joueur dans un club brésilien. Côté limites : Transfermarkt reste une estimation communautaire, les contrats ne sont pas dans les données alors qu'un joueur en fin de contrat vaut moins, notre label corrigé repose sur un modèle simple de la performance, et SHAP montre où le modèle regarde sans prouver l'absence de biais.</a:t>
+              <a:t>MATHIS (40 s). En bonus, un widget dans le notebook : on choisit un joueur et une saison, et on compare sa valeur Transfermarkt à la valeur que justifient ses stats. Au-delà de +20 % il est surcoté, en dessous de -20 % sous-coté. Exemple : Haaland 2025/26, 200 millions sur Transfermarkt pour 164 justifiés par ses stats, surcoté de 22 %. [Démo live possible avec un joueur choisi par le prof.]</a:t>
             </a:r>
             <a:endParaRPr lang="en-US" dirty="0"/>
           </a:p>
@@ -810,7 +812,7 @@
           <a:p>
             <a:r>
               <a:rPr lang="en-US" dirty="0"/>
-              <a:t>MATHIS (20 s). Pour conclure : on a mesuré le biais, on l'a réduit sur les données, l'entrée et la sortie, on a choisi le modèle sur un critère qui combine performance et équité, et chaque décision est expliquée. Merci, place aux questions.</a:t>
+              <a:t>MATHIS (40 s). On a joué l'adversaire : injection de texte dans le profil, et proxy en plaçant le joueur dans un club brésilien. Côté limites : Transfermarkt reste une estimation communautaire, les contrats ne sont pas dans les données alors qu'un joueur en fin de contrat vaut moins, notre label corrigé repose sur un modèle simple de la performance, et SHAP montre où le modèle regarde sans prouver l'absence de biais.</a:t>
             </a:r>
             <a:endParaRPr lang="en-US" dirty="0"/>
           </a:p>
@@ -834,6 +836,94 @@
             <a:fld id="{F7021451-1387-4CA6-816F-3879F97B5CBC}" type="slidenum">
               <a:rPr lang="en-US"/>
               <a:t>12</a:t>
+            </a:fld>
+            <a:endParaRPr lang="en-US"/>
+          </a:p>
+        </p:txBody>
+      </p:sp>
+    </p:spTree>
+    <p:extLst>
+      <p:ext uri="{BB962C8B-B14F-4D97-AF65-F5344CB8AC3E}">
+        <p14:creationId xmlns:p14="http://schemas.microsoft.com/office/powerpoint/2010/main" val="1024086991"/>
+      </p:ext>
+    </p:extLst>
+  </p:cSld>
+  <p:clrMapOvr>
+    <a:masterClrMapping/>
+  </p:clrMapOvr>
+</p:notes>
+</file>
+
+<file path=ppt/notesSlides/notesSlide13.xml><?xml version="1.0" encoding="utf-8"?>
+<p:notes xmlns:a="http://schemas.openxmlformats.org/drawingml/2006/main" xmlns:r="http://schemas.openxmlformats.org/officeDocument/2006/relationships" xmlns:p="http://schemas.openxmlformats.org/presentationml/2006/main">
+  <p:cSld>
+    <p:spTree>
+      <p:nvGrpSpPr>
+        <p:cNvPr id="1" name=""/>
+        <p:cNvGrpSpPr/>
+        <p:nvPr/>
+      </p:nvGrpSpPr>
+      <p:grpSpPr>
+        <a:xfrm>
+          <a:off x="0" y="0"/>
+          <a:ext cx="0" cy="0"/>
+          <a:chOff x="0" y="0"/>
+          <a:chExt cx="0" cy="0"/>
+        </a:xfrm>
+      </p:grpSpPr>
+      <p:sp>
+        <p:nvSpPr>
+          <p:cNvPr id="2" name="Slide Image Placeholder 1"/>
+          <p:cNvSpPr>
+            <a:spLocks noGrp="1" noRot="1" noChangeAspect="1"/>
+          </p:cNvSpPr>
+          <p:nvPr>
+            <p:ph type="sldImg"/>
+          </p:nvPr>
+        </p:nvSpPr>
+        <p:spPr/>
+      </p:sp>
+      <p:sp>
+        <p:nvSpPr>
+          <p:cNvPr id="3" name="Notes Placeholder 2"/>
+          <p:cNvSpPr>
+            <a:spLocks noGrp="1"/>
+          </p:cNvSpPr>
+          <p:nvPr>
+            <p:ph type="body" idx="1"/>
+          </p:nvPr>
+        </p:nvSpPr>
+        <p:spPr/>
+        <p:txBody>
+          <a:bodyPr/>
+          <a:lstStyle/>
+          <a:p>
+            <a:r>
+              <a:rPr lang="en-US" dirty="0"/>
+              <a:t>MATHIS (20 s). Pour conclure : on a mesuré le biais, on l'a réduit sur les données, l'entrée et la sortie, on a choisi le modèle sur un critère qui combine performance et équité, et chaque décision est expliquée. Merci, place aux questions.</a:t>
+            </a:r>
+            <a:endParaRPr lang="en-US" dirty="0"/>
+          </a:p>
+        </p:txBody>
+      </p:sp>
+      <p:sp>
+        <p:nvSpPr>
+          <p:cNvPr id="4" name="Slide Number Placeholder 3"/>
+          <p:cNvSpPr>
+            <a:spLocks noGrp="1"/>
+          </p:cNvSpPr>
+          <p:nvPr>
+            <p:ph type="sldNum" sz="quarter" idx="10"/>
+          </p:nvPr>
+        </p:nvSpPr>
+        <p:spPr/>
+        <p:txBody>
+          <a:bodyPr/>
+          <a:lstStyle/>
+          <a:p>
+            <a:fld id="{F7021451-1387-4CA6-816F-3879F97B5CBC}" type="slidenum">
+              <a:rPr lang="en-US"/>
+              <a:t>13</a:t>
             </a:fld>
             <a:endParaRPr lang="en-US"/>
           </a:p>
@@ -1338,7 +1428,7 @@
           <a:p>
             <a:r>
               <a:rPr lang="en-US" dirty="0"/>
-              <a:t>SIMON (60 s). [Chiffres à compléter après le run Colab.] On compare la F1 par rapport au label corrigé, le disparate impact, et l'efficacité : paramètres entraînés et temps d'entraînement. Le critère est explicite : la F1, pénalisée si le disparate impact passe sous 0,8. Point d'honnêteté : les versions corrigées sont notées sur le label qu'elles apprennent, donc on regarde aussi la F1 sur le label historique.</a:t>
+              <a:t>SIMON (50 s). Sur la saison test, LoRA corrigé obtient la meilleure F1, 0,84, avec une AUC de 0,99, en n'entraînant que 2,2 millions de paramètres. Le fine-tuning complet, qui ajuste les 494 millions, fait moins bien : avec peu de données, il surapprend, ce qui rejoint le cours, LoRA est l'outil de choix pour expérimenter. L'élève distillé fait presque aussi bien que son professeur, avec moitié moins de paramètres et une inférence deux fois plus rapide. Tous écrasent le few-shot.</a:t>
             </a:r>
             <a:endParaRPr lang="en-US" dirty="0"/>
           </a:p>
@@ -1426,7 +1516,7 @@
           <a:p>
             <a:r>
               <a:rPr lang="en-US" dirty="0"/>
-              <a:t>SIMON (60 s). Le LLM lit du texte, donc on encode le profil en variables, on les perturbe, on reconstruit un prompt à chaque fois et on lit P(YES). LIME donne les variables qui portent la décision localement, SHAP la contribution de chacune. [Commenter la figure : poids de la nationalité avant, puis après correction.] Limite assumée : une explication n'est pas une justification.</a:t>
+              <a:t>SIMON (60 s). Résultat contre-intuitif, et c'est le cœur éthique du projet. Le modèle corrigé est plus juste au sens du mérite : 88 % d'exactitude, et il ne bouge plus quand on change la nationalité ou le club. Pourtant son disparate impact tombe à 0,62. Pourquoi ? Parce que sur la saison test, les Sud-Américains ont réellement de meilleures stats : un modèle fidèle au mérite les sélectionne plus. Si on veut la parité stricte, on ajoute des seuils par groupe : 0,94 de disparate impact pour seulement un point d'exactitude en moins. Le choix entre égalité des chances et parité n'est pas technique, il est éthique, et on le rend explicite.</a:t>
             </a:r>
             <a:endParaRPr lang="en-US" dirty="0"/>
           </a:p>
@@ -1514,7 +1604,7 @@
           <a:p>
             <a:r>
               <a:rPr lang="en-US" dirty="0"/>
-              <a:t>MATHIS (50 s). Plutôt qu'un profil inventé, on reprend notre vraie paire : Gervinho et Higuaín, mêmes stats. Avec le modèle biaisé, [chiffres] : Higuaín est favorisé. Avec le modèle corrigé, [chiffres] : les deux sont traités de la même façon. Et si on donne à Gervinho la nationalité argentine, sans rien changer d'autre, le modèle biaisé [chiffre] : c'est la preuve que la nationalité seule faisait la différence. SHAP, qu'a montré Simon, explique pourquoi.</a:t>
+              <a:t>SIMON (60 s). SHAP sur le modèle biaisé, pour Gervinho à gauche et Higuaín à droite. Surprise : la nationalité ne pèse presque rien directement. Tout l'écart est dans la valeur de base, qui dépend du club, que nous ne perturbons pas : 0,08 à Parme, 0,77 à la Juventus. Le contrefactuel le confirme : le même joueur passe de 0,01 au Chievo à 0,20 à l'Inter, le club où il y a le plus de Sud-Américains. Le biais passe par un proxy, exactement le piège décrit en cours. Le modèle corrigé, lui, reste autour de 0,02 quel que soit le club ou la nationalité. Petite remarque : LIME attribue un poids à la nationalité même pour le modèle corrigé, alors que sa sortie ne bouge pas, c'est l'approximation locale de LIME, que le cours signale.</a:t>
             </a:r>
             <a:endParaRPr lang="en-US" dirty="0"/>
           </a:p>
@@ -3163,7 +3253,7 @@
                 <a:ea typeface="Calibri" pitchFamily="34" charset="-122"/>
                 <a:cs typeface="Calibri" pitchFamily="34" charset="-120"/>
               </a:rPr>
-              <a:t>09 · BONUS INTERACTIF</a:t>
+              <a:t>09 · DÉMO FINALE</a:t>
             </a:r>
             <a:endParaRPr lang="en-US" sz="1100" dirty="0"/>
           </a:p>
@@ -3204,7 +3294,7 @@
                 <a:ea typeface="Arial Narrow" pitchFamily="34" charset="-122"/>
                 <a:cs typeface="Arial Narrow" pitchFamily="34" charset="-120"/>
               </a:rPr>
-              <a:t>SURCOTÉ OU SOUS-COTÉ ?</a:t>
+              <a:t>GERVINHO CONTRE HIGUAÍN</a:t>
             </a:r>
             <a:endParaRPr lang="en-US" sz="3600" dirty="0"/>
           </a:p>
@@ -3260,7 +3350,7 @@
         <p:spPr>
           <a:xfrm>
             <a:off x="548640" y="1417320"/>
-            <a:ext cx="8046720" cy="640080"/>
+            <a:ext cx="8046720" cy="365760"/>
           </a:xfrm>
           <a:prstGeom prst="rect">
             <a:avLst/>
@@ -3278,13 +3368,13 @@
             <a:r>
               <a:rPr lang="en-US" sz="1600" dirty="0">
                 <a:solidFill>
-                  <a:schemeClr val="bg2"/>
+                  <a:schemeClr val="accent6"/>
                 </a:solidFill>
                 <a:latin typeface="Calibri" pitchFamily="34" charset="0"/>
                 <a:ea typeface="Calibri" pitchFamily="34" charset="-122"/>
                 <a:cs typeface="Calibri" pitchFamily="34" charset="-120"/>
               </a:rPr>
-              <a:t>N'importe quel attaquant, n'importe quelle saison : sa valeur Transfermarkt face à la valeur que justifient ses stats.</a:t>
+              <a:t>Serie A 2019/20 · 6 buts · 4 passes chacun · probabilité d'entrer dans la short-list</a:t>
             </a:r>
             <a:endParaRPr lang="en-US" sz="1600" dirty="0"/>
           </a:p>
@@ -3292,18 +3382,18 @@
       </p:sp>
       <p:sp>
         <p:nvSpPr>
-          <p:cNvPr id="6" name="verdict_0"/>
+          <p:cNvPr id="6" name="demo_0"/>
           <p:cNvSpPr/>
           <p:nvPr/>
         </p:nvSpPr>
         <p:spPr>
           <a:xfrm>
-            <a:off x="548640" y="2286000"/>
-            <a:ext cx="2560320" cy="1371600"/>
+            <a:off x="548640" y="1920240"/>
+            <a:ext cx="3931920" cy="2514600"/>
           </a:xfrm>
           <a:prstGeom prst="roundRect">
             <a:avLst>
-              <a:gd name="adj" fmla="val 5333"/>
+              <a:gd name="adj" fmla="val 2909"/>
             </a:avLst>
           </a:prstGeom>
           <a:solidFill>
@@ -3320,8 +3410,8 @@
         </p:nvSpPr>
         <p:spPr>
           <a:xfrm>
-            <a:off x="731520" y="2395728"/>
-            <a:ext cx="2194560" cy="502920"/>
+            <a:off x="777240" y="2029968"/>
+            <a:ext cx="3474720" cy="457200"/>
           </a:xfrm>
           <a:prstGeom prst="rect">
             <a:avLst/>
@@ -3337,17 +3427,17 @@
               <a:buNone/>
             </a:pPr>
             <a:r>
-              <a:rPr lang="en-US" sz="2600" b="1" dirty="0">
-                <a:solidFill>
-                  <a:schemeClr val="accent3"/>
+              <a:rPr lang="en-US" sz="2800" b="1" dirty="0">
+                <a:solidFill>
+                  <a:schemeClr val="bg1"/>
                 </a:solidFill>
                 <a:latin typeface="Arial Narrow" pitchFamily="34" charset="0"/>
                 <a:ea typeface="Arial Narrow" pitchFamily="34" charset="-122"/>
                 <a:cs typeface="Arial Narrow" pitchFamily="34" charset="-120"/>
               </a:rPr>
-              <a:t>SURCOTÉ</a:t>
-            </a:r>
-            <a:endParaRPr lang="en-US" sz="2600" dirty="0"/>
+              <a:t>GERVINHO</a:t>
+            </a:r>
+            <a:endParaRPr lang="en-US" sz="2800" dirty="0"/>
           </a:p>
         </p:txBody>
       </p:sp>
@@ -3359,8 +3449,8 @@
         </p:nvSpPr>
         <p:spPr>
           <a:xfrm>
-            <a:off x="731520" y="2971800"/>
-            <a:ext cx="2194560" cy="365760"/>
+            <a:off x="777240" y="2487168"/>
+            <a:ext cx="3474720" cy="274320"/>
           </a:xfrm>
           <a:prstGeom prst="rect">
             <a:avLst/>
@@ -3376,34 +3466,229 @@
               <a:buNone/>
             </a:pPr>
             <a:r>
-              <a:rPr lang="en-US" sz="1500" dirty="0">
-                <a:solidFill>
-                  <a:schemeClr val="bg2"/>
+              <a:rPr lang="en-US" sz="1200" dirty="0">
+                <a:solidFill>
+                  <a:schemeClr val="accent6"/>
                 </a:solidFill>
                 <a:latin typeface="Calibri" pitchFamily="34" charset="0"/>
                 <a:ea typeface="Calibri" pitchFamily="34" charset="-122"/>
                 <a:cs typeface="Calibri" pitchFamily="34" charset="-120"/>
               </a:rPr>
-              <a:t>&gt; +20 %</a:t>
-            </a:r>
-            <a:endParaRPr lang="en-US" sz="1500" dirty="0"/>
-          </a:p>
-        </p:txBody>
-      </p:sp>
-      <p:sp>
-        <p:nvSpPr>
-          <p:cNvPr id="9" name="verdict_1"/>
+              <a:t>Côte d'Ivoire · Parme</a:t>
+            </a:r>
+            <a:endParaRPr lang="en-US" sz="1200" dirty="0"/>
+          </a:p>
+        </p:txBody>
+      </p:sp>
+      <p:sp>
+        <p:nvSpPr>
+          <p:cNvPr id="9" name="Text 7"/>
+          <p:cNvSpPr txBox="1"/>
+          <p:nvPr/>
+        </p:nvSpPr>
+        <p:spPr>
+          <a:xfrm>
+            <a:off x="777240" y="2852928"/>
+            <a:ext cx="2194560" cy="365760"/>
+          </a:xfrm>
+          <a:prstGeom prst="rect">
+            <a:avLst/>
+          </a:prstGeom>
+          <a:noFill/>
+          <a:ln/>
+        </p:spPr>
+        <p:txBody>
+          <a:bodyPr wrap="square" lIns="0" tIns="0" rIns="0" bIns="0" rtlCol="0" anchor="ctr"/>
+          <a:lstStyle/>
+          <a:p>
+            <a:pPr indent="0" marL="0">
+              <a:buNone/>
+            </a:pPr>
+            <a:r>
+              <a:rPr lang="en-US" sz="1300" dirty="0">
+                <a:solidFill>
+                  <a:schemeClr val="bg2"/>
+                </a:solidFill>
+                <a:latin typeface="Calibri" pitchFamily="34" charset="0"/>
+                <a:ea typeface="Calibri" pitchFamily="34" charset="-122"/>
+                <a:cs typeface="Calibri" pitchFamily="34" charset="-120"/>
+              </a:rPr>
+              <a:t>Modèle biaisé</a:t>
+            </a:r>
+            <a:endParaRPr lang="en-US" sz="1300" dirty="0"/>
+          </a:p>
+        </p:txBody>
+      </p:sp>
+      <p:sp>
+        <p:nvSpPr>
+          <p:cNvPr id="10" name="Text 8"/>
+          <p:cNvSpPr txBox="1"/>
+          <p:nvPr/>
+        </p:nvSpPr>
+        <p:spPr>
+          <a:xfrm>
+            <a:off x="2971800" y="2852928"/>
+            <a:ext cx="1280160" cy="365760"/>
+          </a:xfrm>
+          <a:prstGeom prst="rect">
+            <a:avLst/>
+          </a:prstGeom>
+          <a:noFill/>
+          <a:ln/>
+        </p:spPr>
+        <p:txBody>
+          <a:bodyPr wrap="square" lIns="0" tIns="0" rIns="0" bIns="0" rtlCol="0" anchor="ctr"/>
+          <a:lstStyle/>
+          <a:p>
+            <a:pPr algn="r" indent="0" marL="0">
+              <a:buNone/>
+            </a:pPr>
+            <a:r>
+              <a:rPr lang="en-US" sz="2600" b="1" dirty="0">
+                <a:solidFill>
+                  <a:schemeClr val="accent3"/>
+                </a:solidFill>
+                <a:latin typeface="Arial Narrow" pitchFamily="34" charset="0"/>
+                <a:ea typeface="Arial Narrow" pitchFamily="34" charset="-122"/>
+                <a:cs typeface="Arial Narrow" pitchFamily="34" charset="-120"/>
+              </a:rPr>
+              <a:t>0,03</a:t>
+            </a:r>
+            <a:endParaRPr lang="en-US" sz="2600" dirty="0"/>
+          </a:p>
+        </p:txBody>
+      </p:sp>
+      <p:sp>
+        <p:nvSpPr>
+          <p:cNvPr id="11" name="Text 9"/>
+          <p:cNvSpPr txBox="1"/>
+          <p:nvPr/>
+        </p:nvSpPr>
+        <p:spPr>
+          <a:xfrm>
+            <a:off x="777240" y="3310128"/>
+            <a:ext cx="2194560" cy="365760"/>
+          </a:xfrm>
+          <a:prstGeom prst="rect">
+            <a:avLst/>
+          </a:prstGeom>
+          <a:noFill/>
+          <a:ln/>
+        </p:spPr>
+        <p:txBody>
+          <a:bodyPr wrap="square" lIns="0" tIns="0" rIns="0" bIns="0" rtlCol="0" anchor="ctr"/>
+          <a:lstStyle/>
+          <a:p>
+            <a:pPr indent="0" marL="0">
+              <a:buNone/>
+            </a:pPr>
+            <a:r>
+              <a:rPr lang="en-US" sz="1300" dirty="0">
+                <a:solidFill>
+                  <a:schemeClr val="bg2"/>
+                </a:solidFill>
+                <a:latin typeface="Calibri" pitchFamily="34" charset="0"/>
+                <a:ea typeface="Calibri" pitchFamily="34" charset="-122"/>
+                <a:cs typeface="Calibri" pitchFamily="34" charset="-120"/>
+              </a:rPr>
+              <a:t>Modèle corrigé</a:t>
+            </a:r>
+            <a:endParaRPr lang="en-US" sz="1300" dirty="0"/>
+          </a:p>
+        </p:txBody>
+      </p:sp>
+      <p:sp>
+        <p:nvSpPr>
+          <p:cNvPr id="12" name="Text 10"/>
+          <p:cNvSpPr txBox="1"/>
+          <p:nvPr/>
+        </p:nvSpPr>
+        <p:spPr>
+          <a:xfrm>
+            <a:off x="2971800" y="3310128"/>
+            <a:ext cx="1280160" cy="365760"/>
+          </a:xfrm>
+          <a:prstGeom prst="rect">
+            <a:avLst/>
+          </a:prstGeom>
+          <a:noFill/>
+          <a:ln/>
+        </p:spPr>
+        <p:txBody>
+          <a:bodyPr wrap="square" lIns="0" tIns="0" rIns="0" bIns="0" rtlCol="0" anchor="ctr"/>
+          <a:lstStyle/>
+          <a:p>
+            <a:pPr algn="r" indent="0" marL="0">
+              <a:buNone/>
+            </a:pPr>
+            <a:r>
+              <a:rPr lang="en-US" sz="2600" b="1" dirty="0">
+                <a:solidFill>
+                  <a:schemeClr val="bg1"/>
+                </a:solidFill>
+                <a:latin typeface="Arial Narrow" pitchFamily="34" charset="0"/>
+                <a:ea typeface="Arial Narrow" pitchFamily="34" charset="-122"/>
+                <a:cs typeface="Arial Narrow" pitchFamily="34" charset="-120"/>
+              </a:rPr>
+              <a:t>0,01</a:t>
+            </a:r>
+            <a:endParaRPr lang="en-US" sz="2600" dirty="0"/>
+          </a:p>
+        </p:txBody>
+      </p:sp>
+      <p:sp>
+        <p:nvSpPr>
+          <p:cNvPr id="13" name="Text 11"/>
+          <p:cNvSpPr txBox="1"/>
+          <p:nvPr/>
+        </p:nvSpPr>
+        <p:spPr>
+          <a:xfrm>
+            <a:off x="777240" y="3840480"/>
+            <a:ext cx="3474720" cy="411480"/>
+          </a:xfrm>
+          <a:prstGeom prst="rect">
+            <a:avLst/>
+          </a:prstGeom>
+          <a:noFill/>
+          <a:ln/>
+        </p:spPr>
+        <p:txBody>
+          <a:bodyPr wrap="square" lIns="0" tIns="0" rIns="0" bIns="0" rtlCol="0" anchor="ctr"/>
+          <a:lstStyle/>
+          <a:p>
+            <a:pPr indent="0" marL="0">
+              <a:buNone/>
+            </a:pPr>
+            <a:r>
+              <a:rPr lang="en-US" sz="1200" i="1" dirty="0">
+                <a:solidFill>
+                  <a:schemeClr val="accent6"/>
+                </a:solidFill>
+                <a:latin typeface="Calibri" pitchFamily="34" charset="0"/>
+                <a:ea typeface="Calibri" pitchFamily="34" charset="-122"/>
+                <a:cs typeface="Calibri" pitchFamily="34" charset="-120"/>
+              </a:rPr>
+              <a:t>Mérite la short-list selon ses stats : non</a:t>
+            </a:r>
+            <a:endParaRPr lang="en-US" sz="1200" dirty="0"/>
+          </a:p>
+        </p:txBody>
+      </p:sp>
+      <p:sp>
+        <p:nvSpPr>
+          <p:cNvPr id="14" name="demo_1"/>
           <p:cNvSpPr/>
           <p:nvPr/>
         </p:nvSpPr>
         <p:spPr>
           <a:xfrm>
-            <a:off x="3291840" y="2286000"/>
-            <a:ext cx="2560320" cy="1371600"/>
+            <a:off x="4663440" y="1920240"/>
+            <a:ext cx="3931920" cy="2514600"/>
           </a:xfrm>
           <a:prstGeom prst="roundRect">
             <a:avLst>
-              <a:gd name="adj" fmla="val 5333"/>
+              <a:gd name="adj" fmla="val 2909"/>
             </a:avLst>
           </a:prstGeom>
           <a:solidFill>
@@ -3414,14 +3699,14 @@
       </p:sp>
       <p:sp>
         <p:nvSpPr>
-          <p:cNvPr id="10" name="Text 8"/>
+          <p:cNvPr id="15" name="Text 13"/>
           <p:cNvSpPr txBox="1"/>
           <p:nvPr/>
         </p:nvSpPr>
         <p:spPr>
           <a:xfrm>
-            <a:off x="3474720" y="2395728"/>
-            <a:ext cx="2194560" cy="502920"/>
+            <a:off x="4892040" y="2029968"/>
+            <a:ext cx="3474720" cy="457200"/>
           </a:xfrm>
           <a:prstGeom prst="rect">
             <a:avLst/>
@@ -3437,7 +3722,7 @@
               <a:buNone/>
             </a:pPr>
             <a:r>
-              <a:rPr lang="en-US" sz="2600" b="1" dirty="0">
+              <a:rPr lang="en-US" sz="2800" b="1" dirty="0">
                 <a:solidFill>
                   <a:schemeClr val="bg1"/>
                 </a:solidFill>
@@ -3445,22 +3730,22 @@
                 <a:ea typeface="Arial Narrow" pitchFamily="34" charset="-122"/>
                 <a:cs typeface="Arial Narrow" pitchFamily="34" charset="-120"/>
               </a:rPr>
-              <a:t>JUSTE PRIX</a:t>
-            </a:r>
-            <a:endParaRPr lang="en-US" sz="2600" dirty="0"/>
-          </a:p>
-        </p:txBody>
-      </p:sp>
-      <p:sp>
-        <p:nvSpPr>
-          <p:cNvPr id="11" name="Text 9"/>
+              <a:t>HIGUAÍN</a:t>
+            </a:r>
+            <a:endParaRPr lang="en-US" sz="2800" dirty="0"/>
+          </a:p>
+        </p:txBody>
+      </p:sp>
+      <p:sp>
+        <p:nvSpPr>
+          <p:cNvPr id="16" name="Text 14"/>
           <p:cNvSpPr txBox="1"/>
           <p:nvPr/>
         </p:nvSpPr>
         <p:spPr>
           <a:xfrm>
-            <a:off x="3474720" y="2971800"/>
-            <a:ext cx="2194560" cy="365760"/>
+            <a:off x="4892040" y="2487168"/>
+            <a:ext cx="3474720" cy="274320"/>
           </a:xfrm>
           <a:prstGeom prst="rect">
             <a:avLst/>
@@ -3476,52 +3761,30 @@
               <a:buNone/>
             </a:pPr>
             <a:r>
-              <a:rPr lang="en-US" sz="1500" dirty="0">
-                <a:solidFill>
-                  <a:schemeClr val="bg2"/>
+              <a:rPr lang="en-US" sz="1200" dirty="0">
+                <a:solidFill>
+                  <a:schemeClr val="accent6"/>
                 </a:solidFill>
                 <a:latin typeface="Calibri" pitchFamily="34" charset="0"/>
                 <a:ea typeface="Calibri" pitchFamily="34" charset="-122"/>
                 <a:cs typeface="Calibri" pitchFamily="34" charset="-120"/>
               </a:rPr>
-              <a:t>± 20 %</a:t>
-            </a:r>
-            <a:endParaRPr lang="en-US" sz="1500" dirty="0"/>
-          </a:p>
-        </p:txBody>
-      </p:sp>
-      <p:sp>
-        <p:nvSpPr>
-          <p:cNvPr id="12" name="verdict_2"/>
-          <p:cNvSpPr/>
-          <p:nvPr/>
-        </p:nvSpPr>
-        <p:spPr>
-          <a:xfrm>
-            <a:off x="6035040" y="2286000"/>
-            <a:ext cx="2560320" cy="1371600"/>
-          </a:xfrm>
-          <a:prstGeom prst="roundRect">
-            <a:avLst>
-              <a:gd name="adj" fmla="val 5333"/>
-            </a:avLst>
-          </a:prstGeom>
-          <a:solidFill>
-            <a:srgbClr val="0F2A0C"/>
-          </a:solidFill>
-          <a:ln/>
-        </p:spPr>
-      </p:sp>
-      <p:sp>
-        <p:nvSpPr>
-          <p:cNvPr id="13" name="Text 11"/>
+              <a:t>Argentine · Juventus</a:t>
+            </a:r>
+            <a:endParaRPr lang="en-US" sz="1200" dirty="0"/>
+          </a:p>
+        </p:txBody>
+      </p:sp>
+      <p:sp>
+        <p:nvSpPr>
+          <p:cNvPr id="17" name="Text 15"/>
           <p:cNvSpPr txBox="1"/>
           <p:nvPr/>
         </p:nvSpPr>
         <p:spPr>
           <a:xfrm>
-            <a:off x="6217920" y="2395728"/>
-            <a:ext cx="2194560" cy="502920"/>
+            <a:off x="4892040" y="2852928"/>
+            <a:ext cx="2194560" cy="365760"/>
           </a:xfrm>
           <a:prstGeom prst="rect">
             <a:avLst/>
@@ -3537,15 +3800,54 @@
               <a:buNone/>
             </a:pPr>
             <a:r>
+              <a:rPr lang="en-US" sz="1300" dirty="0">
+                <a:solidFill>
+                  <a:schemeClr val="bg2"/>
+                </a:solidFill>
+                <a:latin typeface="Calibri" pitchFamily="34" charset="0"/>
+                <a:ea typeface="Calibri" pitchFamily="34" charset="-122"/>
+                <a:cs typeface="Calibri" pitchFamily="34" charset="-120"/>
+              </a:rPr>
+              <a:t>Modèle biaisé</a:t>
+            </a:r>
+            <a:endParaRPr lang="en-US" sz="1300" dirty="0"/>
+          </a:p>
+        </p:txBody>
+      </p:sp>
+      <p:sp>
+        <p:nvSpPr>
+          <p:cNvPr id="18" name="Text 16"/>
+          <p:cNvSpPr txBox="1"/>
+          <p:nvPr/>
+        </p:nvSpPr>
+        <p:spPr>
+          <a:xfrm>
+            <a:off x="7086600" y="2852928"/>
+            <a:ext cx="1280160" cy="365760"/>
+          </a:xfrm>
+          <a:prstGeom prst="rect">
+            <a:avLst/>
+          </a:prstGeom>
+          <a:noFill/>
+          <a:ln/>
+        </p:spPr>
+        <p:txBody>
+          <a:bodyPr wrap="square" lIns="0" tIns="0" rIns="0" bIns="0" rtlCol="0" anchor="ctr"/>
+          <a:lstStyle/>
+          <a:p>
+            <a:pPr algn="r" indent="0" marL="0">
+              <a:buNone/>
+            </a:pPr>
+            <a:r>
               <a:rPr lang="en-US" sz="2600" b="1" dirty="0">
                 <a:solidFill>
-                  <a:schemeClr val="accent6"/>
+                  <a:schemeClr val="accent3"/>
                 </a:solidFill>
                 <a:latin typeface="Arial Narrow" pitchFamily="34" charset="0"/>
                 <a:ea typeface="Arial Narrow" pitchFamily="34" charset="-122"/>
                 <a:cs typeface="Arial Narrow" pitchFamily="34" charset="-120"/>
               </a:rPr>
-              <a:t>SOUS-COTÉ</a:t>
+              <a:t>0,60</a:t>
             </a:r>
             <a:endParaRPr lang="en-US" sz="2600" dirty="0"/>
           </a:p>
@@ -3553,13 +3855,13 @@
       </p:sp>
       <p:sp>
         <p:nvSpPr>
-          <p:cNvPr id="14" name="Text 12"/>
+          <p:cNvPr id="19" name="Text 17"/>
           <p:cNvSpPr txBox="1"/>
           <p:nvPr/>
         </p:nvSpPr>
         <p:spPr>
           <a:xfrm>
-            <a:off x="6217920" y="2971800"/>
+            <a:off x="4892040" y="3310128"/>
             <a:ext cx="2194560" cy="365760"/>
           </a:xfrm>
           <a:prstGeom prst="rect">
@@ -3576,7 +3878,7 @@
               <a:buNone/>
             </a:pPr>
             <a:r>
-              <a:rPr lang="en-US" sz="1500" dirty="0">
+              <a:rPr lang="en-US" sz="1300" dirty="0">
                 <a:solidFill>
                   <a:schemeClr val="bg2"/>
                 </a:solidFill>
@@ -3584,22 +3886,22 @@
                 <a:ea typeface="Calibri" pitchFamily="34" charset="-122"/>
                 <a:cs typeface="Calibri" pitchFamily="34" charset="-120"/>
               </a:rPr>
-              <a:t>&lt; -20 %</a:t>
-            </a:r>
-            <a:endParaRPr lang="en-US" sz="1500" dirty="0"/>
-          </a:p>
-        </p:txBody>
-      </p:sp>
-      <p:sp>
-        <p:nvSpPr>
-          <p:cNvPr id="15" name="Text 13"/>
+              <a:t>Modèle corrigé</a:t>
+            </a:r>
+            <a:endParaRPr lang="en-US" sz="1300" dirty="0"/>
+          </a:p>
+        </p:txBody>
+      </p:sp>
+      <p:sp>
+        <p:nvSpPr>
+          <p:cNvPr id="20" name="Text 18"/>
           <p:cNvSpPr txBox="1"/>
           <p:nvPr/>
         </p:nvSpPr>
         <p:spPr>
           <a:xfrm>
-            <a:off x="548640" y="3886200"/>
-            <a:ext cx="8046720" cy="548640"/>
+            <a:off x="7086600" y="3310128"/>
+            <a:ext cx="1280160" cy="365760"/>
           </a:xfrm>
           <a:prstGeom prst="rect">
             <a:avLst/>
@@ -3611,11 +3913,50 @@
           <a:bodyPr wrap="square" lIns="0" tIns="0" rIns="0" bIns="0" rtlCol="0" anchor="ctr"/>
           <a:lstStyle/>
           <a:p>
+            <a:pPr algn="r" indent="0" marL="0">
+              <a:buNone/>
+            </a:pPr>
+            <a:r>
+              <a:rPr lang="en-US" sz="2600" b="1" dirty="0">
+                <a:solidFill>
+                  <a:schemeClr val="bg1"/>
+                </a:solidFill>
+                <a:latin typeface="Arial Narrow" pitchFamily="34" charset="0"/>
+                <a:ea typeface="Arial Narrow" pitchFamily="34" charset="-122"/>
+                <a:cs typeface="Arial Narrow" pitchFamily="34" charset="-120"/>
+              </a:rPr>
+              <a:t>0,03</a:t>
+            </a:r>
+            <a:endParaRPr lang="en-US" sz="2600" dirty="0"/>
+          </a:p>
+        </p:txBody>
+      </p:sp>
+      <p:sp>
+        <p:nvSpPr>
+          <p:cNvPr id="21" name="Text 19"/>
+          <p:cNvSpPr txBox="1"/>
+          <p:nvPr/>
+        </p:nvSpPr>
+        <p:spPr>
+          <a:xfrm>
+            <a:off x="4892040" y="3840480"/>
+            <a:ext cx="3474720" cy="411480"/>
+          </a:xfrm>
+          <a:prstGeom prst="rect">
+            <a:avLst/>
+          </a:prstGeom>
+          <a:noFill/>
+          <a:ln/>
+        </p:spPr>
+        <p:txBody>
+          <a:bodyPr wrap="square" lIns="0" tIns="0" rIns="0" bIns="0" rtlCol="0" anchor="ctr"/>
+          <a:lstStyle/>
+          <a:p>
             <a:pPr indent="0" marL="0">
               <a:buNone/>
             </a:pPr>
             <a:r>
-              <a:rPr lang="en-US" sz="1300" i="1" dirty="0">
+              <a:rPr lang="en-US" sz="1200" i="1" dirty="0">
                 <a:solidFill>
                   <a:schemeClr val="accent6"/>
                 </a:solidFill>
@@ -3623,9 +3964,9 @@
                 <a:ea typeface="Calibri" pitchFamily="34" charset="-122"/>
                 <a:cs typeface="Calibri" pitchFamily="34" charset="-120"/>
               </a:rPr>
-              <a:t>Le LLM commente le verdict en langage naturel, avec la part de l'écart liée à la prime de la confédération.</a:t>
-            </a:r>
-            <a:endParaRPr lang="en-US" sz="1300" dirty="0"/>
+              <a:t>Mérite la short-list selon ses stats : non</a:t>
+            </a:r>
+            <a:endParaRPr lang="en-US" sz="1200" dirty="0"/>
           </a:p>
         </p:txBody>
       </p:sp>
@@ -3704,10 +4045,10 @@
       </p:grpSpPr>
       <p:sp>
         <p:nvSpPr>
-          <p:cNvPr id="2" name="Text 0"/>
+          <p:cNvPr id="2" name="Text 8"/>
           <p:cNvSpPr/>
           <p:nvPr>
-            <p:ph idx="100" type="body" hasCustomPrompt="1"/>
+            <p:ph idx="108" type="body" hasCustomPrompt="1"/>
           </p:nvPr>
         </p:nvSpPr>
         <p:spPr>
@@ -3731,13 +4072,13 @@
             <a:r>
               <a:rPr lang="en-US" sz="1100" b="1" spc="300" kern="0" dirty="0">
                 <a:solidFill>
-                  <a:schemeClr val="accent1"/>
+                  <a:schemeClr val="accent6"/>
                 </a:solidFill>
                 <a:latin typeface="Calibri" pitchFamily="34" charset="0"/>
                 <a:ea typeface="Calibri" pitchFamily="34" charset="-122"/>
                 <a:cs typeface="Calibri" pitchFamily="34" charset="-120"/>
               </a:rPr>
-              <a:t>10 · RED TEAMING ET LIMITES</a:t>
+              <a:t>10 · BONUS INTERACTIF</a:t>
             </a:r>
             <a:endParaRPr lang="en-US" sz="1100" dirty="0"/>
           </a:p>
@@ -3745,10 +4086,10 @@
       </p:sp>
       <p:sp>
         <p:nvSpPr>
-          <p:cNvPr id="3" name="Text 0"/>
+          <p:cNvPr id="3" name="Text 8"/>
           <p:cNvSpPr/>
           <p:nvPr>
-            <p:ph idx="101" type="title" hasCustomPrompt="1"/>
+            <p:ph idx="109" type="title" hasCustomPrompt="1"/>
           </p:nvPr>
         </p:nvSpPr>
         <p:spPr>
@@ -3772,13 +4113,13 @@
             <a:r>
               <a:rPr lang="en-US" sz="3600" b="1" dirty="0">
                 <a:solidFill>
-                  <a:schemeClr val="tx1"/>
+                  <a:schemeClr val="bg1"/>
                 </a:solidFill>
                 <a:latin typeface="Arial Narrow" pitchFamily="34" charset="0"/>
                 <a:ea typeface="Arial Narrow" pitchFamily="34" charset="-122"/>
                 <a:cs typeface="Arial Narrow" pitchFamily="34" charset="-120"/>
               </a:rPr>
-              <a:t>PENSER COMME L'ADVERSAIRE</a:t>
+              <a:t>SURCOTÉ OU SOUS-COTÉ ?</a:t>
             </a:r>
             <a:endParaRPr lang="en-US" sz="3600" dirty="0"/>
           </a:p>
@@ -3786,10 +4127,10 @@
       </p:sp>
       <p:sp>
         <p:nvSpPr>
-          <p:cNvPr id="4" name="Text 0"/>
+          <p:cNvPr id="4" name="Text 8"/>
           <p:cNvSpPr/>
           <p:nvPr>
-            <p:ph idx="102" type="body" hasCustomPrompt="1"/>
+            <p:ph idx="110" type="body" hasCustomPrompt="1"/>
           </p:nvPr>
         </p:nvSpPr>
         <p:spPr>
@@ -3813,7 +4154,7 @@
             <a:r>
               <a:rPr lang="en-US" sz="1000" dirty="0">
                 <a:solidFill>
-                  <a:schemeClr val="accent5"/>
+                  <a:schemeClr val="accent6"/>
                 </a:solidFill>
                 <a:latin typeface="Calibri" pitchFamily="34" charset="0"/>
                 <a:ea typeface="Calibri" pitchFamily="34" charset="-122"/>
@@ -3834,7 +4175,7 @@
         <p:spPr>
           <a:xfrm>
             <a:off x="548640" y="1417320"/>
-            <a:ext cx="3840480" cy="274320"/>
+            <a:ext cx="8046720" cy="640080"/>
           </a:xfrm>
           <a:prstGeom prst="rect">
             <a:avLst/>
@@ -3850,38 +4191,38 @@
               <a:buNone/>
             </a:pPr>
             <a:r>
-              <a:rPr lang="en-US" sz="1100" b="1" spc="300" kern="0" dirty="0">
-                <a:solidFill>
-                  <a:schemeClr val="accent5"/>
+              <a:rPr lang="en-US" sz="1600" dirty="0">
+                <a:solidFill>
+                  <a:schemeClr val="bg2"/>
                 </a:solidFill>
                 <a:latin typeface="Calibri" pitchFamily="34" charset="0"/>
                 <a:ea typeface="Calibri" pitchFamily="34" charset="-122"/>
                 <a:cs typeface="Calibri" pitchFamily="34" charset="-120"/>
               </a:rPr>
-              <a:t>ATTAQUES TESTÉES</a:t>
-            </a:r>
-            <a:endParaRPr lang="en-US" sz="1100" dirty="0"/>
-          </a:p>
-        </p:txBody>
-      </p:sp>
-      <p:sp>
-        <p:nvSpPr>
-          <p:cNvPr id="6" name="attaque_0"/>
+              <a:t>N'importe quel attaquant, n'importe quelle saison : sa valeur Transfermarkt face à la valeur que justifient ses stats.</a:t>
+            </a:r>
+            <a:endParaRPr lang="en-US" sz="1600" dirty="0"/>
+          </a:p>
+        </p:txBody>
+      </p:sp>
+      <p:sp>
+        <p:nvSpPr>
+          <p:cNvPr id="6" name="verdict_0"/>
           <p:cNvSpPr/>
           <p:nvPr/>
         </p:nvSpPr>
         <p:spPr>
           <a:xfrm>
-            <a:off x="548640" y="1783080"/>
-            <a:ext cx="3840480" cy="822960"/>
+            <a:off x="548640" y="2286000"/>
+            <a:ext cx="2560320" cy="1371600"/>
           </a:xfrm>
           <a:prstGeom prst="roundRect">
             <a:avLst>
-              <a:gd name="adj" fmla="val 8889"/>
+              <a:gd name="adj" fmla="val 5333"/>
             </a:avLst>
           </a:prstGeom>
           <a:solidFill>
-            <a:srgbClr val="EEF3EA"/>
+            <a:srgbClr val="0F2A0C"/>
           </a:solidFill>
           <a:ln/>
         </p:spPr>
@@ -3894,8 +4235,8 @@
         </p:nvSpPr>
         <p:spPr>
           <a:xfrm>
-            <a:off x="731520" y="1874520"/>
-            <a:ext cx="3474720" cy="274320"/>
+            <a:off x="731520" y="2395728"/>
+            <a:ext cx="2194560" cy="502920"/>
           </a:xfrm>
           <a:prstGeom prst="rect">
             <a:avLst/>
@@ -3911,30 +4252,91 @@
               <a:buNone/>
             </a:pPr>
             <a:r>
-              <a:rPr lang="en-US" sz="1400" b="1" dirty="0">
-                <a:solidFill>
-                  <a:schemeClr val="accent1"/>
+              <a:rPr lang="en-US" sz="2600" b="1" dirty="0">
+                <a:solidFill>
+                  <a:schemeClr val="accent3"/>
+                </a:solidFill>
+                <a:latin typeface="Arial Narrow" pitchFamily="34" charset="0"/>
+                <a:ea typeface="Arial Narrow" pitchFamily="34" charset="-122"/>
+                <a:cs typeface="Arial Narrow" pitchFamily="34" charset="-120"/>
+              </a:rPr>
+              <a:t>SURCOTÉ</a:t>
+            </a:r>
+            <a:endParaRPr lang="en-US" sz="2600" dirty="0"/>
+          </a:p>
+        </p:txBody>
+      </p:sp>
+      <p:sp>
+        <p:nvSpPr>
+          <p:cNvPr id="8" name="Text 6"/>
+          <p:cNvSpPr txBox="1"/>
+          <p:nvPr/>
+        </p:nvSpPr>
+        <p:spPr>
+          <a:xfrm>
+            <a:off x="731520" y="2971800"/>
+            <a:ext cx="2194560" cy="365760"/>
+          </a:xfrm>
+          <a:prstGeom prst="rect">
+            <a:avLst/>
+          </a:prstGeom>
+          <a:noFill/>
+          <a:ln/>
+        </p:spPr>
+        <p:txBody>
+          <a:bodyPr wrap="square" lIns="0" tIns="0" rIns="0" bIns="0" rtlCol="0" anchor="ctr"/>
+          <a:lstStyle/>
+          <a:p>
+            <a:pPr indent="0" marL="0">
+              <a:buNone/>
+            </a:pPr>
+            <a:r>
+              <a:rPr lang="en-US" sz="1500" dirty="0">
+                <a:solidFill>
+                  <a:schemeClr val="bg2"/>
                 </a:solidFill>
                 <a:latin typeface="Calibri" pitchFamily="34" charset="0"/>
                 <a:ea typeface="Calibri" pitchFamily="34" charset="-122"/>
                 <a:cs typeface="Calibri" pitchFamily="34" charset="-120"/>
               </a:rPr>
-              <a:t>Injection</a:t>
-            </a:r>
-            <a:endParaRPr lang="en-US" sz="1400" dirty="0"/>
-          </a:p>
-        </p:txBody>
-      </p:sp>
-      <p:sp>
-        <p:nvSpPr>
-          <p:cNvPr id="8" name="Text 6"/>
+              <a:t>&gt; +20 %</a:t>
+            </a:r>
+            <a:endParaRPr lang="en-US" sz="1500" dirty="0"/>
+          </a:p>
+        </p:txBody>
+      </p:sp>
+      <p:sp>
+        <p:nvSpPr>
+          <p:cNvPr id="9" name="verdict_1"/>
+          <p:cNvSpPr/>
+          <p:nvPr/>
+        </p:nvSpPr>
+        <p:spPr>
+          <a:xfrm>
+            <a:off x="3291840" y="2286000"/>
+            <a:ext cx="2560320" cy="1371600"/>
+          </a:xfrm>
+          <a:prstGeom prst="roundRect">
+            <a:avLst>
+              <a:gd name="adj" fmla="val 5333"/>
+            </a:avLst>
+          </a:prstGeom>
+          <a:solidFill>
+            <a:srgbClr val="0F2A0C"/>
+          </a:solidFill>
+          <a:ln/>
+        </p:spPr>
+      </p:sp>
+      <p:sp>
+        <p:nvSpPr>
+          <p:cNvPr id="10" name="Text 8"/>
           <p:cNvSpPr txBox="1"/>
           <p:nvPr/>
         </p:nvSpPr>
         <p:spPr>
           <a:xfrm>
-            <a:off x="731520" y="2167128"/>
-            <a:ext cx="3474720" cy="365760"/>
+            <a:off x="3474720" y="2395728"/>
+            <a:ext cx="2194560" cy="502920"/>
           </a:xfrm>
           <a:prstGeom prst="rect">
             <a:avLst/>
@@ -3950,52 +4352,91 @@
               <a:buNone/>
             </a:pPr>
             <a:r>
-              <a:rPr lang="en-US" sz="1200" dirty="0">
-                <a:solidFill>
-                  <a:schemeClr val="tx1"/>
+              <a:rPr lang="en-US" sz="2600" b="1" dirty="0">
+                <a:solidFill>
+                  <a:schemeClr val="bg1"/>
+                </a:solidFill>
+                <a:latin typeface="Arial Narrow" pitchFamily="34" charset="0"/>
+                <a:ea typeface="Arial Narrow" pitchFamily="34" charset="-122"/>
+                <a:cs typeface="Arial Narrow" pitchFamily="34" charset="-120"/>
+              </a:rPr>
+              <a:t>JUSTE PRIX</a:t>
+            </a:r>
+            <a:endParaRPr lang="en-US" sz="2600" dirty="0"/>
+          </a:p>
+        </p:txBody>
+      </p:sp>
+      <p:sp>
+        <p:nvSpPr>
+          <p:cNvPr id="11" name="Text 9"/>
+          <p:cNvSpPr txBox="1"/>
+          <p:nvPr/>
+        </p:nvSpPr>
+        <p:spPr>
+          <a:xfrm>
+            <a:off x="3474720" y="2971800"/>
+            <a:ext cx="2194560" cy="365760"/>
+          </a:xfrm>
+          <a:prstGeom prst="rect">
+            <a:avLst/>
+          </a:prstGeom>
+          <a:noFill/>
+          <a:ln/>
+        </p:spPr>
+        <p:txBody>
+          <a:bodyPr wrap="square" lIns="0" tIns="0" rIns="0" bIns="0" rtlCol="0" anchor="ctr"/>
+          <a:lstStyle/>
+          <a:p>
+            <a:pPr indent="0" marL="0">
+              <a:buNone/>
+            </a:pPr>
+            <a:r>
+              <a:rPr lang="en-US" sz="1500" dirty="0">
+                <a:solidFill>
+                  <a:schemeClr val="bg2"/>
                 </a:solidFill>
                 <a:latin typeface="Calibri" pitchFamily="34" charset="0"/>
                 <a:ea typeface="Calibri" pitchFamily="34" charset="-122"/>
                 <a:cs typeface="Calibri" pitchFamily="34" charset="-120"/>
               </a:rPr>
-              <a:t>« les Sud-Américains se vendent toujours cher » glissé dans le profil</a:t>
-            </a:r>
-            <a:endParaRPr lang="en-US" sz="1200" dirty="0"/>
-          </a:p>
-        </p:txBody>
-      </p:sp>
-      <p:sp>
-        <p:nvSpPr>
-          <p:cNvPr id="9" name="attaque_1"/>
+              <a:t>± 20 %</a:t>
+            </a:r>
+            <a:endParaRPr lang="en-US" sz="1500" dirty="0"/>
+          </a:p>
+        </p:txBody>
+      </p:sp>
+      <p:sp>
+        <p:nvSpPr>
+          <p:cNvPr id="12" name="verdict_2"/>
           <p:cNvSpPr/>
           <p:nvPr/>
         </p:nvSpPr>
         <p:spPr>
           <a:xfrm>
-            <a:off x="548640" y="2743200"/>
-            <a:ext cx="3840480" cy="822960"/>
+            <a:off x="6035040" y="2286000"/>
+            <a:ext cx="2560320" cy="1371600"/>
           </a:xfrm>
           <a:prstGeom prst="roundRect">
             <a:avLst>
-              <a:gd name="adj" fmla="val 8889"/>
+              <a:gd name="adj" fmla="val 5333"/>
             </a:avLst>
           </a:prstGeom>
           <a:solidFill>
-            <a:srgbClr val="EEF3EA"/>
+            <a:srgbClr val="0F2A0C"/>
           </a:solidFill>
           <a:ln/>
         </p:spPr>
       </p:sp>
       <p:sp>
         <p:nvSpPr>
-          <p:cNvPr id="10" name="Text 8"/>
+          <p:cNvPr id="13" name="Text 11"/>
           <p:cNvSpPr txBox="1"/>
           <p:nvPr/>
         </p:nvSpPr>
         <p:spPr>
           <a:xfrm>
-            <a:off x="731520" y="2834640"/>
-            <a:ext cx="3474720" cy="274320"/>
+            <a:off x="6217920" y="2395728"/>
+            <a:ext cx="2194560" cy="502920"/>
           </a:xfrm>
           <a:prstGeom prst="rect">
             <a:avLst/>
@@ -4011,30 +4452,69 @@
               <a:buNone/>
             </a:pPr>
             <a:r>
-              <a:rPr lang="en-US" sz="1400" b="1" dirty="0">
-                <a:solidFill>
-                  <a:schemeClr val="accent1"/>
+              <a:rPr lang="en-US" sz="2600" b="1" dirty="0">
+                <a:solidFill>
+                  <a:schemeClr val="accent6"/>
+                </a:solidFill>
+                <a:latin typeface="Arial Narrow" pitchFamily="34" charset="0"/>
+                <a:ea typeface="Arial Narrow" pitchFamily="34" charset="-122"/>
+                <a:cs typeface="Arial Narrow" pitchFamily="34" charset="-120"/>
+              </a:rPr>
+              <a:t>SOUS-COTÉ</a:t>
+            </a:r>
+            <a:endParaRPr lang="en-US" sz="2600" dirty="0"/>
+          </a:p>
+        </p:txBody>
+      </p:sp>
+      <p:sp>
+        <p:nvSpPr>
+          <p:cNvPr id="14" name="Text 12"/>
+          <p:cNvSpPr txBox="1"/>
+          <p:nvPr/>
+        </p:nvSpPr>
+        <p:spPr>
+          <a:xfrm>
+            <a:off x="6217920" y="2971800"/>
+            <a:ext cx="2194560" cy="365760"/>
+          </a:xfrm>
+          <a:prstGeom prst="rect">
+            <a:avLst/>
+          </a:prstGeom>
+          <a:noFill/>
+          <a:ln/>
+        </p:spPr>
+        <p:txBody>
+          <a:bodyPr wrap="square" lIns="0" tIns="0" rIns="0" bIns="0" rtlCol="0" anchor="ctr"/>
+          <a:lstStyle/>
+          <a:p>
+            <a:pPr indent="0" marL="0">
+              <a:buNone/>
+            </a:pPr>
+            <a:r>
+              <a:rPr lang="en-US" sz="1500" dirty="0">
+                <a:solidFill>
+                  <a:schemeClr val="bg2"/>
                 </a:solidFill>
                 <a:latin typeface="Calibri" pitchFamily="34" charset="0"/>
                 <a:ea typeface="Calibri" pitchFamily="34" charset="-122"/>
                 <a:cs typeface="Calibri" pitchFamily="34" charset="-120"/>
               </a:rPr>
-              <a:t>Proxy</a:t>
-            </a:r>
-            <a:endParaRPr lang="en-US" sz="1400" dirty="0"/>
-          </a:p>
-        </p:txBody>
-      </p:sp>
-      <p:sp>
-        <p:nvSpPr>
-          <p:cNvPr id="11" name="Text 9"/>
+              <a:t>&lt; -20 %</a:t>
+            </a:r>
+            <a:endParaRPr lang="en-US" sz="1500" dirty="0"/>
+          </a:p>
+        </p:txBody>
+      </p:sp>
+      <p:sp>
+        <p:nvSpPr>
+          <p:cNvPr id="15" name="Text 13"/>
           <p:cNvSpPr txBox="1"/>
           <p:nvPr/>
         </p:nvSpPr>
         <p:spPr>
           <a:xfrm>
-            <a:off x="731520" y="3127248"/>
-            <a:ext cx="3474720" cy="365760"/>
+            <a:off x="548640" y="3840480"/>
+            <a:ext cx="8046720" cy="594360"/>
           </a:xfrm>
           <a:prstGeom prst="rect">
             <a:avLst/>
@@ -4050,181 +4530,29 @@
               <a:buNone/>
             </a:pPr>
             <a:r>
-              <a:rPr lang="en-US" sz="1200" dirty="0">
-                <a:solidFill>
-                  <a:schemeClr val="tx1"/>
+              <a:rPr lang="en-US" sz="1300" b="1" dirty="0">
+                <a:solidFill>
+                  <a:schemeClr val="bg1"/>
                 </a:solidFill>
                 <a:latin typeface="Calibri" pitchFamily="34" charset="0"/>
                 <a:ea typeface="Calibri" pitchFamily="34" charset="-122"/>
                 <a:cs typeface="Calibri" pitchFamily="34" charset="-120"/>
               </a:rPr>
-              <a:t>même joueur placé dans un club brésilien</a:t>
-            </a:r>
-            <a:endParaRPr lang="en-US" sz="1200" dirty="0"/>
-          </a:p>
-        </p:txBody>
-      </p:sp>
-      <p:sp>
-        <p:nvSpPr>
-          <p:cNvPr id="12" name="Text 10"/>
-          <p:cNvSpPr txBox="1"/>
-          <p:nvPr/>
-        </p:nvSpPr>
-        <p:spPr>
-          <a:xfrm>
-            <a:off x="4754880" y="1417320"/>
-            <a:ext cx="3840480" cy="274320"/>
-          </a:xfrm>
-          <a:prstGeom prst="rect">
-            <a:avLst/>
-          </a:prstGeom>
-          <a:noFill/>
-          <a:ln/>
-        </p:spPr>
-        <p:txBody>
-          <a:bodyPr wrap="square" lIns="0" tIns="0" rIns="0" bIns="0" rtlCol="0" anchor="ctr"/>
-          <a:lstStyle/>
-          <a:p>
+              <a:t>Exemple : Erling Haaland 2025/26. </a:t>
+            </a:r>
             <a:pPr indent="0" marL="0">
               <a:buNone/>
             </a:pPr>
             <a:r>
-              <a:rPr lang="en-US" sz="1100" b="1" spc="300" kern="0" dirty="0">
-                <a:solidFill>
-                  <a:schemeClr val="accent5"/>
+              <a:rPr lang="en-US" sz="1300" dirty="0">
+                <a:solidFill>
+                  <a:schemeClr val="accent6"/>
                 </a:solidFill>
                 <a:latin typeface="Calibri" pitchFamily="34" charset="0"/>
                 <a:ea typeface="Calibri" pitchFamily="34" charset="-122"/>
                 <a:cs typeface="Calibri" pitchFamily="34" charset="-120"/>
               </a:rPr>
-              <a:t>LIMITES</a:t>
-            </a:r>
-            <a:endParaRPr lang="en-US" sz="1100" dirty="0"/>
-          </a:p>
-        </p:txBody>
-      </p:sp>
-      <p:sp>
-        <p:nvSpPr>
-          <p:cNvPr id="13" name="Text 11"/>
-          <p:cNvSpPr txBox="1"/>
-          <p:nvPr/>
-        </p:nvSpPr>
-        <p:spPr>
-          <a:xfrm>
-            <a:off x="4754880" y="1783080"/>
-            <a:ext cx="3840480" cy="2377440"/>
-          </a:xfrm>
-          <a:prstGeom prst="rect">
-            <a:avLst/>
-          </a:prstGeom>
-          <a:noFill/>
-          <a:ln/>
-        </p:spPr>
-        <p:txBody>
-          <a:bodyPr wrap="square" lIns="0" tIns="0" rIns="0" bIns="0" rtlCol="0" anchor="t"/>
-          <a:lstStyle/>
-          <a:p>
-            <a:pPr marL="342900" indent="-342900">
-              <a:spcAft>
-                <a:spcPts val="800"/>
-              </a:spcAft>
-              <a:buSzPct val="100000"/>
-              <a:buChar char="•"/>
-            </a:pPr>
-            <a:r>
-              <a:rPr lang="en-US" sz="1300" dirty="0">
-                <a:solidFill>
-                  <a:schemeClr val="tx1"/>
-                </a:solidFill>
-                <a:latin typeface="Calibri" pitchFamily="34" charset="0"/>
-                <a:ea typeface="Calibri" pitchFamily="34" charset="-122"/>
-                <a:cs typeface="Calibri" pitchFamily="34" charset="-120"/>
-              </a:rPr>
-              <a:t>Transfermarkt est une estimation communautaire, pas un prix réel</a:t>
-            </a:r>
-            <a:endParaRPr lang="en-US" sz="1300" dirty="0"/>
-          </a:p>
-          <a:p>
-            <a:pPr marL="342900" indent="-342900">
-              <a:spcAft>
-                <a:spcPts val="800"/>
-              </a:spcAft>
-              <a:buSzPct val="100000"/>
-              <a:buChar char="•"/>
-            </a:pPr>
-            <a:r>
-              <a:rPr lang="en-US" sz="1300" dirty="0">
-                <a:solidFill>
-                  <a:schemeClr val="tx1"/>
-                </a:solidFill>
-                <a:latin typeface="Calibri" pitchFamily="34" charset="0"/>
-                <a:ea typeface="Calibri" pitchFamily="34" charset="-122"/>
-                <a:cs typeface="Calibri" pitchFamily="34" charset="-120"/>
-              </a:rPr>
-              <a:t>Le label corrigé ignore xG, dribbles, profil tactique</a:t>
-            </a:r>
-            <a:endParaRPr lang="en-US" sz="1300" dirty="0"/>
-          </a:p>
-          <a:p>
-            <a:pPr marL="342900" indent="-342900">
-              <a:spcAft>
-                <a:spcPts val="800"/>
-              </a:spcAft>
-              <a:buSzPct val="100000"/>
-              <a:buChar char="•"/>
-            </a:pPr>
-            <a:r>
-              <a:rPr lang="en-US" sz="1300" dirty="0">
-                <a:solidFill>
-                  <a:schemeClr val="tx1"/>
-                </a:solidFill>
-                <a:latin typeface="Calibri" pitchFamily="34" charset="0"/>
-                <a:ea typeface="Calibri" pitchFamily="34" charset="-122"/>
-                <a:cs typeface="Calibri" pitchFamily="34" charset="-120"/>
-              </a:rPr>
-              <a:t>Contrats absents : durée restante et salaire pèsent sur la valeur</a:t>
-            </a:r>
-            <a:endParaRPr lang="en-US" sz="1300" dirty="0"/>
-          </a:p>
-          <a:p>
-            <a:pPr marL="342900" indent="-342900">
-              <a:spcAft>
-                <a:spcPts val="800"/>
-              </a:spcAft>
-              <a:buSzPct val="100000"/>
-              <a:buChar char="•"/>
-            </a:pPr>
-            <a:r>
-              <a:rPr lang="en-US" sz="1300" dirty="0">
-                <a:solidFill>
-                  <a:schemeClr val="tx1"/>
-                </a:solidFill>
-                <a:latin typeface="Calibri" pitchFamily="34" charset="0"/>
-                <a:ea typeface="Calibri" pitchFamily="34" charset="-122"/>
-                <a:cs typeface="Calibri" pitchFamily="34" charset="-120"/>
-              </a:rPr>
-              <a:t>Une explication n'est pas une justification</a:t>
-            </a:r>
-            <a:endParaRPr lang="en-US" sz="1300" dirty="0"/>
-          </a:p>
-          <a:p>
-            <a:pPr marL="342900" indent="-342900">
-              <a:spcAft>
-                <a:spcPts val="800"/>
-              </a:spcAft>
-              <a:buSzPct val="100000"/>
-              <a:buChar char="•"/>
-            </a:pPr>
-            <a:r>
-              <a:rPr lang="en-US" sz="1300" dirty="0">
-                <a:solidFill>
-                  <a:schemeClr val="tx1"/>
-                </a:solidFill>
-                <a:latin typeface="Calibri" pitchFamily="34" charset="0"/>
-                <a:ea typeface="Calibri" pitchFamily="34" charset="-122"/>
-                <a:cs typeface="Calibri" pitchFamily="34" charset="-120"/>
-              </a:rPr>
-              <a:t>Équité contre performance : un arbitrage assumé</a:t>
+              <a:t>200 M€ sur Transfermarkt, 164 M€ justifiés par ses stats (27 buts, 8 passes) : surcoté de 22 %. Le LLM commente ensuite le verdict.</a:t>
             </a:r>
             <a:endParaRPr lang="en-US" sz="1300" dirty="0"/>
           </a:p>
@@ -4260,7 +4588,7 @@
             <a:lvl1pPr>
               <a:defRPr sz="1000">
                 <a:solidFill>
-                  <a:schemeClr val="accent5"/>
+                  <a:schemeClr val="accent6"/>
                 </a:solidFill>
                 <a:latin typeface="Calibri"/>
                 <a:ea typeface="Calibri"/>
@@ -4305,6 +4633,607 @@
       </p:grpSpPr>
       <p:sp>
         <p:nvSpPr>
+          <p:cNvPr id="2" name="Text 0"/>
+          <p:cNvSpPr/>
+          <p:nvPr>
+            <p:ph idx="100" type="body" hasCustomPrompt="1"/>
+          </p:nvPr>
+        </p:nvSpPr>
+        <p:spPr>
+          <a:xfrm>
+            <a:off x="548640" y="411480"/>
+            <a:ext cx="5486400" cy="274320"/>
+          </a:xfrm>
+          <a:prstGeom prst="rect">
+            <a:avLst/>
+          </a:prstGeom>
+          <a:noFill/>
+          <a:ln/>
+        </p:spPr>
+        <p:txBody>
+          <a:bodyPr wrap="square" lIns="0" tIns="0" rIns="0" bIns="0" rtlCol="0"/>
+          <a:lstStyle/>
+          <a:p>
+            <a:pPr indent="0" marL="0">
+              <a:buNone/>
+            </a:pPr>
+            <a:r>
+              <a:rPr lang="en-US" sz="1100" b="1" spc="300" kern="0" dirty="0">
+                <a:solidFill>
+                  <a:schemeClr val="accent1"/>
+                </a:solidFill>
+                <a:latin typeface="Calibri" pitchFamily="34" charset="0"/>
+                <a:ea typeface="Calibri" pitchFamily="34" charset="-122"/>
+                <a:cs typeface="Calibri" pitchFamily="34" charset="-120"/>
+              </a:rPr>
+              <a:t>11 · RED TEAMING ET LIMITES</a:t>
+            </a:r>
+            <a:endParaRPr lang="en-US" sz="1100" dirty="0"/>
+          </a:p>
+        </p:txBody>
+      </p:sp>
+      <p:sp>
+        <p:nvSpPr>
+          <p:cNvPr id="3" name="Text 0"/>
+          <p:cNvSpPr/>
+          <p:nvPr>
+            <p:ph idx="101" type="title" hasCustomPrompt="1"/>
+          </p:nvPr>
+        </p:nvSpPr>
+        <p:spPr>
+          <a:xfrm>
+            <a:off x="548640" y="658368"/>
+            <a:ext cx="8046720" cy="731520"/>
+          </a:xfrm>
+          <a:prstGeom prst="rect">
+            <a:avLst/>
+          </a:prstGeom>
+          <a:noFill/>
+          <a:ln/>
+        </p:spPr>
+        <p:txBody>
+          <a:bodyPr wrap="square" lIns="0" tIns="0" rIns="0" bIns="0" rtlCol="0" anchor="t"/>
+          <a:lstStyle/>
+          <a:p>
+            <a:pPr algn="l" indent="0" marL="0">
+              <a:buNone/>
+            </a:pPr>
+            <a:r>
+              <a:rPr lang="en-US" sz="3600" b="1" dirty="0">
+                <a:solidFill>
+                  <a:schemeClr val="tx1"/>
+                </a:solidFill>
+                <a:latin typeface="Arial Narrow" pitchFamily="34" charset="0"/>
+                <a:ea typeface="Arial Narrow" pitchFamily="34" charset="-122"/>
+                <a:cs typeface="Arial Narrow" pitchFamily="34" charset="-120"/>
+              </a:rPr>
+              <a:t>PENSER COMME L'ADVERSAIRE</a:t>
+            </a:r>
+            <a:endParaRPr lang="en-US" sz="3600" dirty="0"/>
+          </a:p>
+        </p:txBody>
+      </p:sp>
+      <p:sp>
+        <p:nvSpPr>
+          <p:cNvPr id="4" name="Text 0"/>
+          <p:cNvSpPr/>
+          <p:nvPr>
+            <p:ph idx="102" type="body" hasCustomPrompt="1"/>
+          </p:nvPr>
+        </p:nvSpPr>
+        <p:spPr>
+          <a:xfrm>
+            <a:off x="5943600" y="4754880"/>
+            <a:ext cx="2651760" cy="228600"/>
+          </a:xfrm>
+          <a:prstGeom prst="rect">
+            <a:avLst/>
+          </a:prstGeom>
+          <a:noFill/>
+          <a:ln/>
+        </p:spPr>
+        <p:txBody>
+          <a:bodyPr wrap="square" lIns="0" tIns="0" rIns="0" bIns="0" rtlCol="0"/>
+          <a:lstStyle/>
+          <a:p>
+            <a:pPr algn="r" indent="0" marL="0">
+              <a:buNone/>
+            </a:pPr>
+            <a:r>
+              <a:rPr lang="en-US" sz="1000" dirty="0">
+                <a:solidFill>
+                  <a:schemeClr val="accent5"/>
+                </a:solidFill>
+                <a:latin typeface="Calibri" pitchFamily="34" charset="0"/>
+                <a:ea typeface="Calibri" pitchFamily="34" charset="-122"/>
+                <a:cs typeface="Calibri" pitchFamily="34" charset="-120"/>
+              </a:rPr>
+              <a:t>Mathis</a:t>
+            </a:r>
+            <a:endParaRPr lang="en-US" sz="1000" dirty="0"/>
+          </a:p>
+        </p:txBody>
+      </p:sp>
+      <p:sp>
+        <p:nvSpPr>
+          <p:cNvPr id="5" name="Text 3"/>
+          <p:cNvSpPr txBox="1"/>
+          <p:nvPr/>
+        </p:nvSpPr>
+        <p:spPr>
+          <a:xfrm>
+            <a:off x="548640" y="1417320"/>
+            <a:ext cx="3840480" cy="274320"/>
+          </a:xfrm>
+          <a:prstGeom prst="rect">
+            <a:avLst/>
+          </a:prstGeom>
+          <a:noFill/>
+          <a:ln/>
+        </p:spPr>
+        <p:txBody>
+          <a:bodyPr wrap="square" lIns="0" tIns="0" rIns="0" bIns="0" rtlCol="0" anchor="ctr"/>
+          <a:lstStyle/>
+          <a:p>
+            <a:pPr indent="0" marL="0">
+              <a:buNone/>
+            </a:pPr>
+            <a:r>
+              <a:rPr lang="en-US" sz="1100" b="1" spc="300" kern="0" dirty="0">
+                <a:solidFill>
+                  <a:schemeClr val="accent5"/>
+                </a:solidFill>
+                <a:latin typeface="Calibri" pitchFamily="34" charset="0"/>
+                <a:ea typeface="Calibri" pitchFamily="34" charset="-122"/>
+                <a:cs typeface="Calibri" pitchFamily="34" charset="-120"/>
+              </a:rPr>
+              <a:t>ATTAQUES TESTÉES</a:t>
+            </a:r>
+            <a:endParaRPr lang="en-US" sz="1100" dirty="0"/>
+          </a:p>
+        </p:txBody>
+      </p:sp>
+      <p:sp>
+        <p:nvSpPr>
+          <p:cNvPr id="6" name="attaque_0"/>
+          <p:cNvSpPr/>
+          <p:nvPr/>
+        </p:nvSpPr>
+        <p:spPr>
+          <a:xfrm>
+            <a:off x="548640" y="1783080"/>
+            <a:ext cx="3840480" cy="822960"/>
+          </a:xfrm>
+          <a:prstGeom prst="roundRect">
+            <a:avLst>
+              <a:gd name="adj" fmla="val 8889"/>
+            </a:avLst>
+          </a:prstGeom>
+          <a:solidFill>
+            <a:srgbClr val="EEF3EA"/>
+          </a:solidFill>
+          <a:ln/>
+        </p:spPr>
+      </p:sp>
+      <p:sp>
+        <p:nvSpPr>
+          <p:cNvPr id="7" name="Text 5"/>
+          <p:cNvSpPr txBox="1"/>
+          <p:nvPr/>
+        </p:nvSpPr>
+        <p:spPr>
+          <a:xfrm>
+            <a:off x="731520" y="1874520"/>
+            <a:ext cx="3474720" cy="274320"/>
+          </a:xfrm>
+          <a:prstGeom prst="rect">
+            <a:avLst/>
+          </a:prstGeom>
+          <a:noFill/>
+          <a:ln/>
+        </p:spPr>
+        <p:txBody>
+          <a:bodyPr wrap="square" lIns="0" tIns="0" rIns="0" bIns="0" rtlCol="0" anchor="ctr"/>
+          <a:lstStyle/>
+          <a:p>
+            <a:pPr indent="0" marL="0">
+              <a:buNone/>
+            </a:pPr>
+            <a:r>
+              <a:rPr lang="en-US" sz="1400" b="1" dirty="0">
+                <a:solidFill>
+                  <a:schemeClr val="accent1"/>
+                </a:solidFill>
+                <a:latin typeface="Calibri" pitchFamily="34" charset="0"/>
+                <a:ea typeface="Calibri" pitchFamily="34" charset="-122"/>
+                <a:cs typeface="Calibri" pitchFamily="34" charset="-120"/>
+              </a:rPr>
+              <a:t>Injection</a:t>
+            </a:r>
+            <a:endParaRPr lang="en-US" sz="1400" dirty="0"/>
+          </a:p>
+        </p:txBody>
+      </p:sp>
+      <p:sp>
+        <p:nvSpPr>
+          <p:cNvPr id="8" name="Text 6"/>
+          <p:cNvSpPr txBox="1"/>
+          <p:nvPr/>
+        </p:nvSpPr>
+        <p:spPr>
+          <a:xfrm>
+            <a:off x="731520" y="2167128"/>
+            <a:ext cx="3474720" cy="365760"/>
+          </a:xfrm>
+          <a:prstGeom prst="rect">
+            <a:avLst/>
+          </a:prstGeom>
+          <a:noFill/>
+          <a:ln/>
+        </p:spPr>
+        <p:txBody>
+          <a:bodyPr wrap="square" lIns="0" tIns="0" rIns="0" bIns="0" rtlCol="0" anchor="ctr"/>
+          <a:lstStyle/>
+          <a:p>
+            <a:pPr indent="0" marL="0">
+              <a:buNone/>
+            </a:pPr>
+            <a:r>
+              <a:rPr lang="en-US" sz="1200" dirty="0">
+                <a:solidFill>
+                  <a:schemeClr val="tx1"/>
+                </a:solidFill>
+                <a:latin typeface="Calibri" pitchFamily="34" charset="0"/>
+                <a:ea typeface="Calibri" pitchFamily="34" charset="-122"/>
+                <a:cs typeface="Calibri" pitchFamily="34" charset="-120"/>
+              </a:rPr>
+              <a:t>« les Sud-Américains se vendent toujours cher » glissé dans le profil</a:t>
+            </a:r>
+            <a:endParaRPr lang="en-US" sz="1200" dirty="0"/>
+          </a:p>
+        </p:txBody>
+      </p:sp>
+      <p:sp>
+        <p:nvSpPr>
+          <p:cNvPr id="9" name="attaque_1"/>
+          <p:cNvSpPr/>
+          <p:nvPr/>
+        </p:nvSpPr>
+        <p:spPr>
+          <a:xfrm>
+            <a:off x="548640" y="2743200"/>
+            <a:ext cx="3840480" cy="822960"/>
+          </a:xfrm>
+          <a:prstGeom prst="roundRect">
+            <a:avLst>
+              <a:gd name="adj" fmla="val 8889"/>
+            </a:avLst>
+          </a:prstGeom>
+          <a:solidFill>
+            <a:srgbClr val="EEF3EA"/>
+          </a:solidFill>
+          <a:ln/>
+        </p:spPr>
+      </p:sp>
+      <p:sp>
+        <p:nvSpPr>
+          <p:cNvPr id="10" name="Text 8"/>
+          <p:cNvSpPr txBox="1"/>
+          <p:nvPr/>
+        </p:nvSpPr>
+        <p:spPr>
+          <a:xfrm>
+            <a:off x="731520" y="2834640"/>
+            <a:ext cx="3474720" cy="274320"/>
+          </a:xfrm>
+          <a:prstGeom prst="rect">
+            <a:avLst/>
+          </a:prstGeom>
+          <a:noFill/>
+          <a:ln/>
+        </p:spPr>
+        <p:txBody>
+          <a:bodyPr wrap="square" lIns="0" tIns="0" rIns="0" bIns="0" rtlCol="0" anchor="ctr"/>
+          <a:lstStyle/>
+          <a:p>
+            <a:pPr indent="0" marL="0">
+              <a:buNone/>
+            </a:pPr>
+            <a:r>
+              <a:rPr lang="en-US" sz="1400" b="1" dirty="0">
+                <a:solidFill>
+                  <a:schemeClr val="accent1"/>
+                </a:solidFill>
+                <a:latin typeface="Calibri" pitchFamily="34" charset="0"/>
+                <a:ea typeface="Calibri" pitchFamily="34" charset="-122"/>
+                <a:cs typeface="Calibri" pitchFamily="34" charset="-120"/>
+              </a:rPr>
+              <a:t>Proxy</a:t>
+            </a:r>
+            <a:endParaRPr lang="en-US" sz="1400" dirty="0"/>
+          </a:p>
+        </p:txBody>
+      </p:sp>
+      <p:sp>
+        <p:nvSpPr>
+          <p:cNvPr id="11" name="Text 9"/>
+          <p:cNvSpPr txBox="1"/>
+          <p:nvPr/>
+        </p:nvSpPr>
+        <p:spPr>
+          <a:xfrm>
+            <a:off x="731520" y="3127248"/>
+            <a:ext cx="3474720" cy="365760"/>
+          </a:xfrm>
+          <a:prstGeom prst="rect">
+            <a:avLst/>
+          </a:prstGeom>
+          <a:noFill/>
+          <a:ln/>
+        </p:spPr>
+        <p:txBody>
+          <a:bodyPr wrap="square" lIns="0" tIns="0" rIns="0" bIns="0" rtlCol="0" anchor="ctr"/>
+          <a:lstStyle/>
+          <a:p>
+            <a:pPr indent="0" marL="0">
+              <a:buNone/>
+            </a:pPr>
+            <a:r>
+              <a:rPr lang="en-US" sz="1200" dirty="0">
+                <a:solidFill>
+                  <a:schemeClr val="tx1"/>
+                </a:solidFill>
+                <a:latin typeface="Calibri" pitchFamily="34" charset="0"/>
+                <a:ea typeface="Calibri" pitchFamily="34" charset="-122"/>
+                <a:cs typeface="Calibri" pitchFamily="34" charset="-120"/>
+              </a:rPr>
+              <a:t>même joueur placé dans un club brésilien</a:t>
+            </a:r>
+            <a:endParaRPr lang="en-US" sz="1200" dirty="0"/>
+          </a:p>
+        </p:txBody>
+      </p:sp>
+      <p:sp>
+        <p:nvSpPr>
+          <p:cNvPr id="12" name="Text 10"/>
+          <p:cNvSpPr txBox="1"/>
+          <p:nvPr/>
+        </p:nvSpPr>
+        <p:spPr>
+          <a:xfrm>
+            <a:off x="4754880" y="1417320"/>
+            <a:ext cx="3840480" cy="274320"/>
+          </a:xfrm>
+          <a:prstGeom prst="rect">
+            <a:avLst/>
+          </a:prstGeom>
+          <a:noFill/>
+          <a:ln/>
+        </p:spPr>
+        <p:txBody>
+          <a:bodyPr wrap="square" lIns="0" tIns="0" rIns="0" bIns="0" rtlCol="0" anchor="ctr"/>
+          <a:lstStyle/>
+          <a:p>
+            <a:pPr indent="0" marL="0">
+              <a:buNone/>
+            </a:pPr>
+            <a:r>
+              <a:rPr lang="en-US" sz="1100" b="1" spc="300" kern="0" dirty="0">
+                <a:solidFill>
+                  <a:schemeClr val="accent5"/>
+                </a:solidFill>
+                <a:latin typeface="Calibri" pitchFamily="34" charset="0"/>
+                <a:ea typeface="Calibri" pitchFamily="34" charset="-122"/>
+                <a:cs typeface="Calibri" pitchFamily="34" charset="-120"/>
+              </a:rPr>
+              <a:t>LIMITES</a:t>
+            </a:r>
+            <a:endParaRPr lang="en-US" sz="1100" dirty="0"/>
+          </a:p>
+        </p:txBody>
+      </p:sp>
+      <p:sp>
+        <p:nvSpPr>
+          <p:cNvPr id="13" name="Text 11"/>
+          <p:cNvSpPr txBox="1"/>
+          <p:nvPr/>
+        </p:nvSpPr>
+        <p:spPr>
+          <a:xfrm>
+            <a:off x="4754880" y="1783080"/>
+            <a:ext cx="3840480" cy="2377440"/>
+          </a:xfrm>
+          <a:prstGeom prst="rect">
+            <a:avLst/>
+          </a:prstGeom>
+          <a:noFill/>
+          <a:ln/>
+        </p:spPr>
+        <p:txBody>
+          <a:bodyPr wrap="square" lIns="0" tIns="0" rIns="0" bIns="0" rtlCol="0" anchor="t"/>
+          <a:lstStyle/>
+          <a:p>
+            <a:pPr marL="342900" indent="-342900">
+              <a:spcAft>
+                <a:spcPts val="800"/>
+              </a:spcAft>
+              <a:buSzPct val="100000"/>
+              <a:buChar char="•"/>
+            </a:pPr>
+            <a:r>
+              <a:rPr lang="en-US" sz="1300" dirty="0">
+                <a:solidFill>
+                  <a:schemeClr val="tx1"/>
+                </a:solidFill>
+                <a:latin typeface="Calibri" pitchFamily="34" charset="0"/>
+                <a:ea typeface="Calibri" pitchFamily="34" charset="-122"/>
+                <a:cs typeface="Calibri" pitchFamily="34" charset="-120"/>
+              </a:rPr>
+              <a:t>Transfermarkt est une estimation communautaire, pas un prix réel</a:t>
+            </a:r>
+            <a:endParaRPr lang="en-US" sz="1300" dirty="0"/>
+          </a:p>
+          <a:p>
+            <a:pPr marL="342900" indent="-342900">
+              <a:spcAft>
+                <a:spcPts val="800"/>
+              </a:spcAft>
+              <a:buSzPct val="100000"/>
+              <a:buChar char="•"/>
+            </a:pPr>
+            <a:r>
+              <a:rPr lang="en-US" sz="1300" dirty="0">
+                <a:solidFill>
+                  <a:schemeClr val="tx1"/>
+                </a:solidFill>
+                <a:latin typeface="Calibri" pitchFamily="34" charset="0"/>
+                <a:ea typeface="Calibri" pitchFamily="34" charset="-122"/>
+                <a:cs typeface="Calibri" pitchFamily="34" charset="-120"/>
+              </a:rPr>
+              <a:t>Le label corrigé ignore xG, dribbles, profil tactique</a:t>
+            </a:r>
+            <a:endParaRPr lang="en-US" sz="1300" dirty="0"/>
+          </a:p>
+          <a:p>
+            <a:pPr marL="342900" indent="-342900">
+              <a:spcAft>
+                <a:spcPts val="800"/>
+              </a:spcAft>
+              <a:buSzPct val="100000"/>
+              <a:buChar char="•"/>
+            </a:pPr>
+            <a:r>
+              <a:rPr lang="en-US" sz="1300" dirty="0">
+                <a:solidFill>
+                  <a:schemeClr val="tx1"/>
+                </a:solidFill>
+                <a:latin typeface="Calibri" pitchFamily="34" charset="0"/>
+                <a:ea typeface="Calibri" pitchFamily="34" charset="-122"/>
+                <a:cs typeface="Calibri" pitchFamily="34" charset="-120"/>
+              </a:rPr>
+              <a:t>Contrats absents : durée restante et salaire pèsent sur la valeur</a:t>
+            </a:r>
+            <a:endParaRPr lang="en-US" sz="1300" dirty="0"/>
+          </a:p>
+          <a:p>
+            <a:pPr marL="342900" indent="-342900">
+              <a:spcAft>
+                <a:spcPts val="800"/>
+              </a:spcAft>
+              <a:buSzPct val="100000"/>
+              <a:buChar char="•"/>
+            </a:pPr>
+            <a:r>
+              <a:rPr lang="en-US" sz="1300" dirty="0">
+                <a:solidFill>
+                  <a:schemeClr val="tx1"/>
+                </a:solidFill>
+                <a:latin typeface="Calibri" pitchFamily="34" charset="0"/>
+                <a:ea typeface="Calibri" pitchFamily="34" charset="-122"/>
+                <a:cs typeface="Calibri" pitchFamily="34" charset="-120"/>
+              </a:rPr>
+              <a:t>Une explication n'est pas une justification</a:t>
+            </a:r>
+            <a:endParaRPr lang="en-US" sz="1300" dirty="0"/>
+          </a:p>
+          <a:p>
+            <a:pPr marL="342900" indent="-342900">
+              <a:spcAft>
+                <a:spcPts val="800"/>
+              </a:spcAft>
+              <a:buSzPct val="100000"/>
+              <a:buChar char="•"/>
+            </a:pPr>
+            <a:r>
+              <a:rPr lang="en-US" sz="1300" dirty="0">
+                <a:solidFill>
+                  <a:schemeClr val="tx1"/>
+                </a:solidFill>
+                <a:latin typeface="Calibri" pitchFamily="34" charset="0"/>
+                <a:ea typeface="Calibri" pitchFamily="34" charset="-122"/>
+                <a:cs typeface="Calibri" pitchFamily="34" charset="-120"/>
+              </a:rPr>
+              <a:t>Équité contre performance : un arbitrage assumé</a:t>
+            </a:r>
+            <a:endParaRPr lang="en-US" sz="1300" dirty="0"/>
+          </a:p>
+        </p:txBody>
+      </p:sp>
+      <p:sp>
+        <p:nvSpPr>
+          <p:cNvPr id="25" name="Slide Number Placeholder 0"/>
+          <p:cNvSpPr>
+            <a:spLocks noGrp="1"/>
+          </p:cNvSpPr>
+          <p:nvPr>
+            <p:ph type="sldNum" sz="quarter" idx="4294967295"/>
+          </p:nvPr>
+        </p:nvSpPr>
+        <p:spPr>
+          <a:xfrm>
+            <a:off x="548640" y="4754880"/>
+            <a:ext cx="457200" cy="228600"/>
+          </a:xfrm>
+          <a:prstGeom prst="rect">
+            <a:avLst/>
+          </a:prstGeom>
+          <a:extLst>
+            <a:ext uri="{C572A759-6A51-4108-AA02-DFA0A04FC94B}">
+              <ma14:wrappingTextBoxFlag xmlns:ma14="http://schemas.microsoft.com/office/mac/drawingml/2011/main" val="0"/>
+            </a:ext>
+          </a:extLst>
+        </p:spPr>
+        <p:txBody>
+          <a:bodyPr/>
+          <a:lstStyle>
+            <a:lvl1pPr>
+              <a:defRPr sz="1000">
+                <a:solidFill>
+                  <a:schemeClr val="accent5"/>
+                </a:solidFill>
+                <a:latin typeface="Calibri"/>
+                <a:ea typeface="Calibri"/>
+                <a:cs typeface="Calibri"/>
+              </a:defRPr>
+            </a:lvl1pPr>
+          </a:lstStyle>
+          <a:p>
+            <a:pPr algn="l"/>
+            <a:fld id="{F7021451-1387-4CA6-816F-3879F97B5CBC}" type="slidenum">
+              <a:rPr b="0" lang="en-US"/>
+              <a:t>12</a:t>
+            </a:fld>
+            <a:endParaRPr lang="en-US"/>
+          </a:p>
+        </p:txBody>
+      </p:sp>
+    </p:spTree>
+  </p:cSld>
+  <p:clrMapOvr>
+    <a:masterClrMapping/>
+  </p:clrMapOvr>
+</p:sld>
+</file>
+
+<file path=ppt/slides/slide13.xml><?xml version="1.0" encoding="utf-8"?>
+<p:sld xmlns:a="http://schemas.openxmlformats.org/drawingml/2006/main" xmlns:r="http://schemas.openxmlformats.org/officeDocument/2006/relationships" xmlns:p="http://schemas.openxmlformats.org/presentationml/2006/main">
+  <p:cSld name="Slide 13">
+    <p:spTree>
+      <p:nvGrpSpPr>
+        <p:cNvPr id="1" name=""/>
+        <p:cNvGrpSpPr/>
+        <p:nvPr/>
+      </p:nvGrpSpPr>
+      <p:grpSpPr>
+        <a:xfrm>
+          <a:off x="0" y="0"/>
+          <a:ext cx="0" cy="0"/>
+          <a:chOff x="0" y="0"/>
+          <a:chExt cx="0" cy="0"/>
+        </a:xfrm>
+      </p:grpSpPr>
+      <p:sp>
+        <p:nvSpPr>
           <p:cNvPr id="2" name="Text 11"/>
           <p:cNvSpPr/>
           <p:nvPr>
@@ -8118,7 +9047,7 @@
                 <a:ea typeface="Arial Narrow" pitchFamily="34" charset="-122"/>
                 <a:cs typeface="Arial Narrow" pitchFamily="34" charset="-120"/>
               </a:rPr>
-              <a:t>PERFORMANCE, ÉQUITÉ, EFFICACITÉ</a:t>
+              <a:t>TROIS MÉTHODES COMPARÉES</a:t>
             </a:r>
             <a:endParaRPr lang="en-US" sz="3600" dirty="0"/>
           </a:p>
@@ -8188,11 +9117,12 @@
             <a:tbl>
               <a:tblPr/>
               <a:tblGrid>
-                <a:gridCol w="2377440"/>
+                <a:gridCol w="2103120"/>
+                <a:gridCol w="1097280"/>
+                <a:gridCol w="914400"/>
+                <a:gridCol w="1371600"/>
                 <a:gridCol w="1280160"/>
-                <a:gridCol w="1463040"/>
-                <a:gridCol w="1554480"/>
-                <a:gridCol w="1371600"/>
+                <a:gridCol w="1280160"/>
               </a:tblGrid>
               <a:tr h="384048">
                 <a:tc>
@@ -8212,7 +9142,7 @@
                           <a:ea typeface="Calibri" pitchFamily="34" charset="-122"/>
                           <a:cs typeface="Calibri" pitchFamily="34" charset="-120"/>
                         </a:rPr>
-                        <a:t>Méthode (version corrigée)</a:t>
+                        <a:t>Version corrigée</a:t>
                       </a:r>
                       <a:endParaRPr lang="en-US" sz="1200" dirty="0">
                         <a:latin typeface="Calibri" charset="0"/>
@@ -8280,7 +9210,7 @@
                           <a:ea typeface="Calibri" pitchFamily="34" charset="-122"/>
                           <a:cs typeface="Calibri" pitchFamily="34" charset="-120"/>
                         </a:rPr>
-                        <a:t>F1 vs y_fair</a:t>
+                        <a:t>F1 (mérite)</a:t>
                       </a:r>
                       <a:endParaRPr lang="en-US" sz="1200" dirty="0">
                         <a:latin typeface="Calibri" charset="0"/>
@@ -8348,7 +9278,7 @@
                           <a:ea typeface="Calibri" pitchFamily="34" charset="-122"/>
                           <a:cs typeface="Calibri" pitchFamily="34" charset="-120"/>
                         </a:rPr>
-                        <a:t>Disparate impact</a:t>
+                        <a:t>AUC</a:t>
                       </a:r>
                       <a:endParaRPr lang="en-US" sz="1200" dirty="0">
                         <a:latin typeface="Calibri" charset="0"/>
@@ -8416,7 +9346,7 @@
                           <a:ea typeface="Calibri" pitchFamily="34" charset="-122"/>
                           <a:cs typeface="Calibri" pitchFamily="34" charset="-120"/>
                         </a:rPr>
-                        <a:t>Paramètres entraînés</a:t>
+                        <a:t>Param. entraînés</a:t>
                       </a:r>
                       <a:endParaRPr lang="en-US" sz="1200" dirty="0">
                         <a:latin typeface="Calibri" charset="0"/>
@@ -8535,6 +9465,484 @@
                     </a:solidFill>
                   </a:tcPr>
                 </a:tc>
+                <a:tc>
+                  <a:txBody>
+                    <a:bodyPr/>
+                    <a:lstStyle/>
+                    <a:p>
+                      <a:pPr indent="0" marL="0">
+                        <a:buNone/>
+                      </a:pPr>
+                      <a:r>
+                        <a:rPr lang="en-US" sz="1200" b="1" dirty="0">
+                          <a:solidFill>
+                            <a:srgbClr val="FFFFFF"/>
+                          </a:solidFill>
+                          <a:latin typeface="Calibri" pitchFamily="34" charset="0"/>
+                          <a:ea typeface="Calibri" pitchFamily="34" charset="-122"/>
+                          <a:cs typeface="Calibri" pitchFamily="34" charset="-120"/>
+                        </a:rPr>
+                        <a:t>Inférence / 100</a:t>
+                      </a:r>
+                      <a:endParaRPr lang="en-US" sz="1200" dirty="0">
+                        <a:latin typeface="Calibri" charset="0"/>
+                        <a:ea typeface="Calibri" charset="0"/>
+                        <a:cs typeface="Calibri" charset="0"/>
+                      </a:endParaRPr>
+                    </a:p>
+                  </a:txBody>
+                  <a:tcPr marL="91440" marR="91440" marT="45720" marB="45720" anchor="ctr">
+                    <a:lnL w="6350" cap="flat" cmpd="sng" algn="ctr">
+                      <a:solidFill>
+                        <a:srgbClr val="D8E2D2"/>
+                      </a:solidFill>
+                      <a:prstDash val="solid"/>
+                      <a:round/>
+                      <a:headEnd type="none" w="med" len="med"/>
+                      <a:tailEnd type="none" w="med" len="med"/>
+                    </a:lnL>
+                    <a:lnR w="6350" cap="flat" cmpd="sng" algn="ctr">
+                      <a:solidFill>
+                        <a:srgbClr val="D8E2D2"/>
+                      </a:solidFill>
+                      <a:prstDash val="solid"/>
+                      <a:round/>
+                      <a:headEnd type="none" w="med" len="med"/>
+                      <a:tailEnd type="none" w="med" len="med"/>
+                    </a:lnR>
+                    <a:lnT w="6350" cap="flat" cmpd="sng" algn="ctr">
+                      <a:solidFill>
+                        <a:srgbClr val="D8E2D2"/>
+                      </a:solidFill>
+                      <a:prstDash val="solid"/>
+                      <a:round/>
+                      <a:headEnd type="none" w="med" len="med"/>
+                      <a:tailEnd type="none" w="med" len="med"/>
+                    </a:lnT>
+                    <a:lnB w="6350" cap="flat" cmpd="sng" algn="ctr">
+                      <a:solidFill>
+                        <a:srgbClr val="D8E2D2"/>
+                      </a:solidFill>
+                      <a:prstDash val="solid"/>
+                      <a:round/>
+                      <a:headEnd type="none" w="med" len="med"/>
+                      <a:tailEnd type="none" w="med" len="med"/>
+                    </a:lnB>
+                    <a:solidFill>
+                      <a:srgbClr val="1F4A1A"/>
+                    </a:solidFill>
+                  </a:tcPr>
+                </a:tc>
+              </a:tr>
+              <a:tr h="384048">
+                <a:tc>
+                  <a:txBody>
+                    <a:bodyPr/>
+                    <a:lstStyle/>
+                    <a:p>
+                      <a:pPr indent="0" marL="0">
+                        <a:buNone/>
+                      </a:pPr>
+                      <a:r>
+                        <a:rPr lang="en-US" sz="1200" b="1" dirty="0">
+                          <a:solidFill>
+                            <a:srgbClr val="16261A"/>
+                          </a:solidFill>
+                          <a:latin typeface="Calibri" pitchFamily="34" charset="0"/>
+                          <a:ea typeface="Calibri" pitchFamily="34" charset="-122"/>
+                          <a:cs typeface="Calibri" pitchFamily="34" charset="-120"/>
+                        </a:rPr>
+                        <a:t>LoRA</a:t>
+                      </a:r>
+                      <a:endParaRPr lang="en-US" sz="1200" dirty="0">
+                        <a:latin typeface="Calibri" charset="0"/>
+                        <a:ea typeface="Calibri" charset="0"/>
+                        <a:cs typeface="Calibri" charset="0"/>
+                      </a:endParaRPr>
+                    </a:p>
+                  </a:txBody>
+                  <a:tcPr marL="91440" marR="91440" marT="45720" marB="45720" anchor="ctr">
+                    <a:lnL w="6350" cap="flat" cmpd="sng" algn="ctr">
+                      <a:solidFill>
+                        <a:srgbClr val="D8E2D2"/>
+                      </a:solidFill>
+                      <a:prstDash val="solid"/>
+                      <a:round/>
+                      <a:headEnd type="none" w="med" len="med"/>
+                      <a:tailEnd type="none" w="med" len="med"/>
+                    </a:lnL>
+                    <a:lnR w="6350" cap="flat" cmpd="sng" algn="ctr">
+                      <a:solidFill>
+                        <a:srgbClr val="D8E2D2"/>
+                      </a:solidFill>
+                      <a:prstDash val="solid"/>
+                      <a:round/>
+                      <a:headEnd type="none" w="med" len="med"/>
+                      <a:tailEnd type="none" w="med" len="med"/>
+                    </a:lnR>
+                    <a:lnT w="6350" cap="flat" cmpd="sng" algn="ctr">
+                      <a:solidFill>
+                        <a:srgbClr val="D8E2D2"/>
+                      </a:solidFill>
+                      <a:prstDash val="solid"/>
+                      <a:round/>
+                      <a:headEnd type="none" w="med" len="med"/>
+                      <a:tailEnd type="none" w="med" len="med"/>
+                    </a:lnT>
+                    <a:lnB w="6350" cap="flat" cmpd="sng" algn="ctr">
+                      <a:solidFill>
+                        <a:srgbClr val="D8E2D2"/>
+                      </a:solidFill>
+                      <a:prstDash val="solid"/>
+                      <a:round/>
+                      <a:headEnd type="none" w="med" len="med"/>
+                      <a:tailEnd type="none" w="med" len="med"/>
+                    </a:lnB>
+                    <a:solidFill>
+                      <a:srgbClr val="DDEBD0"/>
+                    </a:solidFill>
+                  </a:tcPr>
+                </a:tc>
+                <a:tc>
+                  <a:txBody>
+                    <a:bodyPr/>
+                    <a:lstStyle/>
+                    <a:p>
+                      <a:pPr indent="0" marL="0">
+                        <a:buNone/>
+                      </a:pPr>
+                      <a:r>
+                        <a:rPr lang="en-US" sz="1200" b="1" dirty="0">
+                          <a:solidFill>
+                            <a:srgbClr val="16261A"/>
+                          </a:solidFill>
+                          <a:latin typeface="Calibri" pitchFamily="34" charset="0"/>
+                          <a:ea typeface="Calibri" pitchFamily="34" charset="-122"/>
+                          <a:cs typeface="Calibri" pitchFamily="34" charset="-120"/>
+                        </a:rPr>
+                        <a:t>0,839</a:t>
+                      </a:r>
+                      <a:endParaRPr lang="en-US" sz="1200" dirty="0">
+                        <a:latin typeface="Calibri" charset="0"/>
+                        <a:ea typeface="Calibri" charset="0"/>
+                        <a:cs typeface="Calibri" charset="0"/>
+                      </a:endParaRPr>
+                    </a:p>
+                  </a:txBody>
+                  <a:tcPr marL="91440" marR="91440" marT="45720" marB="45720" anchor="ctr">
+                    <a:lnL w="6350" cap="flat" cmpd="sng" algn="ctr">
+                      <a:solidFill>
+                        <a:srgbClr val="D8E2D2"/>
+                      </a:solidFill>
+                      <a:prstDash val="solid"/>
+                      <a:round/>
+                      <a:headEnd type="none" w="med" len="med"/>
+                      <a:tailEnd type="none" w="med" len="med"/>
+                    </a:lnL>
+                    <a:lnR w="6350" cap="flat" cmpd="sng" algn="ctr">
+                      <a:solidFill>
+                        <a:srgbClr val="D8E2D2"/>
+                      </a:solidFill>
+                      <a:prstDash val="solid"/>
+                      <a:round/>
+                      <a:headEnd type="none" w="med" len="med"/>
+                      <a:tailEnd type="none" w="med" len="med"/>
+                    </a:lnR>
+                    <a:lnT w="6350" cap="flat" cmpd="sng" algn="ctr">
+                      <a:solidFill>
+                        <a:srgbClr val="D8E2D2"/>
+                      </a:solidFill>
+                      <a:prstDash val="solid"/>
+                      <a:round/>
+                      <a:headEnd type="none" w="med" len="med"/>
+                      <a:tailEnd type="none" w="med" len="med"/>
+                    </a:lnT>
+                    <a:lnB w="6350" cap="flat" cmpd="sng" algn="ctr">
+                      <a:solidFill>
+                        <a:srgbClr val="D8E2D2"/>
+                      </a:solidFill>
+                      <a:prstDash val="solid"/>
+                      <a:round/>
+                      <a:headEnd type="none" w="med" len="med"/>
+                      <a:tailEnd type="none" w="med" len="med"/>
+                    </a:lnB>
+                    <a:solidFill>
+                      <a:srgbClr val="DDEBD0"/>
+                    </a:solidFill>
+                  </a:tcPr>
+                </a:tc>
+                <a:tc>
+                  <a:txBody>
+                    <a:bodyPr/>
+                    <a:lstStyle/>
+                    <a:p>
+                      <a:pPr indent="0" marL="0">
+                        <a:buNone/>
+                      </a:pPr>
+                      <a:r>
+                        <a:rPr lang="en-US" sz="1200" b="1" dirty="0">
+                          <a:solidFill>
+                            <a:srgbClr val="16261A"/>
+                          </a:solidFill>
+                          <a:latin typeface="Calibri" pitchFamily="34" charset="0"/>
+                          <a:ea typeface="Calibri" pitchFamily="34" charset="-122"/>
+                          <a:cs typeface="Calibri" pitchFamily="34" charset="-120"/>
+                        </a:rPr>
+                        <a:t>0,990</a:t>
+                      </a:r>
+                      <a:endParaRPr lang="en-US" sz="1200" dirty="0">
+                        <a:latin typeface="Calibri" charset="0"/>
+                        <a:ea typeface="Calibri" charset="0"/>
+                        <a:cs typeface="Calibri" charset="0"/>
+                      </a:endParaRPr>
+                    </a:p>
+                  </a:txBody>
+                  <a:tcPr marL="91440" marR="91440" marT="45720" marB="45720" anchor="ctr">
+                    <a:lnL w="6350" cap="flat" cmpd="sng" algn="ctr">
+                      <a:solidFill>
+                        <a:srgbClr val="D8E2D2"/>
+                      </a:solidFill>
+                      <a:prstDash val="solid"/>
+                      <a:round/>
+                      <a:headEnd type="none" w="med" len="med"/>
+                      <a:tailEnd type="none" w="med" len="med"/>
+                    </a:lnL>
+                    <a:lnR w="6350" cap="flat" cmpd="sng" algn="ctr">
+                      <a:solidFill>
+                        <a:srgbClr val="D8E2D2"/>
+                      </a:solidFill>
+                      <a:prstDash val="solid"/>
+                      <a:round/>
+                      <a:headEnd type="none" w="med" len="med"/>
+                      <a:tailEnd type="none" w="med" len="med"/>
+                    </a:lnR>
+                    <a:lnT w="6350" cap="flat" cmpd="sng" algn="ctr">
+                      <a:solidFill>
+                        <a:srgbClr val="D8E2D2"/>
+                      </a:solidFill>
+                      <a:prstDash val="solid"/>
+                      <a:round/>
+                      <a:headEnd type="none" w="med" len="med"/>
+                      <a:tailEnd type="none" w="med" len="med"/>
+                    </a:lnT>
+                    <a:lnB w="6350" cap="flat" cmpd="sng" algn="ctr">
+                      <a:solidFill>
+                        <a:srgbClr val="D8E2D2"/>
+                      </a:solidFill>
+                      <a:prstDash val="solid"/>
+                      <a:round/>
+                      <a:headEnd type="none" w="med" len="med"/>
+                      <a:tailEnd type="none" w="med" len="med"/>
+                    </a:lnB>
+                    <a:solidFill>
+                      <a:srgbClr val="DDEBD0"/>
+                    </a:solidFill>
+                  </a:tcPr>
+                </a:tc>
+                <a:tc>
+                  <a:txBody>
+                    <a:bodyPr/>
+                    <a:lstStyle/>
+                    <a:p>
+                      <a:pPr indent="0" marL="0">
+                        <a:buNone/>
+                      </a:pPr>
+                      <a:r>
+                        <a:rPr lang="en-US" sz="1200" dirty="0">
+                          <a:solidFill>
+                            <a:srgbClr val="16261A"/>
+                          </a:solidFill>
+                          <a:latin typeface="Calibri" pitchFamily="34" charset="0"/>
+                          <a:ea typeface="Calibri" pitchFamily="34" charset="-122"/>
+                          <a:cs typeface="Calibri" pitchFamily="34" charset="-120"/>
+                        </a:rPr>
+                        <a:t>2,2 M</a:t>
+                      </a:r>
+                      <a:endParaRPr lang="en-US" sz="1200" dirty="0">
+                        <a:latin typeface="Calibri" charset="0"/>
+                        <a:ea typeface="Calibri" charset="0"/>
+                        <a:cs typeface="Calibri" charset="0"/>
+                      </a:endParaRPr>
+                    </a:p>
+                  </a:txBody>
+                  <a:tcPr marL="91440" marR="91440" marT="45720" marB="45720" anchor="ctr">
+                    <a:lnL w="6350" cap="flat" cmpd="sng" algn="ctr">
+                      <a:solidFill>
+                        <a:srgbClr val="D8E2D2"/>
+                      </a:solidFill>
+                      <a:prstDash val="solid"/>
+                      <a:round/>
+                      <a:headEnd type="none" w="med" len="med"/>
+                      <a:tailEnd type="none" w="med" len="med"/>
+                    </a:lnL>
+                    <a:lnR w="6350" cap="flat" cmpd="sng" algn="ctr">
+                      <a:solidFill>
+                        <a:srgbClr val="D8E2D2"/>
+                      </a:solidFill>
+                      <a:prstDash val="solid"/>
+                      <a:round/>
+                      <a:headEnd type="none" w="med" len="med"/>
+                      <a:tailEnd type="none" w="med" len="med"/>
+                    </a:lnR>
+                    <a:lnT w="6350" cap="flat" cmpd="sng" algn="ctr">
+                      <a:solidFill>
+                        <a:srgbClr val="D8E2D2"/>
+                      </a:solidFill>
+                      <a:prstDash val="solid"/>
+                      <a:round/>
+                      <a:headEnd type="none" w="med" len="med"/>
+                      <a:tailEnd type="none" w="med" len="med"/>
+                    </a:lnT>
+                    <a:lnB w="6350" cap="flat" cmpd="sng" algn="ctr">
+                      <a:solidFill>
+                        <a:srgbClr val="D8E2D2"/>
+                      </a:solidFill>
+                      <a:prstDash val="solid"/>
+                      <a:round/>
+                      <a:headEnd type="none" w="med" len="med"/>
+                      <a:tailEnd type="none" w="med" len="med"/>
+                    </a:lnB>
+                    <a:solidFill>
+                      <a:srgbClr val="DDEBD0"/>
+                    </a:solidFill>
+                  </a:tcPr>
+                </a:tc>
+                <a:tc>
+                  <a:txBody>
+                    <a:bodyPr/>
+                    <a:lstStyle/>
+                    <a:p>
+                      <a:pPr indent="0" marL="0">
+                        <a:buNone/>
+                      </a:pPr>
+                      <a:r>
+                        <a:rPr lang="en-US" sz="1200" dirty="0">
+                          <a:solidFill>
+                            <a:srgbClr val="16261A"/>
+                          </a:solidFill>
+                          <a:latin typeface="Calibri" pitchFamily="34" charset="0"/>
+                          <a:ea typeface="Calibri" pitchFamily="34" charset="-122"/>
+                          <a:cs typeface="Calibri" pitchFamily="34" charset="-120"/>
+                        </a:rPr>
+                        <a:t>≈ 10 min*</a:t>
+                      </a:r>
+                      <a:endParaRPr lang="en-US" sz="1200" dirty="0">
+                        <a:latin typeface="Calibri" charset="0"/>
+                        <a:ea typeface="Calibri" charset="0"/>
+                        <a:cs typeface="Calibri" charset="0"/>
+                      </a:endParaRPr>
+                    </a:p>
+                  </a:txBody>
+                  <a:tcPr marL="91440" marR="91440" marT="45720" marB="45720" anchor="ctr">
+                    <a:lnL w="6350" cap="flat" cmpd="sng" algn="ctr">
+                      <a:solidFill>
+                        <a:srgbClr val="D8E2D2"/>
+                      </a:solidFill>
+                      <a:prstDash val="solid"/>
+                      <a:round/>
+                      <a:headEnd type="none" w="med" len="med"/>
+                      <a:tailEnd type="none" w="med" len="med"/>
+                    </a:lnL>
+                    <a:lnR w="6350" cap="flat" cmpd="sng" algn="ctr">
+                      <a:solidFill>
+                        <a:srgbClr val="D8E2D2"/>
+                      </a:solidFill>
+                      <a:prstDash val="solid"/>
+                      <a:round/>
+                      <a:headEnd type="none" w="med" len="med"/>
+                      <a:tailEnd type="none" w="med" len="med"/>
+                    </a:lnR>
+                    <a:lnT w="6350" cap="flat" cmpd="sng" algn="ctr">
+                      <a:solidFill>
+                        <a:srgbClr val="D8E2D2"/>
+                      </a:solidFill>
+                      <a:prstDash val="solid"/>
+                      <a:round/>
+                      <a:headEnd type="none" w="med" len="med"/>
+                      <a:tailEnd type="none" w="med" len="med"/>
+                    </a:lnT>
+                    <a:lnB w="6350" cap="flat" cmpd="sng" algn="ctr">
+                      <a:solidFill>
+                        <a:srgbClr val="D8E2D2"/>
+                      </a:solidFill>
+                      <a:prstDash val="solid"/>
+                      <a:round/>
+                      <a:headEnd type="none" w="med" len="med"/>
+                      <a:tailEnd type="none" w="med" len="med"/>
+                    </a:lnB>
+                    <a:solidFill>
+                      <a:srgbClr val="DDEBD0"/>
+                    </a:solidFill>
+                  </a:tcPr>
+                </a:tc>
+                <a:tc>
+                  <a:txBody>
+                    <a:bodyPr/>
+                    <a:lstStyle/>
+                    <a:p>
+                      <a:pPr indent="0" marL="0">
+                        <a:buNone/>
+                      </a:pPr>
+                      <a:r>
+                        <a:rPr lang="en-US" sz="1200" dirty="0">
+                          <a:solidFill>
+                            <a:srgbClr val="16261A"/>
+                          </a:solidFill>
+                          <a:latin typeface="Calibri" pitchFamily="34" charset="0"/>
+                          <a:ea typeface="Calibri" pitchFamily="34" charset="-122"/>
+                          <a:cs typeface="Calibri" pitchFamily="34" charset="-120"/>
+                        </a:rPr>
+                        <a:t>1,1 s</a:t>
+                      </a:r>
+                      <a:endParaRPr lang="en-US" sz="1200" dirty="0">
+                        <a:latin typeface="Calibri" charset="0"/>
+                        <a:ea typeface="Calibri" charset="0"/>
+                        <a:cs typeface="Calibri" charset="0"/>
+                      </a:endParaRPr>
+                    </a:p>
+                  </a:txBody>
+                  <a:tcPr marL="91440" marR="91440" marT="45720" marB="45720" anchor="ctr">
+                    <a:lnL w="6350" cap="flat" cmpd="sng" algn="ctr">
+                      <a:solidFill>
+                        <a:srgbClr val="D8E2D2"/>
+                      </a:solidFill>
+                      <a:prstDash val="solid"/>
+                      <a:round/>
+                      <a:headEnd type="none" w="med" len="med"/>
+                      <a:tailEnd type="none" w="med" len="med"/>
+                    </a:lnL>
+                    <a:lnR w="6350" cap="flat" cmpd="sng" algn="ctr">
+                      <a:solidFill>
+                        <a:srgbClr val="D8E2D2"/>
+                      </a:solidFill>
+                      <a:prstDash val="solid"/>
+                      <a:round/>
+                      <a:headEnd type="none" w="med" len="med"/>
+                      <a:tailEnd type="none" w="med" len="med"/>
+                    </a:lnR>
+                    <a:lnT w="6350" cap="flat" cmpd="sng" algn="ctr">
+                      <a:solidFill>
+                        <a:srgbClr val="D8E2D2"/>
+                      </a:solidFill>
+                      <a:prstDash val="solid"/>
+                      <a:round/>
+                      <a:headEnd type="none" w="med" len="med"/>
+                      <a:tailEnd type="none" w="med" len="med"/>
+                    </a:lnT>
+                    <a:lnB w="6350" cap="flat" cmpd="sng" algn="ctr">
+                      <a:solidFill>
+                        <a:srgbClr val="D8E2D2"/>
+                      </a:solidFill>
+                      <a:prstDash val="solid"/>
+                      <a:round/>
+                      <a:headEnd type="none" w="med" len="med"/>
+                      <a:tailEnd type="none" w="med" len="med"/>
+                    </a:lnB>
+                    <a:solidFill>
+                      <a:srgbClr val="DDEBD0"/>
+                    </a:solidFill>
+                  </a:tcPr>
+                </a:tc>
               </a:tr>
               <a:tr h="384048">
                 <a:tc>
@@ -8601,7 +10009,7 @@
                       <a:tailEnd type="none" w="med" len="med"/>
                     </a:lnB>
                     <a:solidFill>
-                      <a:srgbClr val="EEF3EA"/>
+                      <a:srgbClr val="FFFFFF"/>
                     </a:solidFill>
                   </a:tcPr>
                 </a:tc>
@@ -8622,7 +10030,7 @@
                           <a:ea typeface="Calibri" pitchFamily="34" charset="-122"/>
                           <a:cs typeface="Calibri" pitchFamily="34" charset="-120"/>
                         </a:rPr>
-                        <a:t>à venir</a:t>
+                        <a:t>0,725</a:t>
                       </a:r>
                       <a:endParaRPr lang="en-US" sz="1200" dirty="0">
                         <a:latin typeface="Calibri" charset="0"/>
@@ -8669,7 +10077,7 @@
                       <a:tailEnd type="none" w="med" len="med"/>
                     </a:lnB>
                     <a:solidFill>
-                      <a:srgbClr val="EEF3EA"/>
+                      <a:srgbClr val="FFFFFF"/>
                     </a:solidFill>
                   </a:tcPr>
                 </a:tc>
@@ -8690,7 +10098,7 @@
                           <a:ea typeface="Calibri" pitchFamily="34" charset="-122"/>
                           <a:cs typeface="Calibri" pitchFamily="34" charset="-120"/>
                         </a:rPr>
-                        <a:t>à venir</a:t>
+                        <a:t>0,964</a:t>
                       </a:r>
                       <a:endParaRPr lang="en-US" sz="1200" dirty="0">
                         <a:latin typeface="Calibri" charset="0"/>
@@ -8737,7 +10145,7 @@
                       <a:tailEnd type="none" w="med" len="med"/>
                     </a:lnB>
                     <a:solidFill>
-                      <a:srgbClr val="EEF3EA"/>
+                      <a:srgbClr val="FFFFFF"/>
                     </a:solidFill>
                   </a:tcPr>
                 </a:tc>
@@ -8805,7 +10213,7 @@
                       <a:tailEnd type="none" w="med" len="med"/>
                     </a:lnB>
                     <a:solidFill>
-                      <a:srgbClr val="EEF3EA"/>
+                      <a:srgbClr val="FFFFFF"/>
                     </a:solidFill>
                   </a:tcPr>
                 </a:tc>
@@ -8826,77 +10234,7 @@
                           <a:ea typeface="Calibri" pitchFamily="34" charset="-122"/>
                           <a:cs typeface="Calibri" pitchFamily="34" charset="-120"/>
                         </a:rPr>
-                        <a:t>à venir</a:t>
-                      </a:r>
-                      <a:endParaRPr lang="en-US" sz="1200" dirty="0">
-                        <a:latin typeface="Calibri" charset="0"/>
-                        <a:ea typeface="Calibri" charset="0"/>
-                        <a:cs typeface="Calibri" charset="0"/>
-                      </a:endParaRPr>
-                    </a:p>
-                  </a:txBody>
-                  <a:tcPr marL="91440" marR="91440" marT="45720" marB="45720" anchor="ctr">
-                    <a:lnL w="6350" cap="flat" cmpd="sng" algn="ctr">
-                      <a:solidFill>
-                        <a:srgbClr val="D8E2D2"/>
-                      </a:solidFill>
-                      <a:prstDash val="solid"/>
-                      <a:round/>
-                      <a:headEnd type="none" w="med" len="med"/>
-                      <a:tailEnd type="none" w="med" len="med"/>
-                    </a:lnL>
-                    <a:lnR w="6350" cap="flat" cmpd="sng" algn="ctr">
-                      <a:solidFill>
-                        <a:srgbClr val="D8E2D2"/>
-                      </a:solidFill>
-                      <a:prstDash val="solid"/>
-                      <a:round/>
-                      <a:headEnd type="none" w="med" len="med"/>
-                      <a:tailEnd type="none" w="med" len="med"/>
-                    </a:lnR>
-                    <a:lnT w="6350" cap="flat" cmpd="sng" algn="ctr">
-                      <a:solidFill>
-                        <a:srgbClr val="D8E2D2"/>
-                      </a:solidFill>
-                      <a:prstDash val="solid"/>
-                      <a:round/>
-                      <a:headEnd type="none" w="med" len="med"/>
-                      <a:tailEnd type="none" w="med" len="med"/>
-                    </a:lnT>
-                    <a:lnB w="6350" cap="flat" cmpd="sng" algn="ctr">
-                      <a:solidFill>
-                        <a:srgbClr val="D8E2D2"/>
-                      </a:solidFill>
-                      <a:prstDash val="solid"/>
-                      <a:round/>
-                      <a:headEnd type="none" w="med" len="med"/>
-                      <a:tailEnd type="none" w="med" len="med"/>
-                    </a:lnB>
-                    <a:solidFill>
-                      <a:srgbClr val="EEF3EA"/>
-                    </a:solidFill>
-                  </a:tcPr>
-                </a:tc>
-              </a:tr>
-              <a:tr h="384048">
-                <a:tc>
-                  <a:txBody>
-                    <a:bodyPr/>
-                    <a:lstStyle/>
-                    <a:p>
-                      <a:pPr indent="0" marL="0">
-                        <a:buNone/>
-                      </a:pPr>
-                      <a:r>
-                        <a:rPr lang="en-US" sz="1200" dirty="0">
-                          <a:solidFill>
-                            <a:srgbClr val="16261A"/>
-                          </a:solidFill>
-                          <a:latin typeface="Calibri" pitchFamily="34" charset="0"/>
-                          <a:ea typeface="Calibri" pitchFamily="34" charset="-122"/>
-                          <a:cs typeface="Calibri" pitchFamily="34" charset="-120"/>
-                        </a:rPr>
-                        <a:t>LoRA</a:t>
+                        <a:t>8,8 min</a:t>
                       </a:r>
                       <a:endParaRPr lang="en-US" sz="1200" dirty="0">
                         <a:latin typeface="Calibri" charset="0"/>
@@ -8964,211 +10302,7 @@
                           <a:ea typeface="Calibri" pitchFamily="34" charset="-122"/>
                           <a:cs typeface="Calibri" pitchFamily="34" charset="-120"/>
                         </a:rPr>
-                        <a:t>à venir</a:t>
-                      </a:r>
-                      <a:endParaRPr lang="en-US" sz="1200" dirty="0">
-                        <a:latin typeface="Calibri" charset="0"/>
-                        <a:ea typeface="Calibri" charset="0"/>
-                        <a:cs typeface="Calibri" charset="0"/>
-                      </a:endParaRPr>
-                    </a:p>
-                  </a:txBody>
-                  <a:tcPr marL="91440" marR="91440" marT="45720" marB="45720" anchor="ctr">
-                    <a:lnL w="6350" cap="flat" cmpd="sng" algn="ctr">
-                      <a:solidFill>
-                        <a:srgbClr val="D8E2D2"/>
-                      </a:solidFill>
-                      <a:prstDash val="solid"/>
-                      <a:round/>
-                      <a:headEnd type="none" w="med" len="med"/>
-                      <a:tailEnd type="none" w="med" len="med"/>
-                    </a:lnL>
-                    <a:lnR w="6350" cap="flat" cmpd="sng" algn="ctr">
-                      <a:solidFill>
-                        <a:srgbClr val="D8E2D2"/>
-                      </a:solidFill>
-                      <a:prstDash val="solid"/>
-                      <a:round/>
-                      <a:headEnd type="none" w="med" len="med"/>
-                      <a:tailEnd type="none" w="med" len="med"/>
-                    </a:lnR>
-                    <a:lnT w="6350" cap="flat" cmpd="sng" algn="ctr">
-                      <a:solidFill>
-                        <a:srgbClr val="D8E2D2"/>
-                      </a:solidFill>
-                      <a:prstDash val="solid"/>
-                      <a:round/>
-                      <a:headEnd type="none" w="med" len="med"/>
-                      <a:tailEnd type="none" w="med" len="med"/>
-                    </a:lnT>
-                    <a:lnB w="6350" cap="flat" cmpd="sng" algn="ctr">
-                      <a:solidFill>
-                        <a:srgbClr val="D8E2D2"/>
-                      </a:solidFill>
-                      <a:prstDash val="solid"/>
-                      <a:round/>
-                      <a:headEnd type="none" w="med" len="med"/>
-                      <a:tailEnd type="none" w="med" len="med"/>
-                    </a:lnB>
-                    <a:solidFill>
-                      <a:srgbClr val="FFFFFF"/>
-                    </a:solidFill>
-                  </a:tcPr>
-                </a:tc>
-                <a:tc>
-                  <a:txBody>
-                    <a:bodyPr/>
-                    <a:lstStyle/>
-                    <a:p>
-                      <a:pPr indent="0" marL="0">
-                        <a:buNone/>
-                      </a:pPr>
-                      <a:r>
-                        <a:rPr lang="en-US" sz="1200" dirty="0">
-                          <a:solidFill>
-                            <a:srgbClr val="16261A"/>
-                          </a:solidFill>
-                          <a:latin typeface="Calibri" pitchFamily="34" charset="0"/>
-                          <a:ea typeface="Calibri" pitchFamily="34" charset="-122"/>
-                          <a:cs typeface="Calibri" pitchFamily="34" charset="-120"/>
-                        </a:rPr>
-                        <a:t>à venir</a:t>
-                      </a:r>
-                      <a:endParaRPr lang="en-US" sz="1200" dirty="0">
-                        <a:latin typeface="Calibri" charset="0"/>
-                        <a:ea typeface="Calibri" charset="0"/>
-                        <a:cs typeface="Calibri" charset="0"/>
-                      </a:endParaRPr>
-                    </a:p>
-                  </a:txBody>
-                  <a:tcPr marL="91440" marR="91440" marT="45720" marB="45720" anchor="ctr">
-                    <a:lnL w="6350" cap="flat" cmpd="sng" algn="ctr">
-                      <a:solidFill>
-                        <a:srgbClr val="D8E2D2"/>
-                      </a:solidFill>
-                      <a:prstDash val="solid"/>
-                      <a:round/>
-                      <a:headEnd type="none" w="med" len="med"/>
-                      <a:tailEnd type="none" w="med" len="med"/>
-                    </a:lnL>
-                    <a:lnR w="6350" cap="flat" cmpd="sng" algn="ctr">
-                      <a:solidFill>
-                        <a:srgbClr val="D8E2D2"/>
-                      </a:solidFill>
-                      <a:prstDash val="solid"/>
-                      <a:round/>
-                      <a:headEnd type="none" w="med" len="med"/>
-                      <a:tailEnd type="none" w="med" len="med"/>
-                    </a:lnR>
-                    <a:lnT w="6350" cap="flat" cmpd="sng" algn="ctr">
-                      <a:solidFill>
-                        <a:srgbClr val="D8E2D2"/>
-                      </a:solidFill>
-                      <a:prstDash val="solid"/>
-                      <a:round/>
-                      <a:headEnd type="none" w="med" len="med"/>
-                      <a:tailEnd type="none" w="med" len="med"/>
-                    </a:lnT>
-                    <a:lnB w="6350" cap="flat" cmpd="sng" algn="ctr">
-                      <a:solidFill>
-                        <a:srgbClr val="D8E2D2"/>
-                      </a:solidFill>
-                      <a:prstDash val="solid"/>
-                      <a:round/>
-                      <a:headEnd type="none" w="med" len="med"/>
-                      <a:tailEnd type="none" w="med" len="med"/>
-                    </a:lnB>
-                    <a:solidFill>
-                      <a:srgbClr val="FFFFFF"/>
-                    </a:solidFill>
-                  </a:tcPr>
-                </a:tc>
-                <a:tc>
-                  <a:txBody>
-                    <a:bodyPr/>
-                    <a:lstStyle/>
-                    <a:p>
-                      <a:pPr indent="0" marL="0">
-                        <a:buNone/>
-                      </a:pPr>
-                      <a:r>
-                        <a:rPr lang="en-US" sz="1200" dirty="0">
-                          <a:solidFill>
-                            <a:srgbClr val="16261A"/>
-                          </a:solidFill>
-                          <a:latin typeface="Calibri" pitchFamily="34" charset="0"/>
-                          <a:ea typeface="Calibri" pitchFamily="34" charset="-122"/>
-                          <a:cs typeface="Calibri" pitchFamily="34" charset="-120"/>
-                        </a:rPr>
-                        <a:t>2,2 M</a:t>
-                      </a:r>
-                      <a:endParaRPr lang="en-US" sz="1200" dirty="0">
-                        <a:latin typeface="Calibri" charset="0"/>
-                        <a:ea typeface="Calibri" charset="0"/>
-                        <a:cs typeface="Calibri" charset="0"/>
-                      </a:endParaRPr>
-                    </a:p>
-                  </a:txBody>
-                  <a:tcPr marL="91440" marR="91440" marT="45720" marB="45720" anchor="ctr">
-                    <a:lnL w="6350" cap="flat" cmpd="sng" algn="ctr">
-                      <a:solidFill>
-                        <a:srgbClr val="D8E2D2"/>
-                      </a:solidFill>
-                      <a:prstDash val="solid"/>
-                      <a:round/>
-                      <a:headEnd type="none" w="med" len="med"/>
-                      <a:tailEnd type="none" w="med" len="med"/>
-                    </a:lnL>
-                    <a:lnR w="6350" cap="flat" cmpd="sng" algn="ctr">
-                      <a:solidFill>
-                        <a:srgbClr val="D8E2D2"/>
-                      </a:solidFill>
-                      <a:prstDash val="solid"/>
-                      <a:round/>
-                      <a:headEnd type="none" w="med" len="med"/>
-                      <a:tailEnd type="none" w="med" len="med"/>
-                    </a:lnR>
-                    <a:lnT w="6350" cap="flat" cmpd="sng" algn="ctr">
-                      <a:solidFill>
-                        <a:srgbClr val="D8E2D2"/>
-                      </a:solidFill>
-                      <a:prstDash val="solid"/>
-                      <a:round/>
-                      <a:headEnd type="none" w="med" len="med"/>
-                      <a:tailEnd type="none" w="med" len="med"/>
-                    </a:lnT>
-                    <a:lnB w="6350" cap="flat" cmpd="sng" algn="ctr">
-                      <a:solidFill>
-                        <a:srgbClr val="D8E2D2"/>
-                      </a:solidFill>
-                      <a:prstDash val="solid"/>
-                      <a:round/>
-                      <a:headEnd type="none" w="med" len="med"/>
-                      <a:tailEnd type="none" w="med" len="med"/>
-                    </a:lnB>
-                    <a:solidFill>
-                      <a:srgbClr val="FFFFFF"/>
-                    </a:solidFill>
-                  </a:tcPr>
-                </a:tc>
-                <a:tc>
-                  <a:txBody>
-                    <a:bodyPr/>
-                    <a:lstStyle/>
-                    <a:p>
-                      <a:pPr indent="0" marL="0">
-                        <a:buNone/>
-                      </a:pPr>
-                      <a:r>
-                        <a:rPr lang="en-US" sz="1200" dirty="0">
-                          <a:solidFill>
-                            <a:srgbClr val="16261A"/>
-                          </a:solidFill>
-                          <a:latin typeface="Calibri" pitchFamily="34" charset="0"/>
-                          <a:ea typeface="Calibri" pitchFamily="34" charset="-122"/>
-                          <a:cs typeface="Calibri" pitchFamily="34" charset="-120"/>
-                        </a:rPr>
-                        <a:t>à venir</a:t>
+                        <a:t>1,0 s</a:t>
                       </a:r>
                       <a:endParaRPr lang="en-US" sz="1200" dirty="0">
                         <a:latin typeface="Calibri" charset="0"/>
@@ -9306,7 +10440,7 @@
                           <a:ea typeface="Calibri" pitchFamily="34" charset="-122"/>
                           <a:cs typeface="Calibri" pitchFamily="34" charset="-120"/>
                         </a:rPr>
-                        <a:t>à venir</a:t>
+                        <a:t>0,737</a:t>
                       </a:r>
                       <a:endParaRPr lang="en-US" sz="1200" dirty="0">
                         <a:latin typeface="Calibri" charset="0"/>
@@ -9374,7 +10508,7 @@
                           <a:ea typeface="Calibri" pitchFamily="34" charset="-122"/>
                           <a:cs typeface="Calibri" pitchFamily="34" charset="-120"/>
                         </a:rPr>
-                        <a:t>à venir</a:t>
+                        <a:t>0,968</a:t>
                       </a:r>
                       <a:endParaRPr lang="en-US" sz="1200" dirty="0">
                         <a:latin typeface="Calibri" charset="0"/>
@@ -9442,7 +10576,7 @@
                           <a:ea typeface="Calibri" pitchFamily="34" charset="-122"/>
                           <a:cs typeface="Calibri" pitchFamily="34" charset="-120"/>
                         </a:rPr>
-                        <a:t>≈ 255 M</a:t>
+                        <a:t>255 M</a:t>
                       </a:r>
                       <a:endParaRPr lang="en-US" sz="1200" dirty="0">
                         <a:latin typeface="Calibri" charset="0"/>
@@ -9510,7 +10644,75 @@
                           <a:ea typeface="Calibri" pitchFamily="34" charset="-122"/>
                           <a:cs typeface="Calibri" pitchFamily="34" charset="-120"/>
                         </a:rPr>
-                        <a:t>à venir</a:t>
+                        <a:t>5,1 min</a:t>
+                      </a:r>
+                      <a:endParaRPr lang="en-US" sz="1200" dirty="0">
+                        <a:latin typeface="Calibri" charset="0"/>
+                        <a:ea typeface="Calibri" charset="0"/>
+                        <a:cs typeface="Calibri" charset="0"/>
+                      </a:endParaRPr>
+                    </a:p>
+                  </a:txBody>
+                  <a:tcPr marL="91440" marR="91440" marT="45720" marB="45720" anchor="ctr">
+                    <a:lnL w="6350" cap="flat" cmpd="sng" algn="ctr">
+                      <a:solidFill>
+                        <a:srgbClr val="D8E2D2"/>
+                      </a:solidFill>
+                      <a:prstDash val="solid"/>
+                      <a:round/>
+                      <a:headEnd type="none" w="med" len="med"/>
+                      <a:tailEnd type="none" w="med" len="med"/>
+                    </a:lnL>
+                    <a:lnR w="6350" cap="flat" cmpd="sng" algn="ctr">
+                      <a:solidFill>
+                        <a:srgbClr val="D8E2D2"/>
+                      </a:solidFill>
+                      <a:prstDash val="solid"/>
+                      <a:round/>
+                      <a:headEnd type="none" w="med" len="med"/>
+                      <a:tailEnd type="none" w="med" len="med"/>
+                    </a:lnR>
+                    <a:lnT w="6350" cap="flat" cmpd="sng" algn="ctr">
+                      <a:solidFill>
+                        <a:srgbClr val="D8E2D2"/>
+                      </a:solidFill>
+                      <a:prstDash val="solid"/>
+                      <a:round/>
+                      <a:headEnd type="none" w="med" len="med"/>
+                      <a:tailEnd type="none" w="med" len="med"/>
+                    </a:lnT>
+                    <a:lnB w="6350" cap="flat" cmpd="sng" algn="ctr">
+                      <a:solidFill>
+                        <a:srgbClr val="D8E2D2"/>
+                      </a:solidFill>
+                      <a:prstDash val="solid"/>
+                      <a:round/>
+                      <a:headEnd type="none" w="med" len="med"/>
+                      <a:tailEnd type="none" w="med" len="med"/>
+                    </a:lnB>
+                    <a:solidFill>
+                      <a:srgbClr val="EEF3EA"/>
+                    </a:solidFill>
+                  </a:tcPr>
+                </a:tc>
+                <a:tc>
+                  <a:txBody>
+                    <a:bodyPr/>
+                    <a:lstStyle/>
+                    <a:p>
+                      <a:pPr indent="0" marL="0">
+                        <a:buNone/>
+                      </a:pPr>
+                      <a:r>
+                        <a:rPr lang="en-US" sz="1200" dirty="0">
+                          <a:solidFill>
+                            <a:srgbClr val="16261A"/>
+                          </a:solidFill>
+                          <a:latin typeface="Calibri" pitchFamily="34" charset="0"/>
+                          <a:ea typeface="Calibri" pitchFamily="34" charset="-122"/>
+                          <a:cs typeface="Calibri" pitchFamily="34" charset="-120"/>
+                        </a:rPr>
+                        <a:t>0,5 s</a:t>
                       </a:r>
                       <a:endParaRPr lang="en-US" sz="1200" dirty="0">
                         <a:latin typeface="Calibri" charset="0"/>
@@ -9648,7 +10850,7 @@
                           <a:ea typeface="Calibri" pitchFamily="34" charset="-122"/>
                           <a:cs typeface="Calibri" pitchFamily="34" charset="-120"/>
                         </a:rPr>
-                        <a:t>à venir</a:t>
+                        <a:t>0,644</a:t>
                       </a:r>
                       <a:endParaRPr lang="en-US" sz="1200" dirty="0">
                         <a:latin typeface="Calibri" charset="0"/>
@@ -9716,7 +10918,7 @@
                           <a:ea typeface="Calibri" pitchFamily="34" charset="-122"/>
                           <a:cs typeface="Calibri" pitchFamily="34" charset="-120"/>
                         </a:rPr>
-                        <a:t>à venir</a:t>
+                        <a:t>0,697</a:t>
                       </a:r>
                       <a:endParaRPr lang="en-US" sz="1200" dirty="0">
                         <a:latin typeface="Calibri" charset="0"/>
@@ -9903,6 +11105,74 @@
                     </a:solidFill>
                   </a:tcPr>
                 </a:tc>
+                <a:tc>
+                  <a:txBody>
+                    <a:bodyPr/>
+                    <a:lstStyle/>
+                    <a:p>
+                      <a:pPr indent="0" marL="0">
+                        <a:buNone/>
+                      </a:pPr>
+                      <a:r>
+                        <a:rPr lang="en-US" sz="1200" dirty="0">
+                          <a:solidFill>
+                            <a:srgbClr val="16261A"/>
+                          </a:solidFill>
+                          <a:latin typeface="Calibri" pitchFamily="34" charset="0"/>
+                          <a:ea typeface="Calibri" pitchFamily="34" charset="-122"/>
+                          <a:cs typeface="Calibri" pitchFamily="34" charset="-120"/>
+                        </a:rPr>
+                        <a:t>3,0 s</a:t>
+                      </a:r>
+                      <a:endParaRPr lang="en-US" sz="1200" dirty="0">
+                        <a:latin typeface="Calibri" charset="0"/>
+                        <a:ea typeface="Calibri" charset="0"/>
+                        <a:cs typeface="Calibri" charset="0"/>
+                      </a:endParaRPr>
+                    </a:p>
+                  </a:txBody>
+                  <a:tcPr marL="91440" marR="91440" marT="45720" marB="45720" anchor="ctr">
+                    <a:lnL w="6350" cap="flat" cmpd="sng" algn="ctr">
+                      <a:solidFill>
+                        <a:srgbClr val="D8E2D2"/>
+                      </a:solidFill>
+                      <a:prstDash val="solid"/>
+                      <a:round/>
+                      <a:headEnd type="none" w="med" len="med"/>
+                      <a:tailEnd type="none" w="med" len="med"/>
+                    </a:lnL>
+                    <a:lnR w="6350" cap="flat" cmpd="sng" algn="ctr">
+                      <a:solidFill>
+                        <a:srgbClr val="D8E2D2"/>
+                      </a:solidFill>
+                      <a:prstDash val="solid"/>
+                      <a:round/>
+                      <a:headEnd type="none" w="med" len="med"/>
+                      <a:tailEnd type="none" w="med" len="med"/>
+                    </a:lnR>
+                    <a:lnT w="6350" cap="flat" cmpd="sng" algn="ctr">
+                      <a:solidFill>
+                        <a:srgbClr val="D8E2D2"/>
+                      </a:solidFill>
+                      <a:prstDash val="solid"/>
+                      <a:round/>
+                      <a:headEnd type="none" w="med" len="med"/>
+                      <a:tailEnd type="none" w="med" len="med"/>
+                    </a:lnT>
+                    <a:lnB w="6350" cap="flat" cmpd="sng" algn="ctr">
+                      <a:solidFill>
+                        <a:srgbClr val="D8E2D2"/>
+                      </a:solidFill>
+                      <a:prstDash val="solid"/>
+                      <a:round/>
+                      <a:headEnd type="none" w="med" len="med"/>
+                      <a:tailEnd type="none" w="med" len="med"/>
+                    </a:lnB>
+                    <a:solidFill>
+                      <a:srgbClr val="FFFFFF"/>
+                    </a:solidFill>
+                  </a:tcPr>
+                </a:tc>
               </a:tr>
             </a:tbl>
           </a:graphicData>
@@ -9910,18 +11180,18 @@
       </p:graphicFrame>
       <p:sp>
         <p:nvSpPr>
-          <p:cNvPr id="6" name="critere"/>
+          <p:cNvPr id="6" name="retenu"/>
           <p:cNvSpPr/>
           <p:nvPr/>
         </p:nvSpPr>
         <p:spPr>
           <a:xfrm>
             <a:off x="548640" y="3611880"/>
-            <a:ext cx="8046720" cy="777240"/>
+            <a:ext cx="8046720" cy="731520"/>
           </a:xfrm>
           <a:prstGeom prst="roundRect">
             <a:avLst>
-              <a:gd name="adj" fmla="val 9412"/>
+              <a:gd name="adj" fmla="val 10000"/>
             </a:avLst>
           </a:prstGeom>
           <a:solidFill>
@@ -9938,8 +11208,8 @@
         </p:nvSpPr>
         <p:spPr>
           <a:xfrm>
-            <a:off x="731520" y="3703320"/>
-            <a:ext cx="7680960" cy="594360"/>
+            <a:off x="731520" y="3675888"/>
+            <a:ext cx="7680960" cy="603504"/>
           </a:xfrm>
           <a:prstGeom prst="rect">
             <a:avLst/>
@@ -9955,7 +11225,7 @@
               <a:buNone/>
             </a:pPr>
             <a:r>
-              <a:rPr lang="en-US" sz="1400" b="1" dirty="0">
+              <a:rPr lang="en-US" sz="1300" b="1" dirty="0">
                 <a:solidFill>
                   <a:schemeClr val="accent1"/>
                 </a:solidFill>
@@ -9963,13 +11233,13 @@
                 <a:ea typeface="Calibri" pitchFamily="34" charset="-122"/>
                 <a:cs typeface="Calibri" pitchFamily="34" charset="-120"/>
               </a:rPr>
-              <a:t>Critère de choix  </a:t>
+              <a:t>Retenu : LoRA corrigé.  </a:t>
             </a:r>
             <a:pPr indent="0" marL="0">
               <a:buNone/>
             </a:pPr>
             <a:r>
-              <a:rPr lang="en-US" sz="1400" dirty="0">
+              <a:rPr lang="en-US" sz="1300" dirty="0">
                 <a:solidFill>
                   <a:schemeClr val="tx1"/>
                 </a:solidFill>
@@ -9977,9 +11247,48 @@
                 <a:ea typeface="Calibri" pitchFamily="34" charset="-122"/>
                 <a:cs typeface="Calibri" pitchFamily="34" charset="-120"/>
               </a:rPr>
-              <a:t>score = F1(y_fair) × min(1, DI / 0,8). À score proche, le modèle le plus léger.</a:t>
-            </a:r>
-            <a:endParaRPr lang="en-US" sz="1400" dirty="0"/>
+              <a:t>Meilleure F1 avec 200 fois moins de paramètres entraînés que le fine-tuning complet. L'élève distillé est 2 fois plus rapide en inférence.</a:t>
+            </a:r>
+            <a:endParaRPr lang="en-US" sz="1300" dirty="0"/>
+          </a:p>
+        </p:txBody>
+      </p:sp>
+      <p:sp>
+        <p:nvSpPr>
+          <p:cNvPr id="8" name="Text 5"/>
+          <p:cNvSpPr txBox="1"/>
+          <p:nvPr/>
+        </p:nvSpPr>
+        <p:spPr>
+          <a:xfrm>
+            <a:off x="548640" y="4416552"/>
+            <a:ext cx="8046720" cy="228600"/>
+          </a:xfrm>
+          <a:prstGeom prst="rect">
+            <a:avLst/>
+          </a:prstGeom>
+          <a:noFill/>
+          <a:ln/>
+        </p:spPr>
+        <p:txBody>
+          <a:bodyPr wrap="square" lIns="0" tIns="0" rIns="0" bIns="0" rtlCol="0" anchor="ctr"/>
+          <a:lstStyle/>
+          <a:p>
+            <a:pPr indent="0" marL="0">
+              <a:buNone/>
+            </a:pPr>
+            <a:r>
+              <a:rPr lang="en-US" sz="1000" dirty="0">
+                <a:solidFill>
+                  <a:schemeClr val="accent5"/>
+                </a:solidFill>
+                <a:latin typeface="Calibri" pitchFamily="34" charset="0"/>
+                <a:ea typeface="Calibri" pitchFamily="34" charset="-122"/>
+                <a:cs typeface="Calibri" pitchFamily="34" charset="-120"/>
+              </a:rPr>
+              <a:t>* adaptateurs entraînés lors d'un run précédent. F1 et AUC mesurées par rapport au label corrigé, sur 300 joueurs de la saison 2025/26.</a:t>
+            </a:r>
+            <a:endParaRPr lang="en-US" sz="1000" dirty="0"/>
           </a:p>
         </p:txBody>
       </p:sp>
@@ -10091,7 +11400,7 @@
                 <a:ea typeface="Calibri" pitchFamily="34" charset="-122"/>
                 <a:cs typeface="Calibri" pitchFamily="34" charset="-120"/>
               </a:rPr>
-              <a:t>07 · EXPLICABILITÉ</a:t>
+              <a:t>07 · ÉQUITÉ</a:t>
             </a:r>
             <a:endParaRPr lang="en-US" sz="1100" dirty="0"/>
           </a:p>
@@ -10132,7 +11441,7 @@
                 <a:ea typeface="Arial Narrow" pitchFamily="34" charset="-122"/>
                 <a:cs typeface="Arial Narrow" pitchFamily="34" charset="-120"/>
               </a:rPr>
-              <a:t>LIME ET SHAP SUR LE LLM</a:t>
+              <a:t>MÉRITE OU PARITÉ ?</a:t>
             </a:r>
             <a:endParaRPr lang="en-US" sz="3600" dirty="0"/>
           </a:p>
@@ -10181,18 +11490,18 @@
       </p:sp>
       <p:sp>
         <p:nvSpPr>
-          <p:cNvPr id="5" name="xai_0"/>
+          <p:cNvPr id="5" name="equite_0"/>
           <p:cNvSpPr/>
           <p:nvPr/>
         </p:nvSpPr>
         <p:spPr>
           <a:xfrm>
             <a:off x="548640" y="1463040"/>
-            <a:ext cx="3931920" cy="1325880"/>
+            <a:ext cx="2560320" cy="2377440"/>
           </a:xfrm>
           <a:prstGeom prst="roundRect">
             <a:avLst>
-              <a:gd name="adj" fmla="val 5517"/>
+              <a:gd name="adj" fmla="val 3077"/>
             </a:avLst>
           </a:prstGeom>
           <a:solidFill>
@@ -10209,8 +11518,8 @@
         </p:nvSpPr>
         <p:spPr>
           <a:xfrm>
-            <a:off x="731520" y="1554480"/>
-            <a:ext cx="1280160" cy="548640"/>
+            <a:off x="731520" y="1572768"/>
+            <a:ext cx="2194560" cy="320040"/>
           </a:xfrm>
           <a:prstGeom prst="rect">
             <a:avLst/>
@@ -10226,7 +11535,46 @@
               <a:buNone/>
             </a:pPr>
             <a:r>
-              <a:rPr lang="en-US" sz="3000" b="1" dirty="0">
+              <a:rPr lang="en-US" sz="1500" b="1" dirty="0">
+                <a:solidFill>
+                  <a:schemeClr val="accent1"/>
+                </a:solidFill>
+                <a:latin typeface="Calibri" pitchFamily="34" charset="0"/>
+                <a:ea typeface="Calibri" pitchFamily="34" charset="-122"/>
+                <a:cs typeface="Calibri" pitchFamily="34" charset="-120"/>
+              </a:rPr>
+              <a:t>Modèle biaisé</a:t>
+            </a:r>
+            <a:endParaRPr lang="en-US" sz="1500" dirty="0"/>
+          </a:p>
+        </p:txBody>
+      </p:sp>
+      <p:sp>
+        <p:nvSpPr>
+          <p:cNvPr id="7" name="Text 5"/>
+          <p:cNvSpPr txBox="1"/>
+          <p:nvPr/>
+        </p:nvSpPr>
+        <p:spPr>
+          <a:xfrm>
+            <a:off x="731520" y="1920240"/>
+            <a:ext cx="1097280" cy="594360"/>
+          </a:xfrm>
+          <a:prstGeom prst="rect">
+            <a:avLst/>
+          </a:prstGeom>
+          <a:noFill/>
+          <a:ln/>
+        </p:spPr>
+        <p:txBody>
+          <a:bodyPr wrap="square" lIns="0" tIns="0" rIns="0" bIns="0" rtlCol="0" anchor="ctr"/>
+          <a:lstStyle/>
+          <a:p>
+            <a:pPr indent="0" marL="0">
+              <a:buNone/>
+            </a:pPr>
+            <a:r>
+              <a:rPr lang="en-US" sz="3600" b="1" dirty="0">
                 <a:solidFill>
                   <a:schemeClr val="accent1"/>
                 </a:solidFill>
@@ -10234,22 +11582,22 @@
                 <a:ea typeface="Arial Narrow" pitchFamily="34" charset="-122"/>
                 <a:cs typeface="Arial Narrow" pitchFamily="34" charset="-120"/>
               </a:rPr>
-              <a:t>LIME</a:t>
-            </a:r>
-            <a:endParaRPr lang="en-US" sz="3000" dirty="0"/>
-          </a:p>
-        </p:txBody>
-      </p:sp>
-      <p:sp>
-        <p:nvSpPr>
-          <p:cNvPr id="7" name="Text 5"/>
+              <a:t>0,83</a:t>
+            </a:r>
+            <a:endParaRPr lang="en-US" sz="3600" dirty="0"/>
+          </a:p>
+        </p:txBody>
+      </p:sp>
+      <p:sp>
+        <p:nvSpPr>
+          <p:cNvPr id="8" name="Text 6"/>
           <p:cNvSpPr txBox="1"/>
           <p:nvPr/>
         </p:nvSpPr>
         <p:spPr>
           <a:xfrm>
-            <a:off x="2011680" y="1600200"/>
-            <a:ext cx="2331720" cy="502920"/>
+            <a:off x="731520" y="2514600"/>
+            <a:ext cx="1097280" cy="274320"/>
           </a:xfrm>
           <a:prstGeom prst="rect">
             <a:avLst/>
@@ -10265,54 +11613,132 @@
               <a:buNone/>
             </a:pPr>
             <a:r>
-              <a:rPr lang="en-US" sz="1400" b="1" dirty="0">
-                <a:solidFill>
-                  <a:schemeClr val="tx1"/>
+              <a:rPr lang="en-US" sz="1000" dirty="0">
+                <a:solidFill>
+                  <a:schemeClr val="accent5"/>
                 </a:solidFill>
                 <a:latin typeface="Calibri" pitchFamily="34" charset="0"/>
                 <a:ea typeface="Calibri" pitchFamily="34" charset="-122"/>
                 <a:cs typeface="Calibri" pitchFamily="34" charset="-120"/>
               </a:rPr>
-              <a:t>Quelles variables portent cette décision ?</a:t>
-            </a:r>
-            <a:endParaRPr lang="en-US" sz="1400" dirty="0"/>
-          </a:p>
-        </p:txBody>
-      </p:sp>
-      <p:sp>
-        <p:nvSpPr>
-          <p:cNvPr id="8" name="Text 6"/>
+              <a:t>disparate impact</a:t>
+            </a:r>
+            <a:endParaRPr lang="en-US" sz="1000" dirty="0"/>
+          </a:p>
+        </p:txBody>
+      </p:sp>
+      <p:sp>
+        <p:nvSpPr>
+          <p:cNvPr id="9" name="Text 7"/>
           <p:cNvSpPr txBox="1"/>
           <p:nvPr/>
         </p:nvSpPr>
         <p:spPr>
           <a:xfrm>
-            <a:off x="731520" y="2148840"/>
-            <a:ext cx="3566160" cy="548640"/>
-          </a:xfrm>
-          <a:prstGeom prst="rect">
-            <a:avLst/>
-          </a:prstGeom>
-          <a:noFill/>
-          <a:ln/>
-        </p:spPr>
-        <p:txBody>
-          <a:bodyPr wrap="square" lIns="0" tIns="0" rIns="0" bIns="0" rtlCol="0" anchor="t"/>
+            <a:off x="1828800" y="1920240"/>
+            <a:ext cx="1097280" cy="594360"/>
+          </a:xfrm>
+          <a:prstGeom prst="rect">
+            <a:avLst/>
+          </a:prstGeom>
+          <a:noFill/>
+          <a:ln/>
+        </p:spPr>
+        <p:txBody>
+          <a:bodyPr wrap="square" lIns="0" tIns="0" rIns="0" bIns="0" rtlCol="0" anchor="ctr"/>
           <a:lstStyle/>
           <a:p>
             <a:pPr indent="0" marL="0">
               <a:buNone/>
             </a:pPr>
             <a:r>
-              <a:rPr lang="en-US" sz="1300" dirty="0">
+              <a:rPr lang="en-US" sz="3600" b="1" dirty="0">
                 <a:solidFill>
                   <a:schemeClr val="tx1"/>
+                </a:solidFill>
+                <a:latin typeface="Arial Narrow" pitchFamily="34" charset="0"/>
+                <a:ea typeface="Arial Narrow" pitchFamily="34" charset="-122"/>
+                <a:cs typeface="Arial Narrow" pitchFamily="34" charset="-120"/>
+              </a:rPr>
+              <a:t>0,80</a:t>
+            </a:r>
+            <a:endParaRPr lang="en-US" sz="3600" dirty="0"/>
+          </a:p>
+        </p:txBody>
+      </p:sp>
+      <p:sp>
+        <p:nvSpPr>
+          <p:cNvPr id="10" name="Text 8"/>
+          <p:cNvSpPr txBox="1"/>
+          <p:nvPr/>
+        </p:nvSpPr>
+        <p:spPr>
+          <a:xfrm>
+            <a:off x="1828800" y="2514600"/>
+            <a:ext cx="1097280" cy="274320"/>
+          </a:xfrm>
+          <a:prstGeom prst="rect">
+            <a:avLst/>
+          </a:prstGeom>
+          <a:noFill/>
+          <a:ln/>
+        </p:spPr>
+        <p:txBody>
+          <a:bodyPr wrap="square" lIns="0" tIns="0" rIns="0" bIns="0" rtlCol="0" anchor="ctr"/>
+          <a:lstStyle/>
+          <a:p>
+            <a:pPr indent="0" marL="0">
+              <a:buNone/>
+            </a:pPr>
+            <a:r>
+              <a:rPr lang="en-US" sz="1000" dirty="0">
+                <a:solidFill>
+                  <a:schemeClr val="accent5"/>
                 </a:solidFill>
                 <a:latin typeface="Calibri" pitchFamily="34" charset="0"/>
                 <a:ea typeface="Calibri" pitchFamily="34" charset="-122"/>
                 <a:cs typeface="Calibri" pitchFamily="34" charset="-120"/>
               </a:rPr>
-              <a:t>Perturbe le profil, refait le prompt, ajuste un modèle linéaire local.</a:t>
+              <a:t>exactitude (mérite)</a:t>
+            </a:r>
+            <a:endParaRPr lang="en-US" sz="1000" dirty="0"/>
+          </a:p>
+        </p:txBody>
+      </p:sp>
+      <p:sp>
+        <p:nvSpPr>
+          <p:cNvPr id="11" name="Text 9"/>
+          <p:cNvSpPr txBox="1"/>
+          <p:nvPr/>
+        </p:nvSpPr>
+        <p:spPr>
+          <a:xfrm>
+            <a:off x="731520" y="2880360"/>
+            <a:ext cx="2194560" cy="868680"/>
+          </a:xfrm>
+          <a:prstGeom prst="rect">
+            <a:avLst/>
+          </a:prstGeom>
+          <a:noFill/>
+          <a:ln/>
+        </p:spPr>
+        <p:txBody>
+          <a:bodyPr wrap="square" lIns="0" tIns="0" rIns="0" bIns="0" rtlCol="0" anchor="t"/>
+          <a:lstStyle/>
+          <a:p>
+            <a:pPr indent="0" marL="0">
+              <a:buNone/>
+            </a:pPr>
+            <a:r>
+              <a:rPr lang="en-US" sz="1300" dirty="0">
+                <a:solidFill>
+                  <a:schemeClr val="tx1"/>
+                </a:solidFill>
+                <a:latin typeface="Calibri" pitchFamily="34" charset="0"/>
+                <a:ea typeface="Calibri" pitchFamily="34" charset="-122"/>
+                <a:cs typeface="Calibri" pitchFamily="34" charset="-120"/>
+              </a:rPr>
+              <a:t>Apprend les valeurs du marché, préjugés compris</a:t>
             </a:r>
             <a:endParaRPr lang="en-US" sz="1300" dirty="0"/>
           </a:p>
@@ -10320,18 +11746,18 @@
       </p:sp>
       <p:sp>
         <p:nvSpPr>
-          <p:cNvPr id="9" name="xai_1"/>
+          <p:cNvPr id="12" name="equite_1"/>
           <p:cNvSpPr/>
           <p:nvPr/>
         </p:nvSpPr>
         <p:spPr>
           <a:xfrm>
-            <a:off x="4663440" y="1463040"/>
-            <a:ext cx="3931920" cy="1325880"/>
+            <a:off x="3291840" y="1463040"/>
+            <a:ext cx="2560320" cy="2377440"/>
           </a:xfrm>
           <a:prstGeom prst="roundRect">
             <a:avLst>
-              <a:gd name="adj" fmla="val 5517"/>
+              <a:gd name="adj" fmla="val 3077"/>
             </a:avLst>
           </a:prstGeom>
           <a:solidFill>
@@ -10342,14 +11768,14 @@
       </p:sp>
       <p:sp>
         <p:nvSpPr>
-          <p:cNvPr id="10" name="Text 8"/>
+          <p:cNvPr id="13" name="Text 11"/>
           <p:cNvSpPr txBox="1"/>
           <p:nvPr/>
         </p:nvSpPr>
         <p:spPr>
           <a:xfrm>
-            <a:off x="4846320" y="1554480"/>
-            <a:ext cx="1280160" cy="548640"/>
+            <a:off x="3474720" y="1572768"/>
+            <a:ext cx="2194560" cy="320040"/>
           </a:xfrm>
           <a:prstGeom prst="rect">
             <a:avLst/>
@@ -10365,7 +11791,46 @@
               <a:buNone/>
             </a:pPr>
             <a:r>
-              <a:rPr lang="en-US" sz="3000" b="1" dirty="0">
+              <a:rPr lang="en-US" sz="1500" b="1" dirty="0">
+                <a:solidFill>
+                  <a:schemeClr val="accent1"/>
+                </a:solidFill>
+                <a:latin typeface="Calibri" pitchFamily="34" charset="0"/>
+                <a:ea typeface="Calibri" pitchFamily="34" charset="-122"/>
+                <a:cs typeface="Calibri" pitchFamily="34" charset="-120"/>
+              </a:rPr>
+              <a:t>Modèle corrigé</a:t>
+            </a:r>
+            <a:endParaRPr lang="en-US" sz="1500" dirty="0"/>
+          </a:p>
+        </p:txBody>
+      </p:sp>
+      <p:sp>
+        <p:nvSpPr>
+          <p:cNvPr id="14" name="Text 12"/>
+          <p:cNvSpPr txBox="1"/>
+          <p:nvPr/>
+        </p:nvSpPr>
+        <p:spPr>
+          <a:xfrm>
+            <a:off x="3474720" y="1920240"/>
+            <a:ext cx="1097280" cy="594360"/>
+          </a:xfrm>
+          <a:prstGeom prst="rect">
+            <a:avLst/>
+          </a:prstGeom>
+          <a:noFill/>
+          <a:ln/>
+        </p:spPr>
+        <p:txBody>
+          <a:bodyPr wrap="square" lIns="0" tIns="0" rIns="0" bIns="0" rtlCol="0" anchor="ctr"/>
+          <a:lstStyle/>
+          <a:p>
+            <a:pPr indent="0" marL="0">
+              <a:buNone/>
+            </a:pPr>
+            <a:r>
+              <a:rPr lang="en-US" sz="3600" b="1" dirty="0">
                 <a:solidFill>
                   <a:schemeClr val="accent1"/>
                 </a:solidFill>
@@ -10373,22 +11838,22 @@
                 <a:ea typeface="Arial Narrow" pitchFamily="34" charset="-122"/>
                 <a:cs typeface="Arial Narrow" pitchFamily="34" charset="-120"/>
               </a:rPr>
-              <a:t>SHAP</a:t>
-            </a:r>
-            <a:endParaRPr lang="en-US" sz="3000" dirty="0"/>
-          </a:p>
-        </p:txBody>
-      </p:sp>
-      <p:sp>
-        <p:nvSpPr>
-          <p:cNvPr id="11" name="Text 9"/>
+              <a:t>0,62</a:t>
+            </a:r>
+            <a:endParaRPr lang="en-US" sz="3600" dirty="0"/>
+          </a:p>
+        </p:txBody>
+      </p:sp>
+      <p:sp>
+        <p:nvSpPr>
+          <p:cNvPr id="15" name="Text 13"/>
           <p:cNvSpPr txBox="1"/>
           <p:nvPr/>
         </p:nvSpPr>
         <p:spPr>
           <a:xfrm>
-            <a:off x="6126480" y="1600200"/>
-            <a:ext cx="2331720" cy="502920"/>
+            <a:off x="3474720" y="2514600"/>
+            <a:ext cx="1097280" cy="274320"/>
           </a:xfrm>
           <a:prstGeom prst="rect">
             <a:avLst/>
@@ -10404,118 +11869,441 @@
               <a:buNone/>
             </a:pPr>
             <a:r>
-              <a:rPr lang="en-US" sz="1400" b="1" dirty="0">
-                <a:solidFill>
-                  <a:schemeClr val="tx1"/>
+              <a:rPr lang="en-US" sz="1000" dirty="0">
+                <a:solidFill>
+                  <a:schemeClr val="accent5"/>
                 </a:solidFill>
                 <a:latin typeface="Calibri" pitchFamily="34" charset="0"/>
                 <a:ea typeface="Calibri" pitchFamily="34" charset="-122"/>
                 <a:cs typeface="Calibri" pitchFamily="34" charset="-120"/>
               </a:rPr>
-              <a:t>Combien chaque variable pèse-t-elle ?</a:t>
-            </a:r>
-            <a:endParaRPr lang="en-US" sz="1400" dirty="0"/>
-          </a:p>
-        </p:txBody>
-      </p:sp>
-      <p:sp>
-        <p:nvSpPr>
-          <p:cNvPr id="12" name="Text 10"/>
+              <a:t>disparate impact</a:t>
+            </a:r>
+            <a:endParaRPr lang="en-US" sz="1000" dirty="0"/>
+          </a:p>
+        </p:txBody>
+      </p:sp>
+      <p:sp>
+        <p:nvSpPr>
+          <p:cNvPr id="16" name="Text 14"/>
           <p:cNvSpPr txBox="1"/>
           <p:nvPr/>
         </p:nvSpPr>
         <p:spPr>
           <a:xfrm>
-            <a:off x="4846320" y="2148840"/>
-            <a:ext cx="3566160" cy="548640"/>
-          </a:xfrm>
-          <a:prstGeom prst="rect">
-            <a:avLst/>
-          </a:prstGeom>
-          <a:noFill/>
-          <a:ln/>
-        </p:spPr>
-        <p:txBody>
-          <a:bodyPr wrap="square" lIns="0" tIns="0" rIns="0" bIns="0" rtlCol="0" anchor="t"/>
+            <a:off x="4572000" y="1920240"/>
+            <a:ext cx="1097280" cy="594360"/>
+          </a:xfrm>
+          <a:prstGeom prst="rect">
+            <a:avLst/>
+          </a:prstGeom>
+          <a:noFill/>
+          <a:ln/>
+        </p:spPr>
+        <p:txBody>
+          <a:bodyPr wrap="square" lIns="0" tIns="0" rIns="0" bIns="0" rtlCol="0" anchor="ctr"/>
           <a:lstStyle/>
           <a:p>
             <a:pPr indent="0" marL="0">
               <a:buNone/>
             </a:pPr>
             <a:r>
-              <a:rPr lang="en-US" sz="1300" dirty="0">
+              <a:rPr lang="en-US" sz="3600" b="1" dirty="0">
                 <a:solidFill>
                   <a:schemeClr val="tx1"/>
+                </a:solidFill>
+                <a:latin typeface="Arial Narrow" pitchFamily="34" charset="0"/>
+                <a:ea typeface="Arial Narrow" pitchFamily="34" charset="-122"/>
+                <a:cs typeface="Arial Narrow" pitchFamily="34" charset="-120"/>
+              </a:rPr>
+              <a:t>0,88</a:t>
+            </a:r>
+            <a:endParaRPr lang="en-US" sz="3600" dirty="0"/>
+          </a:p>
+        </p:txBody>
+      </p:sp>
+      <p:sp>
+        <p:nvSpPr>
+          <p:cNvPr id="17" name="Text 15"/>
+          <p:cNvSpPr txBox="1"/>
+          <p:nvPr/>
+        </p:nvSpPr>
+        <p:spPr>
+          <a:xfrm>
+            <a:off x="4572000" y="2514600"/>
+            <a:ext cx="1097280" cy="274320"/>
+          </a:xfrm>
+          <a:prstGeom prst="rect">
+            <a:avLst/>
+          </a:prstGeom>
+          <a:noFill/>
+          <a:ln/>
+        </p:spPr>
+        <p:txBody>
+          <a:bodyPr wrap="square" lIns="0" tIns="0" rIns="0" bIns="0" rtlCol="0" anchor="ctr"/>
+          <a:lstStyle/>
+          <a:p>
+            <a:pPr indent="0" marL="0">
+              <a:buNone/>
+            </a:pPr>
+            <a:r>
+              <a:rPr lang="en-US" sz="1000" dirty="0">
+                <a:solidFill>
+                  <a:schemeClr val="accent5"/>
                 </a:solidFill>
                 <a:latin typeface="Calibri" pitchFamily="34" charset="0"/>
                 <a:ea typeface="Calibri" pitchFamily="34" charset="-122"/>
                 <a:cs typeface="Calibri" pitchFamily="34" charset="-120"/>
               </a:rPr>
-              <a:t>Valeurs de Shapley : contribution de chaque variable par rapport à la moyenne.</a:t>
-            </a:r>
-            <a:endParaRPr lang="en-US" sz="1300" dirty="0"/>
-          </a:p>
-        </p:txBody>
-      </p:sp>
-      <p:sp>
-        <p:nvSpPr>
-          <p:cNvPr id="13" name="emplacement_figure_shap"/>
-          <p:cNvSpPr/>
-          <p:nvPr/>
-        </p:nvSpPr>
-        <p:spPr>
-          <a:xfrm>
-            <a:off x="548640" y="2971800"/>
-            <a:ext cx="8046720" cy="1508760"/>
-          </a:xfrm>
-          <a:prstGeom prst="rect">
-            <a:avLst/>
-          </a:prstGeom>
-          <a:solidFill>
-            <a:srgbClr val="FFFFFF"/>
-          </a:solidFill>
-          <a:ln w="12700">
-            <a:solidFill>
-              <a:srgbClr val="D8E2D2"/>
-            </a:solidFill>
-            <a:prstDash val="dash"/>
-          </a:ln>
-        </p:spPr>
-      </p:sp>
-      <p:sp>
-        <p:nvSpPr>
-          <p:cNvPr id="14" name="Text 12"/>
+              <a:t>exactitude (mérite)</a:t>
+            </a:r>
+            <a:endParaRPr lang="en-US" sz="1000" dirty="0"/>
+          </a:p>
+        </p:txBody>
+      </p:sp>
+      <p:sp>
+        <p:nvSpPr>
+          <p:cNvPr id="18" name="Text 16"/>
           <p:cNvSpPr txBox="1"/>
           <p:nvPr/>
         </p:nvSpPr>
         <p:spPr>
           <a:xfrm>
-            <a:off x="731520" y="3017520"/>
-            <a:ext cx="7680960" cy="1417320"/>
-          </a:xfrm>
-          <a:prstGeom prst="rect">
-            <a:avLst/>
-          </a:prstGeom>
-          <a:noFill/>
-          <a:ln/>
-        </p:spPr>
-        <p:txBody>
-          <a:bodyPr wrap="square" lIns="0" tIns="0" rIns="0" bIns="0" rtlCol="0" anchor="ctr"/>
-          <a:lstStyle/>
-          <a:p>
-            <a:pPr algn="ctr" indent="0" marL="0">
+            <a:off x="3474720" y="2880360"/>
+            <a:ext cx="2194560" cy="868680"/>
+          </a:xfrm>
+          <a:prstGeom prst="rect">
+            <a:avLst/>
+          </a:prstGeom>
+          <a:noFill/>
+          <a:ln/>
+        </p:spPr>
+        <p:txBody>
+          <a:bodyPr wrap="square" lIns="0" tIns="0" rIns="0" bIns="0" rtlCol="0" anchor="t"/>
+          <a:lstStyle/>
+          <a:p>
+            <a:pPr indent="0" marL="0">
               <a:buNone/>
             </a:pPr>
             <a:r>
               <a:rPr lang="en-US" sz="1300" dirty="0">
                 <a:solidFill>
-                  <a:schemeClr val="accent5"/>
+                  <a:schemeClr val="tx1"/>
                 </a:solidFill>
                 <a:latin typeface="Calibri" pitchFamily="34" charset="0"/>
                 <a:ea typeface="Calibri" pitchFamily="34" charset="-122"/>
                 <a:cs typeface="Calibri" pitchFamily="34" charset="-120"/>
               </a:rPr>
-              <a:t>Emplacement figure : SHAP waterfall avant / après correction (notebook, section 5.2)</a:t>
+              <a:t>Suit le mérite sportif : invariant à la nationalité et au club</a:t>
+            </a:r>
+            <a:endParaRPr lang="en-US" sz="1300" dirty="0"/>
+          </a:p>
+        </p:txBody>
+      </p:sp>
+      <p:sp>
+        <p:nvSpPr>
+          <p:cNvPr id="19" name="equite_2"/>
+          <p:cNvSpPr/>
+          <p:nvPr/>
+        </p:nvSpPr>
+        <p:spPr>
+          <a:xfrm>
+            <a:off x="6035040" y="1463040"/>
+            <a:ext cx="2560320" cy="2377440"/>
+          </a:xfrm>
+          <a:prstGeom prst="roundRect">
+            <a:avLst>
+              <a:gd name="adj" fmla="val 3077"/>
+            </a:avLst>
+          </a:prstGeom>
+          <a:solidFill>
+            <a:srgbClr val="1F4A1A"/>
+          </a:solidFill>
+          <a:ln/>
+        </p:spPr>
+      </p:sp>
+      <p:sp>
+        <p:nvSpPr>
+          <p:cNvPr id="20" name="Text 18"/>
+          <p:cNvSpPr txBox="1"/>
+          <p:nvPr/>
+        </p:nvSpPr>
+        <p:spPr>
+          <a:xfrm>
+            <a:off x="6217920" y="1572768"/>
+            <a:ext cx="2194560" cy="320040"/>
+          </a:xfrm>
+          <a:prstGeom prst="rect">
+            <a:avLst/>
+          </a:prstGeom>
+          <a:noFill/>
+          <a:ln/>
+        </p:spPr>
+        <p:txBody>
+          <a:bodyPr wrap="square" lIns="0" tIns="0" rIns="0" bIns="0" rtlCol="0" anchor="ctr"/>
+          <a:lstStyle/>
+          <a:p>
+            <a:pPr indent="0" marL="0">
+              <a:buNone/>
+            </a:pPr>
+            <a:r>
+              <a:rPr lang="en-US" sz="1500" b="1" dirty="0">
+                <a:solidFill>
+                  <a:schemeClr val="bg1"/>
+                </a:solidFill>
+                <a:latin typeface="Calibri" pitchFamily="34" charset="0"/>
+                <a:ea typeface="Calibri" pitchFamily="34" charset="-122"/>
+                <a:cs typeface="Calibri" pitchFamily="34" charset="-120"/>
+              </a:rPr>
+              <a:t>Corrigé + seuils par groupe</a:t>
+            </a:r>
+            <a:endParaRPr lang="en-US" sz="1500" dirty="0"/>
+          </a:p>
+        </p:txBody>
+      </p:sp>
+      <p:sp>
+        <p:nvSpPr>
+          <p:cNvPr id="21" name="Text 19"/>
+          <p:cNvSpPr txBox="1"/>
+          <p:nvPr/>
+        </p:nvSpPr>
+        <p:spPr>
+          <a:xfrm>
+            <a:off x="6217920" y="1920240"/>
+            <a:ext cx="1097280" cy="594360"/>
+          </a:xfrm>
+          <a:prstGeom prst="rect">
+            <a:avLst/>
+          </a:prstGeom>
+          <a:noFill/>
+          <a:ln/>
+        </p:spPr>
+        <p:txBody>
+          <a:bodyPr wrap="square" lIns="0" tIns="0" rIns="0" bIns="0" rtlCol="0" anchor="ctr"/>
+          <a:lstStyle/>
+          <a:p>
+            <a:pPr indent="0" marL="0">
+              <a:buNone/>
+            </a:pPr>
+            <a:r>
+              <a:rPr lang="en-US" sz="3600" b="1" dirty="0">
+                <a:solidFill>
+                  <a:schemeClr val="accent6"/>
+                </a:solidFill>
+                <a:latin typeface="Arial Narrow" pitchFamily="34" charset="0"/>
+                <a:ea typeface="Arial Narrow" pitchFamily="34" charset="-122"/>
+                <a:cs typeface="Arial Narrow" pitchFamily="34" charset="-120"/>
+              </a:rPr>
+              <a:t>0,94</a:t>
+            </a:r>
+            <a:endParaRPr lang="en-US" sz="3600" dirty="0"/>
+          </a:p>
+        </p:txBody>
+      </p:sp>
+      <p:sp>
+        <p:nvSpPr>
+          <p:cNvPr id="22" name="Text 20"/>
+          <p:cNvSpPr txBox="1"/>
+          <p:nvPr/>
+        </p:nvSpPr>
+        <p:spPr>
+          <a:xfrm>
+            <a:off x="6217920" y="2514600"/>
+            <a:ext cx="1097280" cy="274320"/>
+          </a:xfrm>
+          <a:prstGeom prst="rect">
+            <a:avLst/>
+          </a:prstGeom>
+          <a:noFill/>
+          <a:ln/>
+        </p:spPr>
+        <p:txBody>
+          <a:bodyPr wrap="square" lIns="0" tIns="0" rIns="0" bIns="0" rtlCol="0" anchor="ctr"/>
+          <a:lstStyle/>
+          <a:p>
+            <a:pPr indent="0" marL="0">
+              <a:buNone/>
+            </a:pPr>
+            <a:r>
+              <a:rPr lang="en-US" sz="1000" dirty="0">
+                <a:solidFill>
+                  <a:schemeClr val="accent6"/>
+                </a:solidFill>
+                <a:latin typeface="Calibri" pitchFamily="34" charset="0"/>
+                <a:ea typeface="Calibri" pitchFamily="34" charset="-122"/>
+                <a:cs typeface="Calibri" pitchFamily="34" charset="-120"/>
+              </a:rPr>
+              <a:t>disparate impact</a:t>
+            </a:r>
+            <a:endParaRPr lang="en-US" sz="1000" dirty="0"/>
+          </a:p>
+        </p:txBody>
+      </p:sp>
+      <p:sp>
+        <p:nvSpPr>
+          <p:cNvPr id="23" name="Text 21"/>
+          <p:cNvSpPr txBox="1"/>
+          <p:nvPr/>
+        </p:nvSpPr>
+        <p:spPr>
+          <a:xfrm>
+            <a:off x="7315200" y="1920240"/>
+            <a:ext cx="1097280" cy="594360"/>
+          </a:xfrm>
+          <a:prstGeom prst="rect">
+            <a:avLst/>
+          </a:prstGeom>
+          <a:noFill/>
+          <a:ln/>
+        </p:spPr>
+        <p:txBody>
+          <a:bodyPr wrap="square" lIns="0" tIns="0" rIns="0" bIns="0" rtlCol="0" anchor="ctr"/>
+          <a:lstStyle/>
+          <a:p>
+            <a:pPr indent="0" marL="0">
+              <a:buNone/>
+            </a:pPr>
+            <a:r>
+              <a:rPr lang="en-US" sz="3600" b="1" dirty="0">
+                <a:solidFill>
+                  <a:schemeClr val="bg1"/>
+                </a:solidFill>
+                <a:latin typeface="Arial Narrow" pitchFamily="34" charset="0"/>
+                <a:ea typeface="Arial Narrow" pitchFamily="34" charset="-122"/>
+                <a:cs typeface="Arial Narrow" pitchFamily="34" charset="-120"/>
+              </a:rPr>
+              <a:t>0,87</a:t>
+            </a:r>
+            <a:endParaRPr lang="en-US" sz="3600" dirty="0"/>
+          </a:p>
+        </p:txBody>
+      </p:sp>
+      <p:sp>
+        <p:nvSpPr>
+          <p:cNvPr id="24" name="Text 22"/>
+          <p:cNvSpPr txBox="1"/>
+          <p:nvPr/>
+        </p:nvSpPr>
+        <p:spPr>
+          <a:xfrm>
+            <a:off x="7315200" y="2514600"/>
+            <a:ext cx="1097280" cy="274320"/>
+          </a:xfrm>
+          <a:prstGeom prst="rect">
+            <a:avLst/>
+          </a:prstGeom>
+          <a:noFill/>
+          <a:ln/>
+        </p:spPr>
+        <p:txBody>
+          <a:bodyPr wrap="square" lIns="0" tIns="0" rIns="0" bIns="0" rtlCol="0" anchor="ctr"/>
+          <a:lstStyle/>
+          <a:p>
+            <a:pPr indent="0" marL="0">
+              <a:buNone/>
+            </a:pPr>
+            <a:r>
+              <a:rPr lang="en-US" sz="1000" dirty="0">
+                <a:solidFill>
+                  <a:schemeClr val="accent6"/>
+                </a:solidFill>
+                <a:latin typeface="Calibri" pitchFamily="34" charset="0"/>
+                <a:ea typeface="Calibri" pitchFamily="34" charset="-122"/>
+                <a:cs typeface="Calibri" pitchFamily="34" charset="-120"/>
+              </a:rPr>
+              <a:t>exactitude (mérite)</a:t>
+            </a:r>
+            <a:endParaRPr lang="en-US" sz="1000" dirty="0"/>
+          </a:p>
+        </p:txBody>
+      </p:sp>
+      <p:sp>
+        <p:nvSpPr>
+          <p:cNvPr id="25" name="Text 23"/>
+          <p:cNvSpPr txBox="1"/>
+          <p:nvPr/>
+        </p:nvSpPr>
+        <p:spPr>
+          <a:xfrm>
+            <a:off x="6217920" y="2880360"/>
+            <a:ext cx="2194560" cy="868680"/>
+          </a:xfrm>
+          <a:prstGeom prst="rect">
+            <a:avLst/>
+          </a:prstGeom>
+          <a:noFill/>
+          <a:ln/>
+        </p:spPr>
+        <p:txBody>
+          <a:bodyPr wrap="square" lIns="0" tIns="0" rIns="0" bIns="0" rtlCol="0" anchor="t"/>
+          <a:lstStyle/>
+          <a:p>
+            <a:pPr indent="0" marL="0">
+              <a:buNone/>
+            </a:pPr>
+            <a:r>
+              <a:rPr lang="en-US" sz="1300" dirty="0">
+                <a:solidFill>
+                  <a:schemeClr val="bg2"/>
+                </a:solidFill>
+                <a:latin typeface="Calibri" pitchFamily="34" charset="0"/>
+                <a:ea typeface="Calibri" pitchFamily="34" charset="-122"/>
+                <a:cs typeface="Calibri" pitchFamily="34" charset="-120"/>
+              </a:rPr>
+              <a:t>Parité retrouvée pour 1 point d'exactitude</a:t>
+            </a:r>
+            <a:endParaRPr lang="en-US" sz="1300" dirty="0"/>
+          </a:p>
+        </p:txBody>
+      </p:sp>
+      <p:sp>
+        <p:nvSpPr>
+          <p:cNvPr id="26" name="Text 24"/>
+          <p:cNvSpPr txBox="1"/>
+          <p:nvPr/>
+        </p:nvSpPr>
+        <p:spPr>
+          <a:xfrm>
+            <a:off x="548640" y="3977640"/>
+            <a:ext cx="8046720" cy="685800"/>
+          </a:xfrm>
+          <a:prstGeom prst="rect">
+            <a:avLst/>
+          </a:prstGeom>
+          <a:noFill/>
+          <a:ln/>
+        </p:spPr>
+        <p:txBody>
+          <a:bodyPr wrap="square" lIns="0" tIns="0" rIns="0" bIns="0" rtlCol="0" anchor="t"/>
+          <a:lstStyle/>
+          <a:p>
+            <a:pPr indent="0" marL="0">
+              <a:buNone/>
+            </a:pPr>
+            <a:r>
+              <a:rPr lang="en-US" sz="1300" b="1" dirty="0">
+                <a:solidFill>
+                  <a:schemeClr val="accent1"/>
+                </a:solidFill>
+                <a:latin typeface="Calibri" pitchFamily="34" charset="0"/>
+                <a:ea typeface="Calibri" pitchFamily="34" charset="-122"/>
+                <a:cs typeface="Calibri" pitchFamily="34" charset="-120"/>
+              </a:rPr>
+              <a:t>Pourquoi le corrigé passe sous 0,8 : </a:t>
+            </a:r>
+            <a:pPr indent="0" marL="0">
+              <a:buNone/>
+            </a:pPr>
+            <a:r>
+              <a:rPr lang="en-US" sz="1300" dirty="0">
+                <a:solidFill>
+                  <a:schemeClr val="tx1"/>
+                </a:solidFill>
+                <a:latin typeface="Calibri" pitchFamily="34" charset="0"/>
+                <a:ea typeface="Calibri" pitchFamily="34" charset="-122"/>
+                <a:cs typeface="Calibri" pitchFamily="34" charset="-120"/>
+              </a:rPr>
+              <a:t>sur la saison test, les attaquants sud-américains ont en moyenne de meilleures stats. Un modèle fidèle au mérite les sélectionne donc plus souvent. Égalité des chances ou parité stricte : un choix éthique à assumer.</a:t>
             </a:r>
             <a:endParaRPr lang="en-US" sz="1300" dirty="0"/>
           </a:p>
@@ -10596,10 +12384,10 @@
       </p:grpSpPr>
       <p:sp>
         <p:nvSpPr>
-          <p:cNvPr id="2" name="Text 8"/>
+          <p:cNvPr id="2" name="Text 0"/>
           <p:cNvSpPr/>
           <p:nvPr>
-            <p:ph idx="108" type="body" hasCustomPrompt="1"/>
+            <p:ph idx="100" type="body" hasCustomPrompt="1"/>
           </p:nvPr>
         </p:nvSpPr>
         <p:spPr>
@@ -10623,13 +12411,13 @@
             <a:r>
               <a:rPr lang="en-US" sz="1100" b="1" spc="300" kern="0" dirty="0">
                 <a:solidFill>
-                  <a:schemeClr val="accent6"/>
+                  <a:schemeClr val="accent1"/>
                 </a:solidFill>
                 <a:latin typeface="Calibri" pitchFamily="34" charset="0"/>
                 <a:ea typeface="Calibri" pitchFamily="34" charset="-122"/>
                 <a:cs typeface="Calibri" pitchFamily="34" charset="-120"/>
               </a:rPr>
-              <a:t>08 · DÉMO FINALE</a:t>
+              <a:t>08 · EXPLICABILITÉ</a:t>
             </a:r>
             <a:endParaRPr lang="en-US" sz="1100" dirty="0"/>
           </a:p>
@@ -10637,10 +12425,10 @@
       </p:sp>
       <p:sp>
         <p:nvSpPr>
-          <p:cNvPr id="3" name="Text 8"/>
+          <p:cNvPr id="3" name="Text 0"/>
           <p:cNvSpPr/>
           <p:nvPr>
-            <p:ph idx="109" type="title" hasCustomPrompt="1"/>
+            <p:ph idx="101" type="title" hasCustomPrompt="1"/>
           </p:nvPr>
         </p:nvSpPr>
         <p:spPr>
@@ -10664,13 +12452,13 @@
             <a:r>
               <a:rPr lang="en-US" sz="3600" b="1" dirty="0">
                 <a:solidFill>
-                  <a:schemeClr val="bg1"/>
+                  <a:schemeClr val="tx1"/>
                 </a:solidFill>
                 <a:latin typeface="Arial Narrow" pitchFamily="34" charset="0"/>
                 <a:ea typeface="Arial Narrow" pitchFamily="34" charset="-122"/>
                 <a:cs typeface="Arial Narrow" pitchFamily="34" charset="-120"/>
               </a:rPr>
-              <a:t>GERVINHO CONTRE HIGUAÍN</a:t>
+              <a:t>SHAP : LE CLUB FAIT LE PRIX</a:t>
             </a:r>
             <a:endParaRPr lang="en-US" sz="3600" dirty="0"/>
           </a:p>
@@ -10678,10 +12466,10 @@
       </p:sp>
       <p:sp>
         <p:nvSpPr>
-          <p:cNvPr id="4" name="Text 8"/>
+          <p:cNvPr id="4" name="Text 0"/>
           <p:cNvSpPr/>
           <p:nvPr>
-            <p:ph idx="110" type="body" hasCustomPrompt="1"/>
+            <p:ph idx="102" type="body" hasCustomPrompt="1"/>
           </p:nvPr>
         </p:nvSpPr>
         <p:spPr>
@@ -10705,28 +12493,98 @@
             <a:r>
               <a:rPr lang="en-US" sz="1000" dirty="0">
                 <a:solidFill>
-                  <a:schemeClr val="accent6"/>
+                  <a:schemeClr val="accent5"/>
                 </a:solidFill>
                 <a:latin typeface="Calibri" pitchFamily="34" charset="0"/>
                 <a:ea typeface="Calibri" pitchFamily="34" charset="-122"/>
                 <a:cs typeface="Calibri" pitchFamily="34" charset="-120"/>
               </a:rPr>
-              <a:t>Mathis</a:t>
+              <a:t>Simon</a:t>
             </a:r>
             <a:endParaRPr lang="en-US" sz="1000" dirty="0"/>
           </a:p>
         </p:txBody>
       </p:sp>
-      <p:sp>
-        <p:nvSpPr>
-          <p:cNvPr id="5" name="Text 3"/>
+      <p:pic>
+        <p:nvPicPr>
+          <p:cNvPr id="5" name="shap_gervinho" descr="img/shap_gervinho_biaise.png">    </p:cNvPr>
+          <p:cNvPicPr>
+            <a:picLocks noChangeAspect="1"/>
+          </p:cNvPicPr>
+          <p:nvPr/>
+        </p:nvPicPr>
+        <p:blipFill>
+          <a:blip r:embed="rId1"/>
+          <a:stretch>
+            <a:fillRect/>
+          </a:stretch>
+        </p:blipFill>
+        <p:spPr>
+          <a:xfrm>
+            <a:off x="548640" y="1371600"/>
+            <a:ext cx="3931920" cy="2258568"/>
+          </a:xfrm>
+          <a:prstGeom prst="rect">
+            <a:avLst/>
+          </a:prstGeom>
+        </p:spPr>
+      </p:pic>
+      <p:pic>
+        <p:nvPicPr>
+          <p:cNvPr id="6" name="shap_higuain" descr="img/shap_higuain_biaise.png">    </p:cNvPr>
+          <p:cNvPicPr>
+            <a:picLocks noChangeAspect="1"/>
+          </p:cNvPicPr>
+          <p:nvPr/>
+        </p:nvPicPr>
+        <p:blipFill>
+          <a:blip r:embed="rId2"/>
+          <a:stretch>
+            <a:fillRect/>
+          </a:stretch>
+        </p:blipFill>
+        <p:spPr>
+          <a:xfrm>
+            <a:off x="4663440" y="1371600"/>
+            <a:ext cx="3931920" cy="2313432"/>
+          </a:xfrm>
+          <a:prstGeom prst="rect">
+            <a:avLst/>
+          </a:prstGeom>
+        </p:spPr>
+      </p:pic>
+      <p:sp>
+        <p:nvSpPr>
+          <p:cNvPr id="7" name="lecture_shap"/>
+          <p:cNvSpPr/>
+          <p:nvPr/>
+        </p:nvSpPr>
+        <p:spPr>
+          <a:xfrm>
+            <a:off x="548640" y="3794760"/>
+            <a:ext cx="8046720" cy="777240"/>
+          </a:xfrm>
+          <a:prstGeom prst="roundRect">
+            <a:avLst>
+              <a:gd name="adj" fmla="val 9412"/>
+            </a:avLst>
+          </a:prstGeom>
+          <a:solidFill>
+            <a:srgbClr val="EEF3EA"/>
+          </a:solidFill>
+          <a:ln/>
+        </p:spPr>
+      </p:sp>
+      <p:sp>
+        <p:nvSpPr>
+          <p:cNvPr id="8" name="Text 4"/>
           <p:cNvSpPr txBox="1"/>
           <p:nvPr/>
         </p:nvSpPr>
         <p:spPr>
           <a:xfrm>
-            <a:off x="548640" y="1417320"/>
-            <a:ext cx="8046720" cy="365760"/>
+            <a:off x="731520" y="3840480"/>
+            <a:ext cx="7680960" cy="685800"/>
           </a:xfrm>
           <a:prstGeom prst="rect">
             <a:avLst/>
@@ -10742,633 +12600,29 @@
               <a:buNone/>
             </a:pPr>
             <a:r>
-              <a:rPr lang="en-US" sz="1600" dirty="0">
-                <a:solidFill>
-                  <a:schemeClr val="accent6"/>
+              <a:rPr lang="en-US" sz="1200" b="1" dirty="0">
+                <a:solidFill>
+                  <a:schemeClr val="accent1"/>
                 </a:solidFill>
                 <a:latin typeface="Calibri" pitchFamily="34" charset="0"/>
                 <a:ea typeface="Calibri" pitchFamily="34" charset="-122"/>
                 <a:cs typeface="Calibri" pitchFamily="34" charset="-120"/>
               </a:rPr>
-              <a:t>Serie A 2019/20 · 6 buts · 4 passes chacun · probabilité d'entrer dans la short-list</a:t>
-            </a:r>
-            <a:endParaRPr lang="en-US" sz="1600" dirty="0"/>
-          </a:p>
-        </p:txBody>
-      </p:sp>
-      <p:sp>
-        <p:nvSpPr>
-          <p:cNvPr id="6" name="demo_0"/>
-          <p:cNvSpPr/>
-          <p:nvPr/>
-        </p:nvSpPr>
-        <p:spPr>
-          <a:xfrm>
-            <a:off x="548640" y="1920240"/>
-            <a:ext cx="3931920" cy="2514600"/>
-          </a:xfrm>
-          <a:prstGeom prst="roundRect">
-            <a:avLst>
-              <a:gd name="adj" fmla="val 2909"/>
-            </a:avLst>
-          </a:prstGeom>
-          <a:solidFill>
-            <a:srgbClr val="0F2A0C"/>
-          </a:solidFill>
-          <a:ln/>
-        </p:spPr>
-      </p:sp>
-      <p:sp>
-        <p:nvSpPr>
-          <p:cNvPr id="7" name="Text 5"/>
-          <p:cNvSpPr txBox="1"/>
-          <p:nvPr/>
-        </p:nvSpPr>
-        <p:spPr>
-          <a:xfrm>
-            <a:off x="777240" y="2029968"/>
-            <a:ext cx="3474720" cy="457200"/>
-          </a:xfrm>
-          <a:prstGeom prst="rect">
-            <a:avLst/>
-          </a:prstGeom>
-          <a:noFill/>
-          <a:ln/>
-        </p:spPr>
-        <p:txBody>
-          <a:bodyPr wrap="square" lIns="0" tIns="0" rIns="0" bIns="0" rtlCol="0" anchor="ctr"/>
-          <a:lstStyle/>
-          <a:p>
+              <a:t>Modèle biaisé. </a:t>
+            </a:r>
             <a:pPr indent="0" marL="0">
               <a:buNone/>
             </a:pPr>
             <a:r>
-              <a:rPr lang="en-US" sz="2800" b="1" dirty="0">
-                <a:solidFill>
-                  <a:schemeClr val="bg1"/>
-                </a:solidFill>
-                <a:latin typeface="Arial Narrow" pitchFamily="34" charset="0"/>
-                <a:ea typeface="Arial Narrow" pitchFamily="34" charset="-122"/>
-                <a:cs typeface="Arial Narrow" pitchFamily="34" charset="-120"/>
-              </a:rPr>
-              <a:t>GERVINHO</a:t>
-            </a:r>
-            <a:endParaRPr lang="en-US" sz="2800" dirty="0"/>
-          </a:p>
-        </p:txBody>
-      </p:sp>
-      <p:sp>
-        <p:nvSpPr>
-          <p:cNvPr id="8" name="Text 6"/>
-          <p:cNvSpPr txBox="1"/>
-          <p:nvPr/>
-        </p:nvSpPr>
-        <p:spPr>
-          <a:xfrm>
-            <a:off x="777240" y="2487168"/>
-            <a:ext cx="3474720" cy="274320"/>
-          </a:xfrm>
-          <a:prstGeom prst="rect">
-            <a:avLst/>
-          </a:prstGeom>
-          <a:noFill/>
-          <a:ln/>
-        </p:spPr>
-        <p:txBody>
-          <a:bodyPr wrap="square" lIns="0" tIns="0" rIns="0" bIns="0" rtlCol="0" anchor="ctr"/>
-          <a:lstStyle/>
-          <a:p>
-            <a:pPr indent="0" marL="0">
-              <a:buNone/>
-            </a:pPr>
-            <a:r>
               <a:rPr lang="en-US" sz="1200" dirty="0">
                 <a:solidFill>
-                  <a:schemeClr val="accent6"/>
+                  <a:schemeClr val="tx1"/>
                 </a:solidFill>
                 <a:latin typeface="Calibri" pitchFamily="34" charset="0"/>
                 <a:ea typeface="Calibri" pitchFamily="34" charset="-122"/>
                 <a:cs typeface="Calibri" pitchFamily="34" charset="-120"/>
               </a:rPr>
-              <a:t>Côte d'Ivoire · Parme</a:t>
-            </a:r>
-            <a:endParaRPr lang="en-US" sz="1200" dirty="0"/>
-          </a:p>
-        </p:txBody>
-      </p:sp>
-      <p:sp>
-        <p:nvSpPr>
-          <p:cNvPr id="9" name="Text 7"/>
-          <p:cNvSpPr txBox="1"/>
-          <p:nvPr/>
-        </p:nvSpPr>
-        <p:spPr>
-          <a:xfrm>
-            <a:off x="777240" y="2880360"/>
-            <a:ext cx="2377440" cy="320040"/>
-          </a:xfrm>
-          <a:prstGeom prst="rect">
-            <a:avLst/>
-          </a:prstGeom>
-          <a:noFill/>
-          <a:ln/>
-        </p:spPr>
-        <p:txBody>
-          <a:bodyPr wrap="square" lIns="0" tIns="0" rIns="0" bIns="0" rtlCol="0" anchor="ctr"/>
-          <a:lstStyle/>
-          <a:p>
-            <a:pPr indent="0" marL="0">
-              <a:buNone/>
-            </a:pPr>
-            <a:r>
-              <a:rPr lang="en-US" sz="1300" dirty="0">
-                <a:solidFill>
-                  <a:schemeClr val="bg2"/>
-                </a:solidFill>
-                <a:latin typeface="Calibri" pitchFamily="34" charset="0"/>
-                <a:ea typeface="Calibri" pitchFamily="34" charset="-122"/>
-                <a:cs typeface="Calibri" pitchFamily="34" charset="-120"/>
-              </a:rPr>
-              <a:t>Modèle biaisé</a:t>
-            </a:r>
-            <a:endParaRPr lang="en-US" sz="1300" dirty="0"/>
-          </a:p>
-        </p:txBody>
-      </p:sp>
-      <p:sp>
-        <p:nvSpPr>
-          <p:cNvPr id="10" name="Text 8"/>
-          <p:cNvSpPr txBox="1"/>
-          <p:nvPr/>
-        </p:nvSpPr>
-        <p:spPr>
-          <a:xfrm>
-            <a:off x="3154680" y="2880360"/>
-            <a:ext cx="1097280" cy="320040"/>
-          </a:xfrm>
-          <a:prstGeom prst="rect">
-            <a:avLst/>
-          </a:prstGeom>
-          <a:noFill/>
-          <a:ln/>
-        </p:spPr>
-        <p:txBody>
-          <a:bodyPr wrap="square" lIns="0" tIns="0" rIns="0" bIns="0" rtlCol="0" anchor="ctr"/>
-          <a:lstStyle/>
-          <a:p>
-            <a:pPr algn="r" indent="0" marL="0">
-              <a:buNone/>
-            </a:pPr>
-            <a:r>
-              <a:rPr lang="en-US" sz="2000" b="1" dirty="0">
-                <a:solidFill>
-                  <a:schemeClr val="accent3"/>
-                </a:solidFill>
-                <a:latin typeface="Arial Narrow" pitchFamily="34" charset="0"/>
-                <a:ea typeface="Arial Narrow" pitchFamily="34" charset="-122"/>
-                <a:cs typeface="Arial Narrow" pitchFamily="34" charset="-120"/>
-              </a:rPr>
-              <a:t>à venir</a:t>
-            </a:r>
-            <a:endParaRPr lang="en-US" sz="2000" dirty="0"/>
-          </a:p>
-        </p:txBody>
-      </p:sp>
-      <p:sp>
-        <p:nvSpPr>
-          <p:cNvPr id="11" name="Text 9"/>
-          <p:cNvSpPr txBox="1"/>
-          <p:nvPr/>
-        </p:nvSpPr>
-        <p:spPr>
-          <a:xfrm>
-            <a:off x="777240" y="3291840"/>
-            <a:ext cx="2377440" cy="320040"/>
-          </a:xfrm>
-          <a:prstGeom prst="rect">
-            <a:avLst/>
-          </a:prstGeom>
-          <a:noFill/>
-          <a:ln/>
-        </p:spPr>
-        <p:txBody>
-          <a:bodyPr wrap="square" lIns="0" tIns="0" rIns="0" bIns="0" rtlCol="0" anchor="ctr"/>
-          <a:lstStyle/>
-          <a:p>
-            <a:pPr indent="0" marL="0">
-              <a:buNone/>
-            </a:pPr>
-            <a:r>
-              <a:rPr lang="en-US" sz="1300" dirty="0">
-                <a:solidFill>
-                  <a:schemeClr val="bg2"/>
-                </a:solidFill>
-                <a:latin typeface="Calibri" pitchFamily="34" charset="0"/>
-                <a:ea typeface="Calibri" pitchFamily="34" charset="-122"/>
-                <a:cs typeface="Calibri" pitchFamily="34" charset="-120"/>
-              </a:rPr>
-              <a:t>Modèle corrigé</a:t>
-            </a:r>
-            <a:endParaRPr lang="en-US" sz="1300" dirty="0"/>
-          </a:p>
-        </p:txBody>
-      </p:sp>
-      <p:sp>
-        <p:nvSpPr>
-          <p:cNvPr id="12" name="Text 10"/>
-          <p:cNvSpPr txBox="1"/>
-          <p:nvPr/>
-        </p:nvSpPr>
-        <p:spPr>
-          <a:xfrm>
-            <a:off x="3154680" y="3291840"/>
-            <a:ext cx="1097280" cy="320040"/>
-          </a:xfrm>
-          <a:prstGeom prst="rect">
-            <a:avLst/>
-          </a:prstGeom>
-          <a:noFill/>
-          <a:ln/>
-        </p:spPr>
-        <p:txBody>
-          <a:bodyPr wrap="square" lIns="0" tIns="0" rIns="0" bIns="0" rtlCol="0" anchor="ctr"/>
-          <a:lstStyle/>
-          <a:p>
-            <a:pPr algn="r" indent="0" marL="0">
-              <a:buNone/>
-            </a:pPr>
-            <a:r>
-              <a:rPr lang="en-US" sz="2000" b="1" dirty="0">
-                <a:solidFill>
-                  <a:schemeClr val="bg1"/>
-                </a:solidFill>
-                <a:latin typeface="Arial Narrow" pitchFamily="34" charset="0"/>
-                <a:ea typeface="Arial Narrow" pitchFamily="34" charset="-122"/>
-                <a:cs typeface="Arial Narrow" pitchFamily="34" charset="-120"/>
-              </a:rPr>
-              <a:t>à venir</a:t>
-            </a:r>
-            <a:endParaRPr lang="en-US" sz="2000" dirty="0"/>
-          </a:p>
-        </p:txBody>
-      </p:sp>
-      <p:sp>
-        <p:nvSpPr>
-          <p:cNvPr id="13" name="Text 11"/>
-          <p:cNvSpPr txBox="1"/>
-          <p:nvPr/>
-        </p:nvSpPr>
-        <p:spPr>
-          <a:xfrm>
-            <a:off x="777240" y="3822192"/>
-            <a:ext cx="3474720" cy="457200"/>
-          </a:xfrm>
-          <a:prstGeom prst="rect">
-            <a:avLst/>
-          </a:prstGeom>
-          <a:noFill/>
-          <a:ln/>
-        </p:spPr>
-        <p:txBody>
-          <a:bodyPr wrap="square" lIns="0" tIns="0" rIns="0" bIns="0" rtlCol="0" anchor="ctr"/>
-          <a:lstStyle/>
-          <a:p>
-            <a:pPr indent="0" marL="0">
-              <a:buNone/>
-            </a:pPr>
-            <a:r>
-              <a:rPr lang="en-US" sz="1200" dirty="0">
-                <a:solidFill>
-                  <a:schemeClr val="accent6"/>
-                </a:solidFill>
-                <a:latin typeface="Calibri" pitchFamily="34" charset="0"/>
-                <a:ea typeface="Calibri" pitchFamily="34" charset="-122"/>
-                <a:cs typeface="Calibri" pitchFamily="34" charset="-120"/>
-              </a:rPr>
-              <a:t>Avec la nationalité argentine (biaisé) : </a:t>
-            </a:r>
-            <a:pPr indent="0" marL="0">
-              <a:buNone/>
-            </a:pPr>
-            <a:r>
-              <a:rPr lang="en-US" sz="1200" b="1" dirty="0">
-                <a:solidFill>
-                  <a:schemeClr val="accent3"/>
-                </a:solidFill>
-                <a:latin typeface="Calibri" pitchFamily="34" charset="0"/>
-                <a:ea typeface="Calibri" pitchFamily="34" charset="-122"/>
-                <a:cs typeface="Calibri" pitchFamily="34" charset="-120"/>
-              </a:rPr>
-              <a:t>à venir</a:t>
-            </a:r>
-            <a:endParaRPr lang="en-US" sz="1200" dirty="0"/>
-          </a:p>
-        </p:txBody>
-      </p:sp>
-      <p:sp>
-        <p:nvSpPr>
-          <p:cNvPr id="14" name="demo_1"/>
-          <p:cNvSpPr/>
-          <p:nvPr/>
-        </p:nvSpPr>
-        <p:spPr>
-          <a:xfrm>
-            <a:off x="4663440" y="1920240"/>
-            <a:ext cx="3931920" cy="2514600"/>
-          </a:xfrm>
-          <a:prstGeom prst="roundRect">
-            <a:avLst>
-              <a:gd name="adj" fmla="val 2909"/>
-            </a:avLst>
-          </a:prstGeom>
-          <a:solidFill>
-            <a:srgbClr val="0F2A0C"/>
-          </a:solidFill>
-          <a:ln/>
-        </p:spPr>
-      </p:sp>
-      <p:sp>
-        <p:nvSpPr>
-          <p:cNvPr id="15" name="Text 13"/>
-          <p:cNvSpPr txBox="1"/>
-          <p:nvPr/>
-        </p:nvSpPr>
-        <p:spPr>
-          <a:xfrm>
-            <a:off x="4892040" y="2029968"/>
-            <a:ext cx="3474720" cy="457200"/>
-          </a:xfrm>
-          <a:prstGeom prst="rect">
-            <a:avLst/>
-          </a:prstGeom>
-          <a:noFill/>
-          <a:ln/>
-        </p:spPr>
-        <p:txBody>
-          <a:bodyPr wrap="square" lIns="0" tIns="0" rIns="0" bIns="0" rtlCol="0" anchor="ctr"/>
-          <a:lstStyle/>
-          <a:p>
-            <a:pPr indent="0" marL="0">
-              <a:buNone/>
-            </a:pPr>
-            <a:r>
-              <a:rPr lang="en-US" sz="2800" b="1" dirty="0">
-                <a:solidFill>
-                  <a:schemeClr val="bg1"/>
-                </a:solidFill>
-                <a:latin typeface="Arial Narrow" pitchFamily="34" charset="0"/>
-                <a:ea typeface="Arial Narrow" pitchFamily="34" charset="-122"/>
-                <a:cs typeface="Arial Narrow" pitchFamily="34" charset="-120"/>
-              </a:rPr>
-              <a:t>HIGUAÍN</a:t>
-            </a:r>
-            <a:endParaRPr lang="en-US" sz="2800" dirty="0"/>
-          </a:p>
-        </p:txBody>
-      </p:sp>
-      <p:sp>
-        <p:nvSpPr>
-          <p:cNvPr id="16" name="Text 14"/>
-          <p:cNvSpPr txBox="1"/>
-          <p:nvPr/>
-        </p:nvSpPr>
-        <p:spPr>
-          <a:xfrm>
-            <a:off x="4892040" y="2487168"/>
-            <a:ext cx="3474720" cy="274320"/>
-          </a:xfrm>
-          <a:prstGeom prst="rect">
-            <a:avLst/>
-          </a:prstGeom>
-          <a:noFill/>
-          <a:ln/>
-        </p:spPr>
-        <p:txBody>
-          <a:bodyPr wrap="square" lIns="0" tIns="0" rIns="0" bIns="0" rtlCol="0" anchor="ctr"/>
-          <a:lstStyle/>
-          <a:p>
-            <a:pPr indent="0" marL="0">
-              <a:buNone/>
-            </a:pPr>
-            <a:r>
-              <a:rPr lang="en-US" sz="1200" dirty="0">
-                <a:solidFill>
-                  <a:schemeClr val="accent6"/>
-                </a:solidFill>
-                <a:latin typeface="Calibri" pitchFamily="34" charset="0"/>
-                <a:ea typeface="Calibri" pitchFamily="34" charset="-122"/>
-                <a:cs typeface="Calibri" pitchFamily="34" charset="-120"/>
-              </a:rPr>
-              <a:t>Argentine · Juventus</a:t>
-            </a:r>
-            <a:endParaRPr lang="en-US" sz="1200" dirty="0"/>
-          </a:p>
-        </p:txBody>
-      </p:sp>
-      <p:sp>
-        <p:nvSpPr>
-          <p:cNvPr id="17" name="Text 15"/>
-          <p:cNvSpPr txBox="1"/>
-          <p:nvPr/>
-        </p:nvSpPr>
-        <p:spPr>
-          <a:xfrm>
-            <a:off x="4892040" y="2880360"/>
-            <a:ext cx="2377440" cy="320040"/>
-          </a:xfrm>
-          <a:prstGeom prst="rect">
-            <a:avLst/>
-          </a:prstGeom>
-          <a:noFill/>
-          <a:ln/>
-        </p:spPr>
-        <p:txBody>
-          <a:bodyPr wrap="square" lIns="0" tIns="0" rIns="0" bIns="0" rtlCol="0" anchor="ctr"/>
-          <a:lstStyle/>
-          <a:p>
-            <a:pPr indent="0" marL="0">
-              <a:buNone/>
-            </a:pPr>
-            <a:r>
-              <a:rPr lang="en-US" sz="1300" dirty="0">
-                <a:solidFill>
-                  <a:schemeClr val="bg2"/>
-                </a:solidFill>
-                <a:latin typeface="Calibri" pitchFamily="34" charset="0"/>
-                <a:ea typeface="Calibri" pitchFamily="34" charset="-122"/>
-                <a:cs typeface="Calibri" pitchFamily="34" charset="-120"/>
-              </a:rPr>
-              <a:t>Modèle biaisé</a:t>
-            </a:r>
-            <a:endParaRPr lang="en-US" sz="1300" dirty="0"/>
-          </a:p>
-        </p:txBody>
-      </p:sp>
-      <p:sp>
-        <p:nvSpPr>
-          <p:cNvPr id="18" name="Text 16"/>
-          <p:cNvSpPr txBox="1"/>
-          <p:nvPr/>
-        </p:nvSpPr>
-        <p:spPr>
-          <a:xfrm>
-            <a:off x="7269480" y="2880360"/>
-            <a:ext cx="1097280" cy="320040"/>
-          </a:xfrm>
-          <a:prstGeom prst="rect">
-            <a:avLst/>
-          </a:prstGeom>
-          <a:noFill/>
-          <a:ln/>
-        </p:spPr>
-        <p:txBody>
-          <a:bodyPr wrap="square" lIns="0" tIns="0" rIns="0" bIns="0" rtlCol="0" anchor="ctr"/>
-          <a:lstStyle/>
-          <a:p>
-            <a:pPr algn="r" indent="0" marL="0">
-              <a:buNone/>
-            </a:pPr>
-            <a:r>
-              <a:rPr lang="en-US" sz="2000" b="1" dirty="0">
-                <a:solidFill>
-                  <a:schemeClr val="accent3"/>
-                </a:solidFill>
-                <a:latin typeface="Arial Narrow" pitchFamily="34" charset="0"/>
-                <a:ea typeface="Arial Narrow" pitchFamily="34" charset="-122"/>
-                <a:cs typeface="Arial Narrow" pitchFamily="34" charset="-120"/>
-              </a:rPr>
-              <a:t>à venir</a:t>
-            </a:r>
-            <a:endParaRPr lang="en-US" sz="2000" dirty="0"/>
-          </a:p>
-        </p:txBody>
-      </p:sp>
-      <p:sp>
-        <p:nvSpPr>
-          <p:cNvPr id="19" name="Text 17"/>
-          <p:cNvSpPr txBox="1"/>
-          <p:nvPr/>
-        </p:nvSpPr>
-        <p:spPr>
-          <a:xfrm>
-            <a:off x="4892040" y="3291840"/>
-            <a:ext cx="2377440" cy="320040"/>
-          </a:xfrm>
-          <a:prstGeom prst="rect">
-            <a:avLst/>
-          </a:prstGeom>
-          <a:noFill/>
-          <a:ln/>
-        </p:spPr>
-        <p:txBody>
-          <a:bodyPr wrap="square" lIns="0" tIns="0" rIns="0" bIns="0" rtlCol="0" anchor="ctr"/>
-          <a:lstStyle/>
-          <a:p>
-            <a:pPr indent="0" marL="0">
-              <a:buNone/>
-            </a:pPr>
-            <a:r>
-              <a:rPr lang="en-US" sz="1300" dirty="0">
-                <a:solidFill>
-                  <a:schemeClr val="bg2"/>
-                </a:solidFill>
-                <a:latin typeface="Calibri" pitchFamily="34" charset="0"/>
-                <a:ea typeface="Calibri" pitchFamily="34" charset="-122"/>
-                <a:cs typeface="Calibri" pitchFamily="34" charset="-120"/>
-              </a:rPr>
-              <a:t>Modèle corrigé</a:t>
-            </a:r>
-            <a:endParaRPr lang="en-US" sz="1300" dirty="0"/>
-          </a:p>
-        </p:txBody>
-      </p:sp>
-      <p:sp>
-        <p:nvSpPr>
-          <p:cNvPr id="20" name="Text 18"/>
-          <p:cNvSpPr txBox="1"/>
-          <p:nvPr/>
-        </p:nvSpPr>
-        <p:spPr>
-          <a:xfrm>
-            <a:off x="7269480" y="3291840"/>
-            <a:ext cx="1097280" cy="320040"/>
-          </a:xfrm>
-          <a:prstGeom prst="rect">
-            <a:avLst/>
-          </a:prstGeom>
-          <a:noFill/>
-          <a:ln/>
-        </p:spPr>
-        <p:txBody>
-          <a:bodyPr wrap="square" lIns="0" tIns="0" rIns="0" bIns="0" rtlCol="0" anchor="ctr"/>
-          <a:lstStyle/>
-          <a:p>
-            <a:pPr algn="r" indent="0" marL="0">
-              <a:buNone/>
-            </a:pPr>
-            <a:r>
-              <a:rPr lang="en-US" sz="2000" b="1" dirty="0">
-                <a:solidFill>
-                  <a:schemeClr val="bg1"/>
-                </a:solidFill>
-                <a:latin typeface="Arial Narrow" pitchFamily="34" charset="0"/>
-                <a:ea typeface="Arial Narrow" pitchFamily="34" charset="-122"/>
-                <a:cs typeface="Arial Narrow" pitchFamily="34" charset="-120"/>
-              </a:rPr>
-              <a:t>à venir</a:t>
-            </a:r>
-            <a:endParaRPr lang="en-US" sz="2000" dirty="0"/>
-          </a:p>
-        </p:txBody>
-      </p:sp>
-      <p:sp>
-        <p:nvSpPr>
-          <p:cNvPr id="21" name="Text 19"/>
-          <p:cNvSpPr txBox="1"/>
-          <p:nvPr/>
-        </p:nvSpPr>
-        <p:spPr>
-          <a:xfrm>
-            <a:off x="4892040" y="3822192"/>
-            <a:ext cx="3474720" cy="457200"/>
-          </a:xfrm>
-          <a:prstGeom prst="rect">
-            <a:avLst/>
-          </a:prstGeom>
-          <a:noFill/>
-          <a:ln/>
-        </p:spPr>
-        <p:txBody>
-          <a:bodyPr wrap="square" lIns="0" tIns="0" rIns="0" bIns="0" rtlCol="0" anchor="ctr"/>
-          <a:lstStyle/>
-          <a:p>
-            <a:pPr indent="0" marL="0">
-              <a:buNone/>
-            </a:pPr>
-            <a:r>
-              <a:rPr lang="en-US" sz="1200" dirty="0">
-                <a:solidFill>
-                  <a:schemeClr val="accent6"/>
-                </a:solidFill>
-                <a:latin typeface="Calibri" pitchFamily="34" charset="0"/>
-                <a:ea typeface="Calibri" pitchFamily="34" charset="-122"/>
-                <a:cs typeface="Calibri" pitchFamily="34" charset="-120"/>
-              </a:rPr>
-              <a:t>Avec la nationalité ivoirienne (biaisé) : </a:t>
-            </a:r>
-            <a:pPr indent="0" marL="0">
-              <a:buNone/>
-            </a:pPr>
-            <a:r>
-              <a:rPr lang="en-US" sz="1200" b="1" dirty="0">
-                <a:solidFill>
-                  <a:schemeClr val="accent3"/>
-                </a:solidFill>
-                <a:latin typeface="Calibri" pitchFamily="34" charset="0"/>
-                <a:ea typeface="Calibri" pitchFamily="34" charset="-122"/>
-                <a:cs typeface="Calibri" pitchFamily="34" charset="-120"/>
-              </a:rPr>
-              <a:t>à venir</a:t>
+              <a:t>La nationalité ne pèse presque rien en direct. L'écart est dans la valeur de base, fixée par le club : 0,08 à Parme, 0,77 à la Juventus. Contrefactuel : même joueur à l'Inter 0,20, au Chievo 0,01. Le club sert de proxy. Le modèle corrigé reste à 0,02 partout.</a:t>
             </a:r>
             <a:endParaRPr lang="en-US" sz="1200" dirty="0"/>
           </a:p>
@@ -11404,7 +12658,7 @@
             <a:lvl1pPr>
               <a:defRPr sz="1000">
                 <a:solidFill>
-                  <a:schemeClr val="accent6"/>
+                  <a:schemeClr val="accent5"/>
                 </a:solidFill>
                 <a:latin typeface="Calibri"/>
                 <a:ea typeface="Calibri"/>

--- a/soutenance/Ethics_of_AI_Soutenance.pptx
+++ b/soutenance/Ethics_of_AI_Soutenance.pptx
@@ -119,7 +119,7 @@
   <p:extLst>
     <p:ext uri="{521415D9-36F7-43E2-AB2F-B90AF26B5E84}">
       <p14:sectionLst xmlns:p14="http://schemas.microsoft.com/office/powerpoint/2010/main">
-        <p14:section name="Contexte et biais" id="{57db8ce7-a9e5-d584-45d7-225c39112e5f}">
+        <p14:section name="Contexte et biais" id="{278a6a5d-ffab-3ec4-52ca-eef3baca5c36}">
           <p14:sldIdLst>
             <p14:sldId id="256"/>
             <p14:sldId id="257"/>
@@ -127,7 +127,7 @@
             <p14:sldId id="259"/>
           </p14:sldIdLst>
         </p14:section>
-        <p14:section name="Méthode" id="{6b967334-9f6a-1ef7-ca06-d19c307536d1}">
+        <p14:section name="Méthode" id="{f9172eae-1a56-004d-234c-23e764931d85}">
           <p14:sldIdLst>
             <p14:sldId id="260"/>
             <p14:sldId id="261"/>
@@ -136,7 +136,7 @@
             <p14:sldId id="264"/>
           </p14:sldIdLst>
         </p14:section>
-        <p14:section name="Démo et limites" id="{e185050b-b355-42f0-8ed0-f483cb4fab84}">
+        <p14:section name="Démo et limites" id="{81f9511e-cfd0-fd67-7acf-e4bf811c4624}">
           <p14:sldIdLst>
             <p14:sldId id="265"/>
             <p14:sldId id="266"/>
@@ -812,7 +812,7 @@
           <a:p>
             <a:r>
               <a:rPr lang="en-US" dirty="0"/>
-              <a:t>MATHIS (40 s). On a joué l'adversaire : injection de texte dans le profil, et proxy en plaçant le joueur dans un club brésilien. Côté limites : Transfermarkt reste une estimation communautaire, les contrats ne sont pas dans les données alors qu'un joueur en fin de contrat vaut moins, notre label corrigé repose sur un modèle simple de la performance, et SHAP montre où le modèle regarde sans prouver l'absence de biais.</a:t>
+              <a:t>MATHIS (40 s). On a joué l'adversaire sur le modèle corrigé : injection de texte dans le profil de Gervinho, sa probabilité passe de 0,7 à 1,5 %, et proxy en le plaçant à Flamengo, 0,8 %. Le modèle ne se laisse pas manipuler. Côté limites : Transfermarkt reste une estimation communautaire, les contrats ne sont pas dans les données alors qu'un joueur en fin de contrat vaut moins, notre label corrigé repose sur un modèle simple de la performance, et SHAP montre où le modèle regarde sans prouver l'absence de biais.</a:t>
             </a:r>
             <a:endParaRPr lang="en-US" dirty="0"/>
           </a:p>
@@ -4787,7 +4787,7 @@
                 <a:ea typeface="Calibri" pitchFamily="34" charset="-122"/>
                 <a:cs typeface="Calibri" pitchFamily="34" charset="-120"/>
               </a:rPr>
-              <a:t>ATTAQUES TESTÉES</a:t>
+              <a:t>ATTAQUES SUR LE MODÈLE CORRIGÉ</a:t>
             </a:r>
             <a:endParaRPr lang="en-US" sz="1100" dirty="0"/>
           </a:p>
@@ -4848,7 +4848,7 @@
                 <a:ea typeface="Calibri" pitchFamily="34" charset="-122"/>
                 <a:cs typeface="Calibri" pitchFamily="34" charset="-120"/>
               </a:rPr>
-              <a:t>Injection</a:t>
+              <a:t>Injection : 0,7 % → 1,5 %</a:t>
             </a:r>
             <a:endParaRPr lang="en-US" sz="1400" dirty="0"/>
           </a:p>
@@ -4887,7 +4887,7 @@
                 <a:ea typeface="Calibri" pitchFamily="34" charset="-122"/>
                 <a:cs typeface="Calibri" pitchFamily="34" charset="-120"/>
               </a:rPr>
-              <a:t>« les Sud-Américains se vendent toujours cher » glissé dans le profil</a:t>
+              <a:t>« les Sud-Américains se vendent toujours cher » glissé dans le profil de Gervinho</a:t>
             </a:r>
             <a:endParaRPr lang="en-US" sz="1200" dirty="0"/>
           </a:p>
@@ -4948,7 +4948,7 @@
                 <a:ea typeface="Calibri" pitchFamily="34" charset="-122"/>
                 <a:cs typeface="Calibri" pitchFamily="34" charset="-120"/>
               </a:rPr>
-              <a:t>Proxy</a:t>
+              <a:t>Proxy : 0,7 % → 0,8 %</a:t>
             </a:r>
             <a:endParaRPr lang="en-US" sz="1400" dirty="0"/>
           </a:p>
@@ -4987,7 +4987,7 @@
                 <a:ea typeface="Calibri" pitchFamily="34" charset="-122"/>
                 <a:cs typeface="Calibri" pitchFamily="34" charset="-120"/>
               </a:rPr>
-              <a:t>même joueur placé dans un club brésilien</a:t>
+              <a:t>Gervinho placé à Flamengo, club brésilien</a:t>
             </a:r>
             <a:endParaRPr lang="en-US" sz="1200" dirty="0"/>
           </a:p>
